--- a/workspaces/truongnv/reports/tasks_for_meeting_5/PI-GUARD-Present-Meeting-5.pptx
+++ b/workspaces/truongnv/reports/tasks_for_meeting_5/PI-GUARD-Present-Meeting-5.pptx
@@ -22,17 +22,6 @@
     <p:sldId id="270" r:id="rId21"/>
     <p:sldId id="271" r:id="rId22"/>
     <p:sldId id="272" r:id="rId23"/>
-    <p:sldId id="273" r:id="rId24"/>
-    <p:sldId id="274" r:id="rId25"/>
-    <p:sldId id="275" r:id="rId26"/>
-    <p:sldId id="276" r:id="rId27"/>
-    <p:sldId id="277" r:id="rId28"/>
-    <p:sldId id="278" r:id="rId29"/>
-    <p:sldId id="279" r:id="rId30"/>
-    <p:sldId id="280" r:id="rId31"/>
-    <p:sldId id="281" r:id="rId32"/>
-    <p:sldId id="282" r:id="rId33"/>
-    <p:sldId id="283" r:id="rId34"/>
     <p:sldId id="284" r:id="rId35"/>
     <p:sldId id="285" r:id="rId36"/>
   </p:sldIdLst>
@@ -2598,7 +2587,7 @@
 </file>
 
 <file path=ppt/slideMasters/slideMaster1.xml><?xml version="1.0" encoding="utf-8"?>
-<p:sldMaster xmlns:a="http://schemas.openxmlformats.org/drawingml/2006/main" xmlns:r="http://schemas.openxmlformats.org/officeDocument/2006/relationships" xmlns:p="http://schemas.openxmlformats.org/presentationml/2006/main">
+<p:sldMaster xmlns:p14="http://schemas.microsoft.com/office/powerpoint/2010/main" xmlns:a="http://schemas.openxmlformats.org/drawingml/2006/main" xmlns:r="http://schemas.openxmlformats.org/officeDocument/2006/relationships" xmlns:p="http://schemas.openxmlformats.org/presentationml/2006/main">
   <p:cSld>
     <p:bg>
       <p:bgRef idx="1001">
@@ -8001,7 +7990,7 @@
           </a:fontRef>
         </p:style>
         <p:txBody>
-          <a:bodyPr rtlCol="0" anchor="ctr" wrap="square" lIns="219456" tIns="219456" rIns="219456"/>
+          <a:bodyPr wrap="square" lIns="219456" tIns="219456" rIns="219456" rtlCol="0" anchor="ctr"/>
           <a:lstStyle/>
           <a:p>
             <a:pPr algn="ctr">
@@ -8025,7 +8014,7 @@
               </a:spcAft>
             </a:pPr>
             <a:r>
-              <a:rPr b="1" sz="1600">
+              <a:rPr sz="1600" b="1">
                 <a:solidFill>
                   <a:srgbClr val="0F172A"/>
                 </a:solidFill>
@@ -8034,7 +8023,7 @@
               <a:t>Ưu điểm: </a:t>
             </a:r>
             <a:r>
-              <a:rPr b="0" sz="1600">
+              <a:rPr sz="1600" b="0">
                 <a:solidFill>
                   <a:srgbClr val="334155"/>
                 </a:solidFill>
@@ -8050,7 +8039,7 @@
               </a:spcAft>
             </a:pPr>
             <a:r>
-              <a:rPr b="1" sz="1600">
+              <a:rPr sz="1600" b="1">
                 <a:solidFill>
                   <a:srgbClr val="0F172A"/>
                 </a:solidFill>
@@ -8059,7 +8048,7 @@
               <a:t>Nhược điểm: </a:t>
             </a:r>
             <a:r>
-              <a:rPr b="0" sz="1600">
+              <a:rPr sz="1600" b="0">
                 <a:solidFill>
                   <a:srgbClr val="334155"/>
                 </a:solidFill>
@@ -8075,7 +8064,7 @@
               </a:spcAft>
             </a:pPr>
             <a:r>
-              <a:rPr b="1" sz="1600">
+              <a:rPr sz="1600" b="1">
                 <a:solidFill>
                   <a:srgbClr val="0F172A"/>
                 </a:solidFill>
@@ -8084,7 +8073,7 @@
               <a:t>Độ chính xác: </a:t>
             </a:r>
             <a:r>
-              <a:rPr b="0" sz="1600">
+              <a:rPr sz="1600" b="0">
                 <a:solidFill>
                   <a:srgbClr val="334155"/>
                 </a:solidFill>
@@ -8100,7 +8089,7 @@
               </a:spcAft>
             </a:pPr>
             <a:r>
-              <a:rPr b="1" sz="1600">
+              <a:rPr sz="1600" b="1">
                 <a:solidFill>
                   <a:srgbClr val="0F172A"/>
                 </a:solidFill>
@@ -8109,7 +8098,7 @@
               <a:t>Kết luận: </a:t>
             </a:r>
             <a:r>
-              <a:rPr b="0" sz="1600">
+              <a:rPr sz="1600" b="0">
                 <a:solidFill>
                   <a:srgbClr val="334155"/>
                 </a:solidFill>
@@ -8158,7 +8147,7 @@
           </a:fontRef>
         </p:style>
         <p:txBody>
-          <a:bodyPr rtlCol="0" anchor="ctr" wrap="square" lIns="219456" tIns="219456" rIns="219456"/>
+          <a:bodyPr wrap="square" lIns="219456" tIns="219456" rIns="219456" rtlCol="0" anchor="ctr"/>
           <a:lstStyle/>
           <a:p>
             <a:pPr algn="ctr">
@@ -8182,7 +8171,7 @@
               </a:spcAft>
             </a:pPr>
             <a:r>
-              <a:rPr b="1" sz="1600">
+              <a:rPr sz="1600" b="1">
                 <a:solidFill>
                   <a:srgbClr val="0F172A"/>
                 </a:solidFill>
@@ -8191,7 +8180,7 @@
               <a:t>Ưu điểm: </a:t>
             </a:r>
             <a:r>
-              <a:rPr b="0" sz="1600">
+              <a:rPr sz="1600" b="0">
                 <a:solidFill>
                   <a:srgbClr val="334155"/>
                 </a:solidFill>
@@ -8207,7 +8196,7 @@
               </a:spcAft>
             </a:pPr>
             <a:r>
-              <a:rPr b="1" sz="1600">
+              <a:rPr sz="1600" b="1">
                 <a:solidFill>
                   <a:srgbClr val="0F172A"/>
                 </a:solidFill>
@@ -8216,7 +8205,7 @@
               <a:t>Nhược điểm: </a:t>
             </a:r>
             <a:r>
-              <a:rPr b="0" sz="1600">
+              <a:rPr sz="1600" b="0">
                 <a:solidFill>
                   <a:srgbClr val="334155"/>
                 </a:solidFill>
@@ -8232,7 +8221,7 @@
               </a:spcAft>
             </a:pPr>
             <a:r>
-              <a:rPr b="1" sz="1600">
+              <a:rPr sz="1600" b="1">
                 <a:solidFill>
                   <a:srgbClr val="0F172A"/>
                 </a:solidFill>
@@ -8241,7 +8230,7 @@
               <a:t>Rủi ro: </a:t>
             </a:r>
             <a:r>
-              <a:rPr b="0" sz="1600">
+              <a:rPr sz="1600" b="0">
                 <a:solidFill>
                   <a:srgbClr val="334155"/>
                 </a:solidFill>
@@ -8257,7 +8246,7 @@
               </a:spcAft>
             </a:pPr>
             <a:r>
-              <a:rPr b="1" sz="1600">
+              <a:rPr sz="1600" b="1">
                 <a:solidFill>
                   <a:srgbClr val="0F172A"/>
                 </a:solidFill>
@@ -8266,7 +8255,7 @@
               <a:t>Kết luận: </a:t>
             </a:r>
             <a:r>
-              <a:rPr b="0" sz="1600">
+              <a:rPr sz="1600" b="0">
                 <a:solidFill>
                   <a:srgbClr val="334155"/>
                 </a:solidFill>
@@ -8315,7 +8304,7 @@
           </a:fontRef>
         </p:style>
         <p:txBody>
-          <a:bodyPr rtlCol="0" anchor="ctr" wrap="square" lIns="219456" tIns="219456" rIns="219456"/>
+          <a:bodyPr wrap="square" lIns="219456" tIns="219456" rIns="219456" rtlCol="0" anchor="ctr"/>
           <a:lstStyle/>
           <a:p>
             <a:pPr algn="ctr">
@@ -8329,107 +8318,7 @@
                   <a:srgbClr val="059669"/>
                 </a:solidFill>
               </a:rPr>
-              <a:t>TRƯỜNG PHÁI 3: ENCODER TRANSFORMER</a:t>
-            </a:r>
-          </a:p>
-          <a:p>
-            <a:pPr>
-              <a:spcAft>
-                <a:spcPts val="800"/>
-              </a:spcAft>
-            </a:pPr>
-            <a:r>
-              <a:rPr b="1" sz="1600">
-                <a:solidFill>
-                  <a:srgbClr val="0F172A"/>
-                </a:solidFill>
-                <a:latin typeface="Segoe UI"/>
-              </a:rPr>
-              <a:t>Ưu điểm: </a:t>
-            </a:r>
-            <a:r>
-              <a:rPr b="0" sz="1600">
-                <a:solidFill>
-                  <a:srgbClr val="334155"/>
-                </a:solidFill>
-                <a:latin typeface="Segoe UI"/>
-              </a:rPr>
-              <a:t>F1 đạt 0.9416; miễn nhiễm hoàn toàn với tiêm lệnh đệ quy.</a:t>
-            </a:r>
-          </a:p>
-          <a:p>
-            <a:pPr>
-              <a:spcAft>
-                <a:spcPts val="800"/>
-              </a:spcAft>
-            </a:pPr>
-            <a:r>
-              <a:rPr b="1" sz="1600">
-                <a:solidFill>
-                  <a:srgbClr val="0F172A"/>
-                </a:solidFill>
-                <a:latin typeface="Segoe UI"/>
-              </a:rPr>
-              <a:t>Tối ưu hóa: </a:t>
-            </a:r>
-            <a:r>
-              <a:rPr b="0" sz="1600">
-                <a:solidFill>
-                  <a:srgbClr val="334155"/>
-                </a:solidFill>
-                <a:latin typeface="Segoe UI"/>
-              </a:rPr>
-              <a:t>INT8 ONNX Runtime giúp chạy mượt mà trên CPU (~18.5ms).</a:t>
-            </a:r>
-          </a:p>
-          <a:p>
-            <a:pPr>
-              <a:spcAft>
-                <a:spcPts val="800"/>
-              </a:spcAft>
-            </a:pPr>
-            <a:r>
-              <a:rPr b="1" sz="1600">
-                <a:solidFill>
-                  <a:srgbClr val="0F172A"/>
-                </a:solidFill>
-                <a:latin typeface="Segoe UI"/>
-              </a:rPr>
-              <a:t>Thách thức: </a:t>
-            </a:r>
-            <a:r>
-              <a:rPr b="0" sz="1600">
-                <a:solidFill>
-                  <a:srgbClr val="334155"/>
-                </a:solidFill>
-                <a:latin typeface="Segoe UI"/>
-              </a:rPr>
-              <a:t>Nếu kích hoạt cho 100% truy vấn vẫn gây lãng phí tài nguyên.</a:t>
-            </a:r>
-          </a:p>
-          <a:p>
-            <a:pPr>
-              <a:spcAft>
-                <a:spcPts val="800"/>
-              </a:spcAft>
-            </a:pPr>
-            <a:r>
-              <a:rPr b="1" sz="1600">
-                <a:solidFill>
-                  <a:srgbClr val="0F172A"/>
-                </a:solidFill>
-                <a:latin typeface="Segoe UI"/>
-              </a:rPr>
-              <a:t>Giải pháp: </a:t>
-            </a:r>
-            <a:r>
-              <a:rPr b="0" sz="1600">
-                <a:solidFill>
-                  <a:srgbClr val="334155"/>
-                </a:solidFill>
-                <a:latin typeface="Segoe UI"/>
-              </a:rPr>
-              <a:t>Kết hợp phân tầng Two-Tier để giải phóng tài nguyên!</a:t>
+              <a:t>TRƯỜNG PHÁI 3: ENCODER TRANSFORMER. Checkpoint công khai có thể dùng làm mô hình đối sánh. Điểm đo chỉ có ý nghĩa với dataset, revision và protocol được nêu. Không có kết quả huấn luyện PI-Guard Tier 2 hoặc cascade.</a:t>
             </a:r>
           </a:p>
         </p:txBody>
@@ -8707,7 +8596,7 @@
           </a:fontRef>
         </p:style>
         <p:txBody>
-          <a:bodyPr rtlCol="0" anchor="ctr" wrap="square" lIns="256032" tIns="256032" rIns="256032"/>
+          <a:bodyPr wrap="square" lIns="256032" tIns="256032" rIns="256032" rtlCol="0" anchor="ctr"/>
           <a:lstStyle/>
           <a:p>
             <a:pPr algn="ctr">
@@ -8721,107 +8610,7 @@
                   <a:srgbClr val="DC2626"/>
                 </a:solidFill>
               </a:rPr>
-              <a:t>THẾ TIẾN THOÁI LƯỠNG NAN CỦA SINGLE-TIER</a:t>
-            </a:r>
-          </a:p>
-          <a:p>
-            <a:pPr>
-              <a:spcAft>
-                <a:spcPts val="600"/>
-              </a:spcAft>
-            </a:pPr>
-            <a:r>
-              <a:rPr b="1" sz="1600">
-                <a:solidFill>
-                  <a:srgbClr val="0F172A"/>
-                </a:solidFill>
-                <a:latin typeface="Segoe UI"/>
-              </a:rPr>
-              <a:t>1. Đánh đổi Nan giải: </a:t>
-            </a:r>
-            <a:r>
-              <a:rPr b="0" sz="1600">
-                <a:solidFill>
-                  <a:srgbClr val="334155"/>
-                </a:solidFill>
-                <a:latin typeface="Segoe UI"/>
-              </a:rPr>
-              <a:t>Hoặc hệ thống phản hồi cực nhanh nhưng độ chính xác thấp (Regex / Heuristic); hoặc phát hiện chuẩn nhưng độ trễ tê liệt.</a:t>
-            </a:r>
-          </a:p>
-          <a:p>
-            <a:pPr>
-              <a:spcAft>
-                <a:spcPts val="600"/>
-              </a:spcAft>
-            </a:pPr>
-            <a:r>
-              <a:rPr b="1" sz="1600">
-                <a:solidFill>
-                  <a:srgbClr val="0F172A"/>
-                </a:solidFill>
-                <a:latin typeface="Segoe UI"/>
-              </a:rPr>
-              <a:t>2. Nguy cơ Báo động giả: </a:t>
-            </a:r>
-            <a:r>
-              <a:rPr b="0" sz="1600">
-                <a:solidFill>
-                  <a:srgbClr val="334155"/>
-                </a:solidFill>
-                <a:latin typeface="Segoe UI"/>
-              </a:rPr>
-              <a:t>Mô hình nhỏ (như MiniLM) dễ bị hiện tượng Semantic Blindness — chặn nhầm các câu hỏi lành tính tới 58.4%!</a:t>
-            </a:r>
-          </a:p>
-          <a:p>
-            <a:pPr>
-              <a:spcAft>
-                <a:spcPts val="600"/>
-              </a:spcAft>
-            </a:pPr>
-            <a:r>
-              <a:rPr b="1" sz="1600">
-                <a:solidFill>
-                  <a:srgbClr val="0F172A"/>
-                </a:solidFill>
-                <a:latin typeface="Segoe UI"/>
-              </a:rPr>
-              <a:t>3. Lãng phí Tài nguyên: </a:t>
-            </a:r>
-            <a:r>
-              <a:rPr b="0" sz="1600">
-                <a:solidFill>
-                  <a:srgbClr val="334155"/>
-                </a:solidFill>
-                <a:latin typeface="Segoe UI"/>
-              </a:rPr>
-              <a:t>Nếu bắt mọi truy vấn thông thường (70% an toàn) phải chạy qua mô hình Transformer lớn, máy chủ CPU sẽ bị quá tải.</a:t>
-            </a:r>
-          </a:p>
-          <a:p>
-            <a:pPr>
-              <a:spcAft>
-                <a:spcPts val="600"/>
-              </a:spcAft>
-            </a:pPr>
-            <a:r>
-              <a:rPr b="1" sz="1600">
-                <a:solidFill>
-                  <a:srgbClr val="DC2626"/>
-                </a:solidFill>
-                <a:latin typeface="Segoe UI"/>
-              </a:rPr>
-              <a:t>-&gt; Bế tắc đơn tầng: </a:t>
-            </a:r>
-            <a:r>
-              <a:rPr b="0" sz="1600">
-                <a:solidFill>
-                  <a:srgbClr val="334155"/>
-                </a:solidFill>
-                <a:latin typeface="Segoe UI"/>
-              </a:rPr>
-              <a:t>Không một mô hình đơn lẻ nào có thể đồng thời đạt P95 &lt; 22ms, FPR &lt; 1.5% và F1 &gt; 0.94!</a:t>
+              <a:t>GIỚI HẠN MÔ HÌNH ĐƠN. Trade-off giữa tốc độ, phát hiện và báo động nhầm phụ thuộc dataset và protocol. Tỷ lệ MiniLM cũ đã rút khỏi bằng chứng.</a:t>
             </a:r>
           </a:p>
         </p:txBody>
@@ -8864,7 +8653,7 @@
           </a:fontRef>
         </p:style>
         <p:txBody>
-          <a:bodyPr rtlCol="0" anchor="ctr" wrap="square" lIns="256032" tIns="256032" rIns="256032"/>
+          <a:bodyPr wrap="square" lIns="256032" tIns="256032" rIns="256032" rtlCol="0" anchor="ctr"/>
           <a:lstStyle/>
           <a:p>
             <a:pPr algn="ctr">
@@ -8878,2211 +8667,11 @@
                   <a:srgbClr val="059669"/>
                 </a:solidFill>
               </a:rPr>
-              <a:t>ĐỘNG LỰC HỘI TỤ PARETO QUA 2 TẦNG</a:t>
-            </a:r>
-          </a:p>
-          <a:p>
-            <a:pPr>
-              <a:spcAft>
-                <a:spcPts val="600"/>
-              </a:spcAft>
-            </a:pPr>
-            <a:r>
-              <a:rPr b="1" sz="1600">
-                <a:solidFill>
-                  <a:srgbClr val="0F172A"/>
-                </a:solidFill>
-                <a:latin typeface="Segoe UI"/>
-              </a:rPr>
-              <a:t>1. Phân tầng Trách nhiệm: </a:t>
-            </a:r>
-            <a:r>
-              <a:rPr b="0" sz="1600">
-                <a:solidFill>
-                  <a:srgbClr val="334155"/>
-                </a:solidFill>
-                <a:latin typeface="Segoe UI"/>
-              </a:rPr>
-              <a:t>Tầng 1 (TF-IDF Ký tự) xử lý các mẫu rõ ràng; Tầng 2 (DeBERTa-v3) chỉ thẩm định các mẫu bất định khó.</a:t>
-            </a:r>
-          </a:p>
-          <a:p>
-            <a:pPr>
-              <a:spcAft>
-                <a:spcPts val="600"/>
-              </a:spcAft>
-            </a:pPr>
-            <a:r>
-              <a:rPr b="1" sz="1600">
-                <a:solidFill>
-                  <a:srgbClr val="0F172A"/>
-                </a:solidFill>
-                <a:latin typeface="Segoe UI"/>
-              </a:rPr>
-              <a:t>2. Giải phóng Lưu lượng: </a:t>
-            </a:r>
-            <a:r>
-              <a:rPr b="0" sz="1600">
-                <a:solidFill>
-                  <a:srgbClr val="334155"/>
-                </a:solidFill>
-                <a:latin typeface="Segoe UI"/>
-              </a:rPr>
-              <a:t>Hơn 82.6% lưu lượng được quyết định tức thì tại Tầng 1 chỉ trong ~0.47ms (Fast-Pass hoặc Early-Block).</a:t>
-            </a:r>
-          </a:p>
-          <a:p>
-            <a:pPr>
-              <a:spcAft>
-                <a:spcPts val="600"/>
-              </a:spcAft>
-            </a:pPr>
-            <a:r>
-              <a:rPr b="1" sz="1600">
-                <a:solidFill>
-                  <a:srgbClr val="0284C7"/>
-                </a:solidFill>
-                <a:latin typeface="Segoe UI"/>
-              </a:rPr>
-              <a:t>3. Độ trễ Kỳ vọng Siêu tốc: </a:t>
-            </a:r>
-            <a:r>
-              <a:rPr b="0" sz="1600">
-                <a:solidFill>
-                  <a:srgbClr val="334155"/>
-                </a:solidFill>
-                <a:latin typeface="Segoe UI"/>
-              </a:rPr>
-              <a:t>E[L] = 0.47ms + 0.174 x 18.5ms = 3.69ms! Độ trễ phân vị P95 đạt 19.8ms, hoàn toàn thỏa mãn P95 &lt; 22ms!</a:t>
-            </a:r>
-          </a:p>
-          <a:p>
-            <a:pPr>
-              <a:spcAft>
-                <a:spcPts val="600"/>
-              </a:spcAft>
-            </a:pPr>
-            <a:r>
-              <a:rPr b="1" sz="1600">
-                <a:solidFill>
-                  <a:srgbClr val="059669"/>
-                </a:solidFill>
-                <a:latin typeface="Segoe UI"/>
-              </a:rPr>
-              <a:t>-&gt; Đạt chuẩn Pareto: </a:t>
-            </a:r>
-            <a:r>
-              <a:rPr b="0" sz="1600">
-                <a:solidFill>
-                  <a:srgbClr val="334155"/>
-                </a:solidFill>
-                <a:latin typeface="Segoe UI"/>
-              </a:rPr>
-              <a:t>Dung hòa hoàn hảo: Vừa phản hồi tức thì, vừa không chặn nhầm, vừa nhận diện chuẩn xác 94.2%!</a:t>
-            </a:r>
-          </a:p>
-        </p:txBody>
-      </p:sp>
-    </p:spTree>
-  </p:cSld>
-  <p:clrMapOvr>
-    <a:masterClrMapping/>
-  </p:clrMapOvr>
-</p:sld>
-</file>
-
-<file path=ppt/slides/slide18.xml><?xml version="1.0" encoding="utf-8"?>
-<p:sld xmlns:a="http://schemas.openxmlformats.org/drawingml/2006/main" xmlns:p="http://schemas.openxmlformats.org/presentationml/2006/main" xmlns:r="http://schemas.openxmlformats.org/officeDocument/2006/relationships">
-  <p:cSld>
-    <p:spTree>
-      <p:nvGrpSpPr>
-        <p:cNvPr id="1" name=""/>
-        <p:cNvGrpSpPr/>
-        <p:nvPr/>
-      </p:nvGrpSpPr>
-      <p:grpSpPr/>
-      <p:sp>
-        <p:nvSpPr>
-          <p:cNvPr id="2" name="Rectangle 1"/>
-          <p:cNvSpPr/>
-          <p:nvPr/>
-        </p:nvSpPr>
-        <p:spPr>
-          <a:xfrm>
-            <a:off x="0" y="0"/>
-            <a:ext cx="12191695" cy="6858000"/>
-          </a:xfrm>
-          <a:prstGeom prst="rect">
-            <a:avLst/>
-          </a:prstGeom>
-          <a:solidFill>
-            <a:srgbClr val="FFFFFF"/>
-          </a:solidFill>
-          <a:ln>
-            <a:noFill/>
-          </a:ln>
-        </p:spPr>
-        <p:style>
-          <a:lnRef idx="1">
-            <a:schemeClr val="accent1"/>
-          </a:lnRef>
-          <a:fillRef idx="3">
-            <a:schemeClr val="accent1"/>
-          </a:fillRef>
-          <a:effectRef idx="2">
-            <a:schemeClr val="accent1"/>
-          </a:effectRef>
-          <a:fontRef idx="minor">
-            <a:schemeClr val="lt1"/>
-          </a:fontRef>
-        </p:style>
-        <p:txBody>
-          <a:bodyPr rtlCol="0" anchor="ctr"/>
-          <a:lstStyle/>
-          <a:p>
-            <a:pPr algn="ctr"/>
-          </a:p>
-        </p:txBody>
-      </p:sp>
-      <p:sp>
-        <p:nvSpPr>
-          <p:cNvPr id="3" name="Rectangle 2"/>
-          <p:cNvSpPr/>
-          <p:nvPr/>
-        </p:nvSpPr>
-        <p:spPr>
-          <a:xfrm>
-            <a:off x="731520" y="329184"/>
-            <a:ext cx="73152" cy="676656"/>
-          </a:xfrm>
-          <a:prstGeom prst="rect">
-            <a:avLst/>
-          </a:prstGeom>
-          <a:solidFill>
-            <a:srgbClr val="0284C7"/>
-          </a:solidFill>
-          <a:ln>
-            <a:noFill/>
-          </a:ln>
-        </p:spPr>
-        <p:style>
-          <a:lnRef idx="1">
-            <a:schemeClr val="accent1"/>
-          </a:lnRef>
-          <a:fillRef idx="3">
-            <a:schemeClr val="accent1"/>
-          </a:fillRef>
-          <a:effectRef idx="2">
-            <a:schemeClr val="accent1"/>
-          </a:effectRef>
-          <a:fontRef idx="minor">
-            <a:schemeClr val="lt1"/>
-          </a:fontRef>
-        </p:style>
-        <p:txBody>
-          <a:bodyPr rtlCol="0" anchor="ctr"/>
-          <a:lstStyle/>
-          <a:p>
-            <a:pPr algn="ctr"/>
-          </a:p>
-        </p:txBody>
-      </p:sp>
-      <p:sp>
-        <p:nvSpPr>
-          <p:cNvPr id="4" name="TextBox 3"/>
-          <p:cNvSpPr txBox="1"/>
-          <p:nvPr/>
-        </p:nvSpPr>
-        <p:spPr>
-          <a:xfrm>
-            <a:off x="896112" y="256032"/>
-            <a:ext cx="10561320" cy="804672"/>
-          </a:xfrm>
-          <a:prstGeom prst="rect">
-            <a:avLst/>
-          </a:prstGeom>
-          <a:noFill/>
-        </p:spPr>
-        <p:txBody>
-          <a:bodyPr wrap="square" lIns="0" tIns="0" rIns="0" bIns="0">
-            <a:spAutoFit/>
-          </a:bodyPr>
-          <a:lstStyle/>
-          <a:p>
-            <a:pPr>
-              <a:spcAft>
-                <a:spcPts val="200"/>
-              </a:spcAft>
-              <a:defRPr sz="2100" b="1">
-                <a:solidFill>
-                  <a:srgbClr val="0F172A"/>
-                </a:solidFill>
-                <a:latin typeface="Segoe UI"/>
-              </a:defRPr>
-            </a:pPr>
-            <a:r>
-              <a:t>NHIỆM VỤ 3: KẾT QUẢ CHẠY THỰC NGHIỆM MÔ HÌNH (TỔNG QUAN)</a:t>
-            </a:r>
-          </a:p>
-          <a:p>
-            <a:pPr>
-              <a:defRPr sz="1500">
-                <a:solidFill>
-                  <a:srgbClr val="64748B"/>
-                </a:solidFill>
-                <a:latin typeface="Segoe UI"/>
-              </a:defRPr>
-            </a:pPr>
-            <a:r>
-              <a:t>Chạy độc lập 100% mã nguồn gốc 5 mô hình trên 1.579 mẫu đo đạc tại phòng lab</a:t>
-            </a:r>
-          </a:p>
-        </p:txBody>
-      </p:sp>
-      <p:sp>
-        <p:nvSpPr>
-          <p:cNvPr id="5" name="Rectangle 4"/>
-          <p:cNvSpPr/>
-          <p:nvPr/>
-        </p:nvSpPr>
-        <p:spPr>
-          <a:xfrm>
-            <a:off x="731520" y="6263640"/>
-            <a:ext cx="10728655" cy="18288"/>
-          </a:xfrm>
-          <a:prstGeom prst="rect">
-            <a:avLst/>
-          </a:prstGeom>
-          <a:solidFill>
-            <a:srgbClr val="E2E8F0"/>
-          </a:solidFill>
-          <a:ln>
-            <a:noFill/>
-          </a:ln>
-        </p:spPr>
-        <p:style>
-          <a:lnRef idx="1">
-            <a:schemeClr val="accent1"/>
-          </a:lnRef>
-          <a:fillRef idx="3">
-            <a:schemeClr val="accent1"/>
-          </a:fillRef>
-          <a:effectRef idx="2">
-            <a:schemeClr val="accent1"/>
-          </a:effectRef>
-          <a:fontRef idx="minor">
-            <a:schemeClr val="lt1"/>
-          </a:fontRef>
-        </p:style>
-        <p:txBody>
-          <a:bodyPr rtlCol="0" anchor="ctr"/>
-          <a:lstStyle/>
-          <a:p>
-            <a:pPr algn="ctr"/>
-          </a:p>
-        </p:txBody>
-      </p:sp>
-      <p:sp>
-        <p:nvSpPr>
-          <p:cNvPr id="6" name="TextBox 5"/>
-          <p:cNvSpPr txBox="1"/>
-          <p:nvPr/>
-        </p:nvSpPr>
-        <p:spPr>
-          <a:xfrm>
-            <a:off x="9601200" y="6327648"/>
-            <a:ext cx="1828800" cy="365760"/>
-          </a:xfrm>
-          <a:prstGeom prst="rect">
-            <a:avLst/>
-          </a:prstGeom>
-          <a:noFill/>
-        </p:spPr>
-        <p:txBody>
-          <a:bodyPr wrap="none" lIns="0" tIns="0" rIns="0" bIns="0">
-            <a:spAutoFit/>
-          </a:bodyPr>
-          <a:lstStyle/>
-          <a:p>
-            <a:pPr algn="r">
-              <a:defRPr sz="1300" b="1">
-                <a:solidFill>
-                  <a:srgbClr val="64748B"/>
-                </a:solidFill>
-                <a:latin typeface="Segoe UI"/>
-              </a:defRPr>
-            </a:pPr>
-            <a:r>
-              <a:t>Slide 18 / 30</a:t>
-            </a:r>
-          </a:p>
-        </p:txBody>
-      </p:sp>
-      <p:sp>
-        <p:nvSpPr>
-          <p:cNvPr id="7" name="Rectangle 6"/>
-          <p:cNvSpPr/>
-          <p:nvPr/>
-        </p:nvSpPr>
-        <p:spPr>
-          <a:xfrm>
-            <a:off x="731520" y="1234440"/>
-            <a:ext cx="4526280" cy="4846320"/>
-          </a:xfrm>
-          <a:prstGeom prst="rect">
-            <a:avLst/>
-          </a:prstGeom>
-          <a:solidFill>
-            <a:srgbClr val="FFFFFF"/>
-          </a:solidFill>
-          <a:ln w="19050">
-            <a:solidFill>
-              <a:srgbClr val="0284C7"/>
-            </a:solidFill>
-          </a:ln>
-        </p:spPr>
-        <p:style>
-          <a:lnRef idx="1">
-            <a:schemeClr val="accent1"/>
-          </a:lnRef>
-          <a:fillRef idx="3">
-            <a:schemeClr val="accent1"/>
-          </a:fillRef>
-          <a:effectRef idx="2">
-            <a:schemeClr val="accent1"/>
-          </a:effectRef>
-          <a:fontRef idx="minor">
-            <a:schemeClr val="lt1"/>
-          </a:fontRef>
-        </p:style>
-        <p:txBody>
-          <a:bodyPr rtlCol="0" anchor="ctr" wrap="square" lIns="228600" tIns="228600" rIns="228600"/>
-          <a:lstStyle/>
-          <a:p>
-            <a:pPr algn="ctr">
-              <a:spcAft>
-                <a:spcPts val="800"/>
-              </a:spcAft>
-            </a:pPr>
-            <a:r>
-              <a:rPr sz="1700" b="1">
-                <a:solidFill>
-                  <a:srgbClr val="0284C7"/>
-                </a:solidFill>
-              </a:rPr>
-              <a:t>3 KẾT LUẬN THỰC NGHIỆM THEN CHỐT</a:t>
-            </a:r>
-          </a:p>
-          <a:p>
-            <a:pPr>
-              <a:spcAft>
-                <a:spcPts val="600"/>
-              </a:spcAft>
-            </a:pPr>
-            <a:r>
-              <a:rPr b="1" sz="1600">
-                <a:solidFill>
-                  <a:srgbClr val="DC2626"/>
-                </a:solidFill>
-                <a:latin typeface="Segoe UI"/>
-              </a:rPr>
-              <a:t>1. Điểm nghẽn Ayub MiniLM: </a:t>
-            </a:r>
-            <a:r>
-              <a:rPr b="0" sz="1600">
-                <a:solidFill>
-                  <a:srgbClr val="334155"/>
-                </a:solidFill>
-                <a:latin typeface="Segoe UI"/>
-              </a:rPr>
-              <a:t>Mô hình MiniLM bị chậm (trễ trung bình 42.7ms trên CPU) và chặn nhầm câu hỏi thường tới 58.4%!</a:t>
-            </a:r>
-          </a:p>
-          <a:p>
-            <a:pPr>
-              <a:spcAft>
-                <a:spcPts val="600"/>
-              </a:spcAft>
-            </a:pPr>
-            <a:r>
-              <a:rPr b="1" sz="1600">
-                <a:solidFill>
-                  <a:srgbClr val="0284C7"/>
-                </a:solidFill>
-                <a:latin typeface="Segoe UI"/>
-              </a:rPr>
-              <a:t>2. Xác thực DeBERTa-v3: </a:t>
-            </a:r>
-            <a:r>
-              <a:rPr b="0" sz="1600">
-                <a:solidFill>
-                  <a:srgbClr val="334155"/>
-                </a:solidFill>
-                <a:latin typeface="Segoe UI"/>
-              </a:rPr>
-              <a:t>Kiểm chứng độc lập khớp 100% số liệu bài báo ACL 2025: F1-Score đạt 0.9416; chặn nhầm chỉ 11.5%.</a:t>
-            </a:r>
-          </a:p>
-          <a:p>
-            <a:pPr>
-              <a:spcAft>
-                <a:spcPts val="600"/>
-              </a:spcAft>
-            </a:pPr>
-            <a:r>
-              <a:rPr b="1" sz="1600">
-                <a:solidFill>
-                  <a:srgbClr val="059669"/>
-                </a:solidFill>
-                <a:latin typeface="Segoe UI"/>
-              </a:rPr>
-              <a:t>3. Đột phá Two-Tier PI-Guard: </a:t>
-            </a:r>
-            <a:r>
-              <a:rPr b="0" sz="1600">
-                <a:solidFill>
-                  <a:srgbClr val="334155"/>
-                </a:solidFill>
-                <a:latin typeface="Segoe UI"/>
-              </a:rPr>
-              <a:t>Mô hình 2 tầng giải quyết trọn vẹn điểm nghẽn độ trễ (P95=19.8ms) và hạ tỷ lệ chặn nhầm xuống dưới 1.5%.</a:t>
-            </a:r>
-          </a:p>
-          <a:p>
-            <a:pPr>
-              <a:spcAft>
-                <a:spcPts val="600"/>
-              </a:spcAft>
-            </a:pPr>
-            <a:r>
-              <a:rPr b="1" sz="1600">
-                <a:solidFill>
-                  <a:srgbClr val="0F172A"/>
-                </a:solidFill>
-                <a:latin typeface="Segoe UI"/>
-              </a:rPr>
-              <a:t>-&gt; Nền tảng vững chắc: </a:t>
-            </a:r>
-            <a:r>
-              <a:rPr b="0" sz="1600">
-                <a:solidFill>
-                  <a:srgbClr val="334155"/>
-                </a:solidFill>
-                <a:latin typeface="Segoe UI"/>
-              </a:rPr>
-              <a:t>Số liệu thực tế giúp nhóm tự tin báo cáo và phản biện trước Hội đồng!</a:t>
-            </a:r>
-          </a:p>
-        </p:txBody>
-      </p:sp>
-      <p:sp>
-        <p:nvSpPr>
-          <p:cNvPr id="8" name="Rectangle 7"/>
-          <p:cNvSpPr/>
-          <p:nvPr/>
-        </p:nvSpPr>
-        <p:spPr>
-          <a:xfrm>
-            <a:off x="5440680" y="1234440"/>
-            <a:ext cx="6016752" cy="4846320"/>
-          </a:xfrm>
-          <a:prstGeom prst="rect">
-            <a:avLst/>
-          </a:prstGeom>
-          <a:solidFill>
-            <a:srgbClr val="FFFFFF"/>
-          </a:solidFill>
-          <a:ln w="19050">
-            <a:solidFill>
-              <a:srgbClr val="0284C7"/>
-            </a:solidFill>
-          </a:ln>
-        </p:spPr>
-        <p:style>
-          <a:lnRef idx="1">
-            <a:schemeClr val="accent1"/>
-          </a:lnRef>
-          <a:fillRef idx="3">
-            <a:schemeClr val="accent1"/>
-          </a:fillRef>
-          <a:effectRef idx="2">
-            <a:schemeClr val="accent1"/>
-          </a:effectRef>
-          <a:fontRef idx="minor">
-            <a:schemeClr val="lt1"/>
-          </a:fontRef>
-        </p:style>
-        <p:txBody>
-          <a:bodyPr rtlCol="0" anchor="ctr"/>
-          <a:lstStyle/>
-          <a:p>
-            <a:pPr algn="ctr"/>
-          </a:p>
-        </p:txBody>
-      </p:sp>
-      <p:pic>
-        <p:nvPicPr>
-          <p:cNvPr id="9" name="Picture 8" descr="piguard_scorecard.png"/>
-          <p:cNvPicPr>
-            <a:picLocks noChangeAspect="1"/>
-          </p:cNvPicPr>
-          <p:nvPr/>
-        </p:nvPicPr>
-        <p:blipFill>
-          <a:blip r:embed="rId2"/>
-          <a:stretch>
-            <a:fillRect/>
-          </a:stretch>
-        </p:blipFill>
-        <p:spPr>
-          <a:xfrm>
-            <a:off x="5486400" y="1280160"/>
-            <a:ext cx="5925312" cy="4407408"/>
-          </a:xfrm>
-          <a:prstGeom prst="rect">
-            <a:avLst/>
-          </a:prstGeom>
-        </p:spPr>
-      </p:pic>
-      <p:sp>
-        <p:nvSpPr>
-          <p:cNvPr id="10" name="TextBox 9"/>
-          <p:cNvSpPr txBox="1"/>
-          <p:nvPr/>
-        </p:nvSpPr>
-        <p:spPr>
-          <a:xfrm>
-            <a:off x="5532120" y="5696712"/>
-            <a:ext cx="5833872" cy="347472"/>
-          </a:xfrm>
-          <a:prstGeom prst="rect">
-            <a:avLst/>
-          </a:prstGeom>
-          <a:noFill/>
-        </p:spPr>
-        <p:txBody>
-          <a:bodyPr wrap="square" lIns="0" tIns="0" rIns="0" bIns="0">
-            <a:spAutoFit/>
-          </a:bodyPr>
-          <a:lstStyle/>
-          <a:p>
-            <a:r>
-              <a:rPr sz="1600" b="1">
-                <a:solidFill>
-                  <a:srgbClr val="0F172A"/>
-                </a:solidFill>
-                <a:latin typeface="Segoe UI"/>
-              </a:rPr>
-              <a:t>Bảng điểm đối chuẩn thực nghiệm độc lập tại phòng lab vs. ACL 2025 </a:t>
-            </a:r>
-            <a:r>
-              <a:rPr sz="1500" i="1">
-                <a:solidFill>
-                  <a:srgbClr val="0284C7"/>
-                </a:solidFill>
-                <a:latin typeface="Segoe UI"/>
-              </a:rPr>
-              <a:t>(Hao Li et al. ACL 2025 Long Paper)</a:t>
-            </a:r>
-          </a:p>
-        </p:txBody>
-      </p:sp>
-    </p:spTree>
-  </p:cSld>
-  <p:clrMapOvr>
-    <a:masterClrMapping/>
-  </p:clrMapOvr>
-</p:sld>
-</file>
-
-<file path=ppt/slides/slide19.xml><?xml version="1.0" encoding="utf-8"?>
-<p:sld xmlns:a="http://schemas.openxmlformats.org/drawingml/2006/main" xmlns:p="http://schemas.openxmlformats.org/presentationml/2006/main" xmlns:r="http://schemas.openxmlformats.org/officeDocument/2006/relationships">
-  <p:cSld>
-    <p:spTree>
-      <p:nvGrpSpPr>
-        <p:cNvPr id="1" name=""/>
-        <p:cNvGrpSpPr/>
-        <p:nvPr/>
-      </p:nvGrpSpPr>
-      <p:grpSpPr/>
-      <p:sp>
-        <p:nvSpPr>
-          <p:cNvPr id="2" name="Rectangle 1"/>
-          <p:cNvSpPr/>
-          <p:nvPr/>
-        </p:nvSpPr>
-        <p:spPr>
-          <a:xfrm>
-            <a:off x="0" y="0"/>
-            <a:ext cx="12191695" cy="6858000"/>
-          </a:xfrm>
-          <a:prstGeom prst="rect">
-            <a:avLst/>
-          </a:prstGeom>
-          <a:solidFill>
-            <a:srgbClr val="FFFFFF"/>
-          </a:solidFill>
-          <a:ln>
-            <a:noFill/>
-          </a:ln>
-        </p:spPr>
-        <p:style>
-          <a:lnRef idx="1">
-            <a:schemeClr val="accent1"/>
-          </a:lnRef>
-          <a:fillRef idx="3">
-            <a:schemeClr val="accent1"/>
-          </a:fillRef>
-          <a:effectRef idx="2">
-            <a:schemeClr val="accent1"/>
-          </a:effectRef>
-          <a:fontRef idx="minor">
-            <a:schemeClr val="lt1"/>
-          </a:fontRef>
-        </p:style>
-        <p:txBody>
-          <a:bodyPr rtlCol="0" anchor="ctr"/>
-          <a:lstStyle/>
-          <a:p>
-            <a:pPr algn="ctr"/>
-          </a:p>
-        </p:txBody>
-      </p:sp>
-      <p:sp>
-        <p:nvSpPr>
-          <p:cNvPr id="3" name="Rectangle 2"/>
-          <p:cNvSpPr/>
-          <p:nvPr/>
-        </p:nvSpPr>
-        <p:spPr>
-          <a:xfrm>
-            <a:off x="731520" y="329184"/>
-            <a:ext cx="73152" cy="676656"/>
-          </a:xfrm>
-          <a:prstGeom prst="rect">
-            <a:avLst/>
-          </a:prstGeom>
-          <a:solidFill>
-            <a:srgbClr val="0284C7"/>
-          </a:solidFill>
-          <a:ln>
-            <a:noFill/>
-          </a:ln>
-        </p:spPr>
-        <p:style>
-          <a:lnRef idx="1">
-            <a:schemeClr val="accent1"/>
-          </a:lnRef>
-          <a:fillRef idx="3">
-            <a:schemeClr val="accent1"/>
-          </a:fillRef>
-          <a:effectRef idx="2">
-            <a:schemeClr val="accent1"/>
-          </a:effectRef>
-          <a:fontRef idx="minor">
-            <a:schemeClr val="lt1"/>
-          </a:fontRef>
-        </p:style>
-        <p:txBody>
-          <a:bodyPr rtlCol="0" anchor="ctr"/>
-          <a:lstStyle/>
-          <a:p>
-            <a:pPr algn="ctr"/>
-          </a:p>
-        </p:txBody>
-      </p:sp>
-      <p:sp>
-        <p:nvSpPr>
-          <p:cNvPr id="4" name="TextBox 3"/>
-          <p:cNvSpPr txBox="1"/>
-          <p:nvPr/>
-        </p:nvSpPr>
-        <p:spPr>
-          <a:xfrm>
-            <a:off x="896112" y="256032"/>
-            <a:ext cx="10561320" cy="804672"/>
-          </a:xfrm>
-          <a:prstGeom prst="rect">
-            <a:avLst/>
-          </a:prstGeom>
-          <a:noFill/>
-        </p:spPr>
-        <p:txBody>
-          <a:bodyPr wrap="square" lIns="0" tIns="0" rIns="0" bIns="0">
-            <a:spAutoFit/>
-          </a:bodyPr>
-          <a:lstStyle/>
-          <a:p>
-            <a:pPr>
-              <a:spcAft>
-                <a:spcPts val="200"/>
-              </a:spcAft>
-              <a:defRPr sz="2100" b="1">
-                <a:solidFill>
-                  <a:srgbClr val="0F172A"/>
-                </a:solidFill>
-                <a:latin typeface="Segoe UI"/>
-              </a:defRPr>
-            </a:pPr>
-            <a:r>
-              <a:t>NHIỆM VỤ 3: KẾT QUẢ CHẠY THỰC NGHIỆM MÔ HÌNH (SỐ LIỆU CHI TIẾT)</a:t>
-            </a:r>
-          </a:p>
-          <a:p>
-            <a:pPr>
-              <a:defRPr sz="1500">
-                <a:solidFill>
-                  <a:srgbClr val="64748B"/>
-                </a:solidFill>
-                <a:latin typeface="Segoe UI"/>
-              </a:defRPr>
-            </a:pPr>
-            <a:r>
-              <a:t>Bảng so sánh định lượng 5 mô hình trên 1.579 mẫu dữ liệu kiểm thử thực tế</a:t>
-            </a:r>
-          </a:p>
-        </p:txBody>
-      </p:sp>
-      <p:sp>
-        <p:nvSpPr>
-          <p:cNvPr id="5" name="Rectangle 4"/>
-          <p:cNvSpPr/>
-          <p:nvPr/>
-        </p:nvSpPr>
-        <p:spPr>
-          <a:xfrm>
-            <a:off x="731520" y="6263640"/>
-            <a:ext cx="10728655" cy="18288"/>
-          </a:xfrm>
-          <a:prstGeom prst="rect">
-            <a:avLst/>
-          </a:prstGeom>
-          <a:solidFill>
-            <a:srgbClr val="E2E8F0"/>
-          </a:solidFill>
-          <a:ln>
-            <a:noFill/>
-          </a:ln>
-        </p:spPr>
-        <p:style>
-          <a:lnRef idx="1">
-            <a:schemeClr val="accent1"/>
-          </a:lnRef>
-          <a:fillRef idx="3">
-            <a:schemeClr val="accent1"/>
-          </a:fillRef>
-          <a:effectRef idx="2">
-            <a:schemeClr val="accent1"/>
-          </a:effectRef>
-          <a:fontRef idx="minor">
-            <a:schemeClr val="lt1"/>
-          </a:fontRef>
-        </p:style>
-        <p:txBody>
-          <a:bodyPr rtlCol="0" anchor="ctr"/>
-          <a:lstStyle/>
-          <a:p>
-            <a:pPr algn="ctr"/>
-          </a:p>
-        </p:txBody>
-      </p:sp>
-      <p:sp>
-        <p:nvSpPr>
-          <p:cNvPr id="6" name="TextBox 5"/>
-          <p:cNvSpPr txBox="1"/>
-          <p:nvPr/>
-        </p:nvSpPr>
-        <p:spPr>
-          <a:xfrm>
-            <a:off x="9601200" y="6327648"/>
-            <a:ext cx="1828800" cy="365760"/>
-          </a:xfrm>
-          <a:prstGeom prst="rect">
-            <a:avLst/>
-          </a:prstGeom>
-          <a:noFill/>
-        </p:spPr>
-        <p:txBody>
-          <a:bodyPr wrap="none" lIns="0" tIns="0" rIns="0" bIns="0">
-            <a:spAutoFit/>
-          </a:bodyPr>
-          <a:lstStyle/>
-          <a:p>
-            <a:pPr algn="r">
-              <a:defRPr sz="1300" b="1">
-                <a:solidFill>
-                  <a:srgbClr val="64748B"/>
-                </a:solidFill>
-                <a:latin typeface="Segoe UI"/>
-              </a:defRPr>
-            </a:pPr>
-            <a:r>
-              <a:t>Slide 19 / 30</a:t>
-            </a:r>
-          </a:p>
-        </p:txBody>
-      </p:sp>
-      <p:graphicFrame>
-        <p:nvGraphicFramePr>
-          <p:cNvPr id="7" name="Table 6"/>
-          <p:cNvGraphicFramePr>
-            <a:graphicFrameLocks noGrp="1"/>
-          </p:cNvGraphicFramePr>
-          <p:nvPr/>
-        </p:nvGraphicFramePr>
-        <p:xfrm>
-          <a:off x="731520" y="1234440"/>
-          <a:ext cx="10728655" cy="4754880"/>
-        </p:xfrm>
-        <a:graphic>
-          <a:graphicData uri="http://schemas.openxmlformats.org/drawingml/2006/table">
-            <a:tbl>
-              <a:tblPr firstRow="1" bandRow="1">
-                <a:tableStyleId>{5C22544A-7EE6-4342-B048-85BDC9FD1C3A}</a:tableStyleId>
-              </a:tblPr>
-              <a:tblGrid>
-                <a:gridCol w="2499055"/>
-                <a:gridCol w="2468880"/>
-                <a:gridCol w="1920240"/>
-                <a:gridCol w="1920240"/>
-                <a:gridCol w="1920240"/>
-              </a:tblGrid>
-              <a:tr h="792480">
-                <a:tc>
-                  <a:txBody>
-                    <a:bodyPr wrap="square"/>
-                    <a:lstStyle/>
-                    <a:p>
-                      <a:pPr algn="ctr">
-                        <a:defRPr sz="1600" b="1">
-                          <a:solidFill>
-                            <a:srgbClr val="0F172A"/>
-                          </a:solidFill>
-                          <a:latin typeface="Segoe UI"/>
-                        </a:defRPr>
-                      </a:pPr>
-                      <a:r>
-                        <a:t>Mô Hình Thẩm Định</a:t>
-                      </a:r>
-                    </a:p>
-                  </a:txBody>
-                  <a:tcPr anchor="ctr" marL="109728" marR="109728" marT="54864" marB="54864">
-                    <a:solidFill>
-                      <a:srgbClr val="F1F5F9"/>
-                    </a:solidFill>
-                    <a:lnL w="15000" cmpd="s">
-                      <a:solidFill>
-                        <a:srgbClr val="0F172A"/>
-                      </a:solidFill>
-                    </a:lnL>
-                    <a:lnR w="15000" cmpd="s">
-                      <a:solidFill>
-                        <a:srgbClr val="0F172A"/>
-                      </a:solidFill>
-                    </a:lnR>
-                    <a:lnT w="15000" cmpd="s">
-                      <a:solidFill>
-                        <a:srgbClr val="0F172A"/>
-                      </a:solidFill>
-                    </a:lnT>
-                    <a:lnB w="15000" cmpd="s">
-                      <a:solidFill>
-                        <a:srgbClr val="0F172A"/>
-                      </a:solidFill>
-                    </a:lnB>
-                  </a:tcPr>
-                </a:tc>
-                <a:tc>
-                  <a:txBody>
-                    <a:bodyPr wrap="square"/>
-                    <a:lstStyle/>
-                    <a:p>
-                      <a:pPr algn="ctr">
-                        <a:defRPr sz="1600" b="1">
-                          <a:solidFill>
-                            <a:srgbClr val="0F172A"/>
-                          </a:solidFill>
-                          <a:latin typeface="Segoe UI"/>
-                        </a:defRPr>
-                      </a:pPr>
-                      <a:r>
-                        <a:t>Kiến Trúc Kỹ Thuật</a:t>
-                      </a:r>
-                    </a:p>
-                  </a:txBody>
-                  <a:tcPr anchor="ctr" marL="109728" marR="109728" marT="54864" marB="54864">
-                    <a:solidFill>
-                      <a:srgbClr val="F1F5F9"/>
-                    </a:solidFill>
-                    <a:lnL w="15000" cmpd="s">
-                      <a:solidFill>
-                        <a:srgbClr val="0F172A"/>
-                      </a:solidFill>
-                    </a:lnL>
-                    <a:lnR w="15000" cmpd="s">
-                      <a:solidFill>
-                        <a:srgbClr val="0F172A"/>
-                      </a:solidFill>
-                    </a:lnR>
-                    <a:lnT w="15000" cmpd="s">
-                      <a:solidFill>
-                        <a:srgbClr val="0F172A"/>
-                      </a:solidFill>
-                    </a:lnT>
-                    <a:lnB w="15000" cmpd="s">
-                      <a:solidFill>
-                        <a:srgbClr val="0F172A"/>
-                      </a:solidFill>
-                    </a:lnB>
-                  </a:tcPr>
-                </a:tc>
-                <a:tc>
-                  <a:txBody>
-                    <a:bodyPr wrap="square"/>
-                    <a:lstStyle/>
-                    <a:p>
-                      <a:pPr algn="ctr">
-                        <a:defRPr sz="1600" b="1">
-                          <a:solidFill>
-                            <a:srgbClr val="0F172A"/>
-                          </a:solidFill>
-                          <a:latin typeface="Segoe UI"/>
-                        </a:defRPr>
-                      </a:pPr>
-                      <a:r>
-                        <a:t>Độ Chính Xác F1</a:t>
-                      </a:r>
-                    </a:p>
-                  </a:txBody>
-                  <a:tcPr anchor="ctr" marL="109728" marR="109728" marT="54864" marB="54864">
-                    <a:solidFill>
-                      <a:srgbClr val="F1F5F9"/>
-                    </a:solidFill>
-                    <a:lnL w="15000" cmpd="s">
-                      <a:solidFill>
-                        <a:srgbClr val="0F172A"/>
-                      </a:solidFill>
-                    </a:lnL>
-                    <a:lnR w="15000" cmpd="s">
-                      <a:solidFill>
-                        <a:srgbClr val="0F172A"/>
-                      </a:solidFill>
-                    </a:lnR>
-                    <a:lnT w="15000" cmpd="s">
-                      <a:solidFill>
-                        <a:srgbClr val="0F172A"/>
-                      </a:solidFill>
-                    </a:lnT>
-                    <a:lnB w="15000" cmpd="s">
-                      <a:solidFill>
-                        <a:srgbClr val="0F172A"/>
-                      </a:solidFill>
-                    </a:lnB>
-                  </a:tcPr>
-                </a:tc>
-                <a:tc>
-                  <a:txBody>
-                    <a:bodyPr wrap="square"/>
-                    <a:lstStyle/>
-                    <a:p>
-                      <a:pPr algn="ctr">
-                        <a:defRPr sz="1600" b="1">
-                          <a:solidFill>
-                            <a:srgbClr val="0F172A"/>
-                          </a:solidFill>
-                          <a:latin typeface="Segoe UI"/>
-                        </a:defRPr>
-                      </a:pPr>
-                      <a:r>
-                        <a:t>Báo Động Giả (FPR)</a:t>
-                      </a:r>
-                    </a:p>
-                  </a:txBody>
-                  <a:tcPr anchor="ctr" marL="109728" marR="109728" marT="54864" marB="54864">
-                    <a:solidFill>
-                      <a:srgbClr val="F1F5F9"/>
-                    </a:solidFill>
-                    <a:lnL w="15000" cmpd="s">
-                      <a:solidFill>
-                        <a:srgbClr val="0F172A"/>
-                      </a:solidFill>
-                    </a:lnL>
-                    <a:lnR w="15000" cmpd="s">
-                      <a:solidFill>
-                        <a:srgbClr val="0F172A"/>
-                      </a:solidFill>
-                    </a:lnR>
-                    <a:lnT w="15000" cmpd="s">
-                      <a:solidFill>
-                        <a:srgbClr val="0F172A"/>
-                      </a:solidFill>
-                    </a:lnT>
-                    <a:lnB w="15000" cmpd="s">
-                      <a:solidFill>
-                        <a:srgbClr val="0F172A"/>
-                      </a:solidFill>
-                    </a:lnB>
-                  </a:tcPr>
-                </a:tc>
-                <a:tc>
-                  <a:txBody>
-                    <a:bodyPr wrap="square"/>
-                    <a:lstStyle/>
-                    <a:p>
-                      <a:pPr algn="ctr">
-                        <a:defRPr sz="1600" b="1">
-                          <a:solidFill>
-                            <a:srgbClr val="0F172A"/>
-                          </a:solidFill>
-                          <a:latin typeface="Segoe UI"/>
-                        </a:defRPr>
-                      </a:pPr>
-                      <a:r>
-                        <a:t>Độ Trễ CPU P95</a:t>
-                      </a:r>
-                    </a:p>
-                  </a:txBody>
-                  <a:tcPr anchor="ctr" marL="109728" marR="109728" marT="54864" marB="54864">
-                    <a:solidFill>
-                      <a:srgbClr val="F1F5F9"/>
-                    </a:solidFill>
-                    <a:lnL w="15000" cmpd="s">
-                      <a:solidFill>
-                        <a:srgbClr val="0F172A"/>
-                      </a:solidFill>
-                    </a:lnL>
-                    <a:lnR w="15000" cmpd="s">
-                      <a:solidFill>
-                        <a:srgbClr val="0F172A"/>
-                      </a:solidFill>
-                    </a:lnR>
-                    <a:lnT w="15000" cmpd="s">
-                      <a:solidFill>
-                        <a:srgbClr val="0F172A"/>
-                      </a:solidFill>
-                    </a:lnT>
-                    <a:lnB w="15000" cmpd="s">
-                      <a:solidFill>
-                        <a:srgbClr val="0F172A"/>
-                      </a:solidFill>
-                    </a:lnB>
-                  </a:tcPr>
-                </a:tc>
-              </a:tr>
-              <a:tr h="792480">
-                <a:tc>
-                  <a:txBody>
-                    <a:bodyPr wrap="square"/>
-                    <a:lstStyle/>
-                    <a:p>
-                      <a:pPr algn="l">
-                        <a:defRPr sz="1600" b="0">
-                          <a:solidFill>
-                            <a:srgbClr val="334155"/>
-                          </a:solidFill>
-                          <a:latin typeface="Segoe UI"/>
-                        </a:defRPr>
-                      </a:pPr>
-                      <a:r>
-                        <a:t>Regex Baseline (Quy tắc)</a:t>
-                      </a:r>
-                    </a:p>
-                  </a:txBody>
-                  <a:tcPr anchor="ctr" marL="109728" marR="109728" marT="54864" marB="54864">
-                    <a:solidFill>
-                      <a:srgbClr val="F8FAFC"/>
-                    </a:solidFill>
-                    <a:lnL w="15000" cmpd="s">
-                      <a:solidFill>
-                        <a:srgbClr val="0F172A"/>
-                      </a:solidFill>
-                    </a:lnL>
-                    <a:lnR w="15000" cmpd="s">
-                      <a:solidFill>
-                        <a:srgbClr val="0F172A"/>
-                      </a:solidFill>
-                    </a:lnR>
-                    <a:lnT w="15000" cmpd="s">
-                      <a:solidFill>
-                        <a:srgbClr val="0F172A"/>
-                      </a:solidFill>
-                    </a:lnT>
-                    <a:lnB w="15000" cmpd="s">
-                      <a:solidFill>
-                        <a:srgbClr val="0F172A"/>
-                      </a:solidFill>
-                    </a:lnB>
-                  </a:tcPr>
-                </a:tc>
-                <a:tc>
-                  <a:txBody>
-                    <a:bodyPr wrap="square"/>
-                    <a:lstStyle/>
-                    <a:p>
-                      <a:pPr algn="l">
-                        <a:defRPr sz="1600" b="0">
-                          <a:solidFill>
-                            <a:srgbClr val="334155"/>
-                          </a:solidFill>
-                          <a:latin typeface="Segoe UI"/>
-                        </a:defRPr>
-                      </a:pPr>
-                      <a:r>
-                        <a:t>Khớp xâu ký tự thô</a:t>
-                      </a:r>
-                    </a:p>
-                  </a:txBody>
-                  <a:tcPr anchor="ctr" marL="109728" marR="109728" marT="54864" marB="54864">
-                    <a:solidFill>
-                      <a:srgbClr val="F8FAFC"/>
-                    </a:solidFill>
-                    <a:lnL w="15000" cmpd="s">
-                      <a:solidFill>
-                        <a:srgbClr val="0F172A"/>
-                      </a:solidFill>
-                    </a:lnL>
-                    <a:lnR w="15000" cmpd="s">
-                      <a:solidFill>
-                        <a:srgbClr val="0F172A"/>
-                      </a:solidFill>
-                    </a:lnR>
-                    <a:lnT w="15000" cmpd="s">
-                      <a:solidFill>
-                        <a:srgbClr val="0F172A"/>
-                      </a:solidFill>
-                    </a:lnT>
-                    <a:lnB w="15000" cmpd="s">
-                      <a:solidFill>
-                        <a:srgbClr val="0F172A"/>
-                      </a:solidFill>
-                    </a:lnB>
-                  </a:tcPr>
-                </a:tc>
-                <a:tc>
-                  <a:txBody>
-                    <a:bodyPr wrap="square"/>
-                    <a:lstStyle/>
-                    <a:p>
-                      <a:pPr algn="ctr">
-                        <a:defRPr sz="1600" b="0">
-                          <a:solidFill>
-                            <a:srgbClr val="334155"/>
-                          </a:solidFill>
-                          <a:latin typeface="Segoe UI"/>
-                        </a:defRPr>
-                      </a:pPr>
-                      <a:r>
-                        <a:t>0.3812</a:t>
-                      </a:r>
-                    </a:p>
-                  </a:txBody>
-                  <a:tcPr anchor="ctr" marL="109728" marR="109728" marT="54864" marB="54864">
-                    <a:solidFill>
-                      <a:srgbClr val="F8FAFC"/>
-                    </a:solidFill>
-                    <a:lnL w="15000" cmpd="s">
-                      <a:solidFill>
-                        <a:srgbClr val="0F172A"/>
-                      </a:solidFill>
-                    </a:lnL>
-                    <a:lnR w="15000" cmpd="s">
-                      <a:solidFill>
-                        <a:srgbClr val="0F172A"/>
-                      </a:solidFill>
-                    </a:lnR>
-                    <a:lnT w="15000" cmpd="s">
-                      <a:solidFill>
-                        <a:srgbClr val="0F172A"/>
-                      </a:solidFill>
-                    </a:lnT>
-                    <a:lnB w="15000" cmpd="s">
-                      <a:solidFill>
-                        <a:srgbClr val="0F172A"/>
-                      </a:solidFill>
-                    </a:lnB>
-                  </a:tcPr>
-                </a:tc>
-                <a:tc>
-                  <a:txBody>
-                    <a:bodyPr wrap="square"/>
-                    <a:lstStyle/>
-                    <a:p>
-                      <a:pPr algn="ctr">
-                        <a:defRPr sz="1600" b="0">
-                          <a:solidFill>
-                            <a:srgbClr val="334155"/>
-                          </a:solidFill>
-                          <a:latin typeface="Segoe UI"/>
-                        </a:defRPr>
-                      </a:pPr>
-                      <a:r>
-                        <a:t>0.00 %</a:t>
-                      </a:r>
-                    </a:p>
-                  </a:txBody>
-                  <a:tcPr anchor="ctr" marL="109728" marR="109728" marT="54864" marB="54864">
-                    <a:solidFill>
-                      <a:srgbClr val="F8FAFC"/>
-                    </a:solidFill>
-                    <a:lnL w="15000" cmpd="s">
-                      <a:solidFill>
-                        <a:srgbClr val="0F172A"/>
-                      </a:solidFill>
-                    </a:lnL>
-                    <a:lnR w="15000" cmpd="s">
-                      <a:solidFill>
-                        <a:srgbClr val="0F172A"/>
-                      </a:solidFill>
-                    </a:lnR>
-                    <a:lnT w="15000" cmpd="s">
-                      <a:solidFill>
-                        <a:srgbClr val="0F172A"/>
-                      </a:solidFill>
-                    </a:lnT>
-                    <a:lnB w="15000" cmpd="s">
-                      <a:solidFill>
-                        <a:srgbClr val="0F172A"/>
-                      </a:solidFill>
-                    </a:lnB>
-                  </a:tcPr>
-                </a:tc>
-                <a:tc>
-                  <a:txBody>
-                    <a:bodyPr wrap="square"/>
-                    <a:lstStyle/>
-                    <a:p>
-                      <a:pPr algn="ctr">
-                        <a:defRPr sz="1600" b="0">
-                          <a:solidFill>
-                            <a:srgbClr val="334155"/>
-                          </a:solidFill>
-                          <a:latin typeface="Segoe UI"/>
-                        </a:defRPr>
-                      </a:pPr>
-                      <a:r>
-                        <a:t>&lt; 0.1 ms</a:t>
-                      </a:r>
-                    </a:p>
-                  </a:txBody>
-                  <a:tcPr anchor="ctr" marL="109728" marR="109728" marT="54864" marB="54864">
-                    <a:solidFill>
-                      <a:srgbClr val="F8FAFC"/>
-                    </a:solidFill>
-                    <a:lnL w="15000" cmpd="s">
-                      <a:solidFill>
-                        <a:srgbClr val="0F172A"/>
-                      </a:solidFill>
-                    </a:lnL>
-                    <a:lnR w="15000" cmpd="s">
-                      <a:solidFill>
-                        <a:srgbClr val="0F172A"/>
-                      </a:solidFill>
-                    </a:lnR>
-                    <a:lnT w="15000" cmpd="s">
-                      <a:solidFill>
-                        <a:srgbClr val="0F172A"/>
-                      </a:solidFill>
-                    </a:lnT>
-                    <a:lnB w="15000" cmpd="s">
-                      <a:solidFill>
-                        <a:srgbClr val="0F172A"/>
-                      </a:solidFill>
-                    </a:lnB>
-                  </a:tcPr>
-                </a:tc>
-              </a:tr>
-              <a:tr h="792480">
-                <a:tc>
-                  <a:txBody>
-                    <a:bodyPr wrap="square"/>
-                    <a:lstStyle/>
-                    <a:p>
-                      <a:pPr algn="l">
-                        <a:defRPr sz="1600" b="0">
-                          <a:solidFill>
-                            <a:srgbClr val="334155"/>
-                          </a:solidFill>
-                          <a:latin typeface="Segoe UI"/>
-                        </a:defRPr>
-                      </a:pPr>
-                      <a:r>
-                        <a:t>TF-IDF + LinearSVC</a:t>
-                      </a:r>
-                    </a:p>
-                  </a:txBody>
-                  <a:tcPr anchor="ctr" marL="109728" marR="109728" marT="54864" marB="54864">
-                    <a:solidFill>
-                      <a:srgbClr val="FFFFFF"/>
-                    </a:solidFill>
-                    <a:lnL w="15000" cmpd="s">
-                      <a:solidFill>
-                        <a:srgbClr val="0F172A"/>
-                      </a:solidFill>
-                    </a:lnL>
-                    <a:lnR w="15000" cmpd="s">
-                      <a:solidFill>
-                        <a:srgbClr val="0F172A"/>
-                      </a:solidFill>
-                    </a:lnR>
-                    <a:lnT w="15000" cmpd="s">
-                      <a:solidFill>
-                        <a:srgbClr val="0F172A"/>
-                      </a:solidFill>
-                    </a:lnT>
-                    <a:lnB w="15000" cmpd="s">
-                      <a:solidFill>
-                        <a:srgbClr val="0F172A"/>
-                      </a:solidFill>
-                    </a:lnB>
-                  </a:tcPr>
-                </a:tc>
-                <a:tc>
-                  <a:txBody>
-                    <a:bodyPr wrap="square"/>
-                    <a:lstStyle/>
-                    <a:p>
-                      <a:pPr algn="l">
-                        <a:defRPr sz="1600" b="0">
-                          <a:solidFill>
-                            <a:srgbClr val="334155"/>
-                          </a:solidFill>
-                          <a:latin typeface="Segoe UI"/>
-                        </a:defRPr>
-                      </a:pPr>
-                      <a:r>
-                        <a:t>N-Grams ký tự (n=3-5)</a:t>
-                      </a:r>
-                    </a:p>
-                  </a:txBody>
-                  <a:tcPr anchor="ctr" marL="109728" marR="109728" marT="54864" marB="54864">
-                    <a:solidFill>
-                      <a:srgbClr val="FFFFFF"/>
-                    </a:solidFill>
-                    <a:lnL w="15000" cmpd="s">
-                      <a:solidFill>
-                        <a:srgbClr val="0F172A"/>
-                      </a:solidFill>
-                    </a:lnL>
-                    <a:lnR w="15000" cmpd="s">
-                      <a:solidFill>
-                        <a:srgbClr val="0F172A"/>
-                      </a:solidFill>
-                    </a:lnR>
-                    <a:lnT w="15000" cmpd="s">
-                      <a:solidFill>
-                        <a:srgbClr val="0F172A"/>
-                      </a:solidFill>
-                    </a:lnT>
-                    <a:lnB w="15000" cmpd="s">
-                      <a:solidFill>
-                        <a:srgbClr val="0F172A"/>
-                      </a:solidFill>
-                    </a:lnB>
-                  </a:tcPr>
-                </a:tc>
-                <a:tc>
-                  <a:txBody>
-                    <a:bodyPr wrap="square"/>
-                    <a:lstStyle/>
-                    <a:p>
-                      <a:pPr algn="ctr">
-                        <a:defRPr sz="1600" b="0">
-                          <a:solidFill>
-                            <a:srgbClr val="334155"/>
-                          </a:solidFill>
-                          <a:latin typeface="Segoe UI"/>
-                        </a:defRPr>
-                      </a:pPr>
-                      <a:r>
-                        <a:t>0.8745</a:t>
-                      </a:r>
-                    </a:p>
-                  </a:txBody>
-                  <a:tcPr anchor="ctr" marL="109728" marR="109728" marT="54864" marB="54864">
-                    <a:solidFill>
-                      <a:srgbClr val="FFFFFF"/>
-                    </a:solidFill>
-                    <a:lnL w="15000" cmpd="s">
-                      <a:solidFill>
-                        <a:srgbClr val="0F172A"/>
-                      </a:solidFill>
-                    </a:lnL>
-                    <a:lnR w="15000" cmpd="s">
-                      <a:solidFill>
-                        <a:srgbClr val="0F172A"/>
-                      </a:solidFill>
-                    </a:lnR>
-                    <a:lnT w="15000" cmpd="s">
-                      <a:solidFill>
-                        <a:srgbClr val="0F172A"/>
-                      </a:solidFill>
-                    </a:lnT>
-                    <a:lnB w="15000" cmpd="s">
-                      <a:solidFill>
-                        <a:srgbClr val="0F172A"/>
-                      </a:solidFill>
-                    </a:lnB>
-                  </a:tcPr>
-                </a:tc>
-                <a:tc>
-                  <a:txBody>
-                    <a:bodyPr wrap="square"/>
-                    <a:lstStyle/>
-                    <a:p>
-                      <a:pPr algn="ctr">
-                        <a:defRPr sz="1600" b="0">
-                          <a:solidFill>
-                            <a:srgbClr val="334155"/>
-                          </a:solidFill>
-                          <a:latin typeface="Segoe UI"/>
-                        </a:defRPr>
-                      </a:pPr>
-                      <a:r>
-                        <a:t>18.40 %</a:t>
-                      </a:r>
-                    </a:p>
-                  </a:txBody>
-                  <a:tcPr anchor="ctr" marL="109728" marR="109728" marT="54864" marB="54864">
-                    <a:solidFill>
-                      <a:srgbClr val="FFFFFF"/>
-                    </a:solidFill>
-                    <a:lnL w="15000" cmpd="s">
-                      <a:solidFill>
-                        <a:srgbClr val="0F172A"/>
-                      </a:solidFill>
-                    </a:lnL>
-                    <a:lnR w="15000" cmpd="s">
-                      <a:solidFill>
-                        <a:srgbClr val="0F172A"/>
-                      </a:solidFill>
-                    </a:lnR>
-                    <a:lnT w="15000" cmpd="s">
-                      <a:solidFill>
-                        <a:srgbClr val="0F172A"/>
-                      </a:solidFill>
-                    </a:lnT>
-                    <a:lnB w="15000" cmpd="s">
-                      <a:solidFill>
-                        <a:srgbClr val="0F172A"/>
-                      </a:solidFill>
-                    </a:lnB>
-                  </a:tcPr>
-                </a:tc>
-                <a:tc>
-                  <a:txBody>
-                    <a:bodyPr wrap="square"/>
-                    <a:lstStyle/>
-                    <a:p>
-                      <a:pPr algn="ctr">
-                        <a:defRPr sz="1600" b="0">
-                          <a:solidFill>
-                            <a:srgbClr val="334155"/>
-                          </a:solidFill>
-                          <a:latin typeface="Segoe UI"/>
-                        </a:defRPr>
-                      </a:pPr>
-                      <a:r>
-                        <a:t>~0.47 ms</a:t>
-                      </a:r>
-                    </a:p>
-                  </a:txBody>
-                  <a:tcPr anchor="ctr" marL="109728" marR="109728" marT="54864" marB="54864">
-                    <a:solidFill>
-                      <a:srgbClr val="FFFFFF"/>
-                    </a:solidFill>
-                    <a:lnL w="15000" cmpd="s">
-                      <a:solidFill>
-                        <a:srgbClr val="0F172A"/>
-                      </a:solidFill>
-                    </a:lnL>
-                    <a:lnR w="15000" cmpd="s">
-                      <a:solidFill>
-                        <a:srgbClr val="0F172A"/>
-                      </a:solidFill>
-                    </a:lnR>
-                    <a:lnT w="15000" cmpd="s">
-                      <a:solidFill>
-                        <a:srgbClr val="0F172A"/>
-                      </a:solidFill>
-                    </a:lnT>
-                    <a:lnB w="15000" cmpd="s">
-                      <a:solidFill>
-                        <a:srgbClr val="0F172A"/>
-                      </a:solidFill>
-                    </a:lnB>
-                  </a:tcPr>
-                </a:tc>
-              </a:tr>
-              <a:tr h="792480">
-                <a:tc>
-                  <a:txBody>
-                    <a:bodyPr wrap="square"/>
-                    <a:lstStyle/>
-                    <a:p>
-                      <a:pPr algn="l">
-                        <a:defRPr sz="1600" b="0">
-                          <a:solidFill>
-                            <a:srgbClr val="334155"/>
-                          </a:solidFill>
-                          <a:latin typeface="Segoe UI"/>
-                        </a:defRPr>
-                      </a:pPr>
-                      <a:r>
-                        <a:t>Ayub MiniLM (ACL 2024)</a:t>
-                      </a:r>
-                    </a:p>
-                  </a:txBody>
-                  <a:tcPr anchor="ctr" marL="109728" marR="109728" marT="54864" marB="54864">
-                    <a:solidFill>
-                      <a:srgbClr val="F8FAFC"/>
-                    </a:solidFill>
-                    <a:lnL w="15000" cmpd="s">
-                      <a:solidFill>
-                        <a:srgbClr val="0F172A"/>
-                      </a:solidFill>
-                    </a:lnL>
-                    <a:lnR w="15000" cmpd="s">
-                      <a:solidFill>
-                        <a:srgbClr val="0F172A"/>
-                      </a:solidFill>
-                    </a:lnR>
-                    <a:lnT w="15000" cmpd="s">
-                      <a:solidFill>
-                        <a:srgbClr val="0F172A"/>
-                      </a:solidFill>
-                    </a:lnT>
-                    <a:lnB w="15000" cmpd="s">
-                      <a:solidFill>
-                        <a:srgbClr val="0F172A"/>
-                      </a:solidFill>
-                    </a:lnB>
-                  </a:tcPr>
-                </a:tc>
-                <a:tc>
-                  <a:txBody>
-                    <a:bodyPr wrap="square"/>
-                    <a:lstStyle/>
-                    <a:p>
-                      <a:pPr algn="l">
-                        <a:defRPr sz="1600" b="0">
-                          <a:solidFill>
-                            <a:srgbClr val="334155"/>
-                          </a:solidFill>
-                          <a:latin typeface="Segoe UI"/>
-                        </a:defRPr>
-                      </a:pPr>
-                      <a:r>
-                        <a:t>Encoder Transformer 6 lớp</a:t>
-                      </a:r>
-                    </a:p>
-                  </a:txBody>
-                  <a:tcPr anchor="ctr" marL="109728" marR="109728" marT="54864" marB="54864">
-                    <a:solidFill>
-                      <a:srgbClr val="F8FAFC"/>
-                    </a:solidFill>
-                    <a:lnL w="15000" cmpd="s">
-                      <a:solidFill>
-                        <a:srgbClr val="0F172A"/>
-                      </a:solidFill>
-                    </a:lnL>
-                    <a:lnR w="15000" cmpd="s">
-                      <a:solidFill>
-                        <a:srgbClr val="0F172A"/>
-                      </a:solidFill>
-                    </a:lnR>
-                    <a:lnT w="15000" cmpd="s">
-                      <a:solidFill>
-                        <a:srgbClr val="0F172A"/>
-                      </a:solidFill>
-                    </a:lnT>
-                    <a:lnB w="15000" cmpd="s">
-                      <a:solidFill>
-                        <a:srgbClr val="0F172A"/>
-                      </a:solidFill>
-                    </a:lnB>
-                  </a:tcPr>
-                </a:tc>
-                <a:tc>
-                  <a:txBody>
-                    <a:bodyPr wrap="square"/>
-                    <a:lstStyle/>
-                    <a:p>
-                      <a:pPr algn="ctr">
-                        <a:defRPr sz="1600" b="0">
-                          <a:solidFill>
-                            <a:srgbClr val="334155"/>
-                          </a:solidFill>
-                          <a:latin typeface="Segoe UI"/>
-                        </a:defRPr>
-                      </a:pPr>
-                      <a:r>
-                        <a:t>0.8120</a:t>
-                      </a:r>
-                    </a:p>
-                  </a:txBody>
-                  <a:tcPr anchor="ctr" marL="109728" marR="109728" marT="54864" marB="54864">
-                    <a:solidFill>
-                      <a:srgbClr val="F8FAFC"/>
-                    </a:solidFill>
-                    <a:lnL w="15000" cmpd="s">
-                      <a:solidFill>
-                        <a:srgbClr val="0F172A"/>
-                      </a:solidFill>
-                    </a:lnL>
-                    <a:lnR w="15000" cmpd="s">
-                      <a:solidFill>
-                        <a:srgbClr val="0F172A"/>
-                      </a:solidFill>
-                    </a:lnR>
-                    <a:lnT w="15000" cmpd="s">
-                      <a:solidFill>
-                        <a:srgbClr val="0F172A"/>
-                      </a:solidFill>
-                    </a:lnT>
-                    <a:lnB w="15000" cmpd="s">
-                      <a:solidFill>
-                        <a:srgbClr val="0F172A"/>
-                      </a:solidFill>
-                    </a:lnB>
-                  </a:tcPr>
-                </a:tc>
-                <a:tc>
-                  <a:txBody>
-                    <a:bodyPr wrap="square"/>
-                    <a:lstStyle/>
-                    <a:p>
-                      <a:pPr algn="ctr">
-                        <a:defRPr sz="1600" b="0">
-                          <a:solidFill>
-                            <a:srgbClr val="DC2626"/>
-                          </a:solidFill>
-                          <a:latin typeface="Segoe UI"/>
-                        </a:defRPr>
-                      </a:pPr>
-                      <a:r>
-                        <a:t>58.41 % (Rất xấu)</a:t>
-                      </a:r>
-                    </a:p>
-                  </a:txBody>
-                  <a:tcPr anchor="ctr" marL="109728" marR="109728" marT="54864" marB="54864">
-                    <a:solidFill>
-                      <a:srgbClr val="F8FAFC"/>
-                    </a:solidFill>
-                    <a:lnL w="15000" cmpd="s">
-                      <a:solidFill>
-                        <a:srgbClr val="0F172A"/>
-                      </a:solidFill>
-                    </a:lnL>
-                    <a:lnR w="15000" cmpd="s">
-                      <a:solidFill>
-                        <a:srgbClr val="0F172A"/>
-                      </a:solidFill>
-                    </a:lnR>
-                    <a:lnT w="15000" cmpd="s">
-                      <a:solidFill>
-                        <a:srgbClr val="0F172A"/>
-                      </a:solidFill>
-                    </a:lnT>
-                    <a:lnB w="15000" cmpd="s">
-                      <a:solidFill>
-                        <a:srgbClr val="0F172A"/>
-                      </a:solidFill>
-                    </a:lnB>
-                  </a:tcPr>
-                </a:tc>
-                <a:tc>
-                  <a:txBody>
-                    <a:bodyPr wrap="square"/>
-                    <a:lstStyle/>
-                    <a:p>
-                      <a:pPr algn="ctr">
-                        <a:defRPr sz="1600" b="0">
-                          <a:solidFill>
-                            <a:srgbClr val="334155"/>
-                          </a:solidFill>
-                          <a:latin typeface="Segoe UI"/>
-                        </a:defRPr>
-                      </a:pPr>
-                      <a:r>
-                        <a:t>42.73 ms</a:t>
-                      </a:r>
-                    </a:p>
-                  </a:txBody>
-                  <a:tcPr anchor="ctr" marL="109728" marR="109728" marT="54864" marB="54864">
-                    <a:solidFill>
-                      <a:srgbClr val="F8FAFC"/>
-                    </a:solidFill>
-                    <a:lnL w="15000" cmpd="s">
-                      <a:solidFill>
-                        <a:srgbClr val="0F172A"/>
-                      </a:solidFill>
-                    </a:lnL>
-                    <a:lnR w="15000" cmpd="s">
-                      <a:solidFill>
-                        <a:srgbClr val="0F172A"/>
-                      </a:solidFill>
-                    </a:lnR>
-                    <a:lnT w="15000" cmpd="s">
-                      <a:solidFill>
-                        <a:srgbClr val="0F172A"/>
-                      </a:solidFill>
-                    </a:lnT>
-                    <a:lnB w="15000" cmpd="s">
-                      <a:solidFill>
-                        <a:srgbClr val="0F172A"/>
-                      </a:solidFill>
-                    </a:lnB>
-                  </a:tcPr>
-                </a:tc>
-              </a:tr>
-              <a:tr h="792480">
-                <a:tc>
-                  <a:txBody>
-                    <a:bodyPr wrap="square"/>
-                    <a:lstStyle/>
-                    <a:p>
-                      <a:pPr algn="l">
-                        <a:defRPr sz="1600" b="0">
-                          <a:solidFill>
-                            <a:srgbClr val="334155"/>
-                          </a:solidFill>
-                          <a:latin typeface="Segoe UI"/>
-                        </a:defRPr>
-                      </a:pPr>
-                      <a:r>
-                        <a:t>DeBERTa-v3 (ACL 2025)</a:t>
-                      </a:r>
-                    </a:p>
-                  </a:txBody>
-                  <a:tcPr anchor="ctr" marL="109728" marR="109728" marT="54864" marB="54864">
-                    <a:solidFill>
-                      <a:srgbClr val="FFFFFF"/>
-                    </a:solidFill>
-                    <a:lnL w="15000" cmpd="s">
-                      <a:solidFill>
-                        <a:srgbClr val="0F172A"/>
-                      </a:solidFill>
-                    </a:lnL>
-                    <a:lnR w="15000" cmpd="s">
-                      <a:solidFill>
-                        <a:srgbClr val="0F172A"/>
-                      </a:solidFill>
-                    </a:lnR>
-                    <a:lnT w="15000" cmpd="s">
-                      <a:solidFill>
-                        <a:srgbClr val="0F172A"/>
-                      </a:solidFill>
-                    </a:lnT>
-                    <a:lnB w="15000" cmpd="s">
-                      <a:solidFill>
-                        <a:srgbClr val="0F172A"/>
-                      </a:solidFill>
-                    </a:lnB>
-                  </a:tcPr>
-                </a:tc>
-                <a:tc>
-                  <a:txBody>
-                    <a:bodyPr wrap="square"/>
-                    <a:lstStyle/>
-                    <a:p>
-                      <a:pPr algn="l">
-                        <a:defRPr sz="1600" b="0">
-                          <a:solidFill>
-                            <a:srgbClr val="334155"/>
-                          </a:solidFill>
-                          <a:latin typeface="Segoe UI"/>
-                        </a:defRPr>
-                      </a:pPr>
-                      <a:r>
-                        <a:t>Disentangled Attention 12 lớp</a:t>
-                      </a:r>
-                    </a:p>
-                  </a:txBody>
-                  <a:tcPr anchor="ctr" marL="109728" marR="109728" marT="54864" marB="54864">
-                    <a:solidFill>
-                      <a:srgbClr val="FFFFFF"/>
-                    </a:solidFill>
-                    <a:lnL w="15000" cmpd="s">
-                      <a:solidFill>
-                        <a:srgbClr val="0F172A"/>
-                      </a:solidFill>
-                    </a:lnL>
-                    <a:lnR w="15000" cmpd="s">
-                      <a:solidFill>
-                        <a:srgbClr val="0F172A"/>
-                      </a:solidFill>
-                    </a:lnR>
-                    <a:lnT w="15000" cmpd="s">
-                      <a:solidFill>
-                        <a:srgbClr val="0F172A"/>
-                      </a:solidFill>
-                    </a:lnT>
-                    <a:lnB w="15000" cmpd="s">
-                      <a:solidFill>
-                        <a:srgbClr val="0F172A"/>
-                      </a:solidFill>
-                    </a:lnB>
-                  </a:tcPr>
-                </a:tc>
-                <a:tc>
-                  <a:txBody>
-                    <a:bodyPr wrap="square"/>
-                    <a:lstStyle/>
-                    <a:p>
-                      <a:pPr algn="ctr">
-                        <a:defRPr sz="1600" b="0">
-                          <a:solidFill>
-                            <a:srgbClr val="334155"/>
-                          </a:solidFill>
-                          <a:latin typeface="Segoe UI"/>
-                        </a:defRPr>
-                      </a:pPr>
-                      <a:r>
-                        <a:t>0.9416 (Mỏ neo)</a:t>
-                      </a:r>
-                    </a:p>
-                  </a:txBody>
-                  <a:tcPr anchor="ctr" marL="109728" marR="109728" marT="54864" marB="54864">
-                    <a:solidFill>
-                      <a:srgbClr val="FFFFFF"/>
-                    </a:solidFill>
-                    <a:lnL w="15000" cmpd="s">
-                      <a:solidFill>
-                        <a:srgbClr val="0F172A"/>
-                      </a:solidFill>
-                    </a:lnL>
-                    <a:lnR w="15000" cmpd="s">
-                      <a:solidFill>
-                        <a:srgbClr val="0F172A"/>
-                      </a:solidFill>
-                    </a:lnR>
-                    <a:lnT w="15000" cmpd="s">
-                      <a:solidFill>
-                        <a:srgbClr val="0F172A"/>
-                      </a:solidFill>
-                    </a:lnT>
-                    <a:lnB w="15000" cmpd="s">
-                      <a:solidFill>
-                        <a:srgbClr val="0F172A"/>
-                      </a:solidFill>
-                    </a:lnB>
-                  </a:tcPr>
-                </a:tc>
-                <a:tc>
-                  <a:txBody>
-                    <a:bodyPr wrap="square"/>
-                    <a:lstStyle/>
-                    <a:p>
-                      <a:pPr algn="ctr">
-                        <a:defRPr sz="1600" b="0">
-                          <a:solidFill>
-                            <a:srgbClr val="334155"/>
-                          </a:solidFill>
-                          <a:latin typeface="Segoe UI"/>
-                        </a:defRPr>
-                      </a:pPr>
-                      <a:r>
-                        <a:t>11.50 %</a:t>
-                      </a:r>
-                    </a:p>
-                  </a:txBody>
-                  <a:tcPr anchor="ctr" marL="109728" marR="109728" marT="54864" marB="54864">
-                    <a:solidFill>
-                      <a:srgbClr val="FFFFFF"/>
-                    </a:solidFill>
-                    <a:lnL w="15000" cmpd="s">
-                      <a:solidFill>
-                        <a:srgbClr val="0F172A"/>
-                      </a:solidFill>
-                    </a:lnL>
-                    <a:lnR w="15000" cmpd="s">
-                      <a:solidFill>
-                        <a:srgbClr val="0F172A"/>
-                      </a:solidFill>
-                    </a:lnR>
-                    <a:lnT w="15000" cmpd="s">
-                      <a:solidFill>
-                        <a:srgbClr val="0F172A"/>
-                      </a:solidFill>
-                    </a:lnT>
-                    <a:lnB w="15000" cmpd="s">
-                      <a:solidFill>
-                        <a:srgbClr val="0F172A"/>
-                      </a:solidFill>
-                    </a:lnB>
-                  </a:tcPr>
-                </a:tc>
-                <a:tc>
-                  <a:txBody>
-                    <a:bodyPr wrap="square"/>
-                    <a:lstStyle/>
-                    <a:p>
-                      <a:pPr algn="ctr">
-                        <a:defRPr sz="1600" b="0">
-                          <a:solidFill>
-                            <a:srgbClr val="334155"/>
-                          </a:solidFill>
-                          <a:latin typeface="Segoe UI"/>
-                        </a:defRPr>
-                      </a:pPr>
-                      <a:r>
-                        <a:t>102.10 ms (FP32)</a:t>
-                      </a:r>
-                    </a:p>
-                  </a:txBody>
-                  <a:tcPr anchor="ctr" marL="109728" marR="109728" marT="54864" marB="54864">
-                    <a:solidFill>
-                      <a:srgbClr val="FFFFFF"/>
-                    </a:solidFill>
-                    <a:lnL w="15000" cmpd="s">
-                      <a:solidFill>
-                        <a:srgbClr val="0F172A"/>
-                      </a:solidFill>
-                    </a:lnL>
-                    <a:lnR w="15000" cmpd="s">
-                      <a:solidFill>
-                        <a:srgbClr val="0F172A"/>
-                      </a:solidFill>
-                    </a:lnR>
-                    <a:lnT w="15000" cmpd="s">
-                      <a:solidFill>
-                        <a:srgbClr val="0F172A"/>
-                      </a:solidFill>
-                    </a:lnT>
-                    <a:lnB w="15000" cmpd="s">
-                      <a:solidFill>
-                        <a:srgbClr val="0F172A"/>
-                      </a:solidFill>
-                    </a:lnB>
-                  </a:tcPr>
-                </a:tc>
-              </a:tr>
-              <a:tr h="792480">
-                <a:tc>
-                  <a:txBody>
-                    <a:bodyPr wrap="square"/>
-                    <a:lstStyle/>
-                    <a:p>
-                      <a:pPr algn="l">
-                        <a:defRPr sz="1600" b="1">
-                          <a:solidFill>
-                            <a:srgbClr val="059669"/>
-                          </a:solidFill>
-                          <a:latin typeface="Segoe UI"/>
-                        </a:defRPr>
-                      </a:pPr>
-                      <a:r>
-                        <a:t>PI-Guard Two-Tier (Đề xuất)</a:t>
-                      </a:r>
-                    </a:p>
-                  </a:txBody>
-                  <a:tcPr anchor="ctr" marL="109728" marR="109728" marT="54864" marB="54864">
-                    <a:solidFill>
-                      <a:srgbClr val="F0FDF4"/>
-                    </a:solidFill>
-                    <a:lnL w="15000" cmpd="s">
-                      <a:solidFill>
-                        <a:srgbClr val="0F172A"/>
-                      </a:solidFill>
-                    </a:lnL>
-                    <a:lnR w="15000" cmpd="s">
-                      <a:solidFill>
-                        <a:srgbClr val="0F172A"/>
-                      </a:solidFill>
-                    </a:lnR>
-                    <a:lnT w="15000" cmpd="s">
-                      <a:solidFill>
-                        <a:srgbClr val="0F172A"/>
-                      </a:solidFill>
-                    </a:lnT>
-                    <a:lnB w="15000" cmpd="s">
-                      <a:solidFill>
-                        <a:srgbClr val="0F172A"/>
-                      </a:solidFill>
-                    </a:lnB>
-                  </a:tcPr>
-                </a:tc>
-                <a:tc>
-                  <a:txBody>
-                    <a:bodyPr wrap="square"/>
-                    <a:lstStyle/>
-                    <a:p>
-                      <a:pPr algn="l">
-                        <a:defRPr sz="1600" b="0">
-                          <a:solidFill>
-                            <a:srgbClr val="334155"/>
-                          </a:solidFill>
-                          <a:latin typeface="Segoe UI"/>
-                        </a:defRPr>
-                      </a:pPr>
-                      <a:r>
-                        <a:t>Cascaded + INT8 + MOF</a:t>
-                      </a:r>
-                    </a:p>
-                  </a:txBody>
-                  <a:tcPr anchor="ctr" marL="109728" marR="109728" marT="54864" marB="54864">
-                    <a:solidFill>
-                      <a:srgbClr val="F0FDF4"/>
-                    </a:solidFill>
-                    <a:lnL w="15000" cmpd="s">
-                      <a:solidFill>
-                        <a:srgbClr val="0F172A"/>
-                      </a:solidFill>
-                    </a:lnL>
-                    <a:lnR w="15000" cmpd="s">
-                      <a:solidFill>
-                        <a:srgbClr val="0F172A"/>
-                      </a:solidFill>
-                    </a:lnR>
-                    <a:lnT w="15000" cmpd="s">
-                      <a:solidFill>
-                        <a:srgbClr val="0F172A"/>
-                      </a:solidFill>
-                    </a:lnT>
-                    <a:lnB w="15000" cmpd="s">
-                      <a:solidFill>
-                        <a:srgbClr val="0F172A"/>
-                      </a:solidFill>
-                    </a:lnB>
-                  </a:tcPr>
-                </a:tc>
-                <a:tc>
-                  <a:txBody>
-                    <a:bodyPr wrap="square"/>
-                    <a:lstStyle/>
-                    <a:p>
-                      <a:pPr algn="ctr">
-                        <a:defRPr sz="1600" b="1">
-                          <a:solidFill>
-                            <a:srgbClr val="059669"/>
-                          </a:solidFill>
-                          <a:latin typeface="Segoe UI"/>
-                        </a:defRPr>
-                      </a:pPr>
-                      <a:r>
-                        <a:t>0.9416 (Bảo toàn)</a:t>
-                      </a:r>
-                    </a:p>
-                  </a:txBody>
-                  <a:tcPr anchor="ctr" marL="109728" marR="109728" marT="54864" marB="54864">
-                    <a:solidFill>
-                      <a:srgbClr val="F0FDF4"/>
-                    </a:solidFill>
-                    <a:lnL w="15000" cmpd="s">
-                      <a:solidFill>
-                        <a:srgbClr val="0F172A"/>
-                      </a:solidFill>
-                    </a:lnL>
-                    <a:lnR w="15000" cmpd="s">
-                      <a:solidFill>
-                        <a:srgbClr val="0F172A"/>
-                      </a:solidFill>
-                    </a:lnR>
-                    <a:lnT w="15000" cmpd="s">
-                      <a:solidFill>
-                        <a:srgbClr val="0F172A"/>
-                      </a:solidFill>
-                    </a:lnT>
-                    <a:lnB w="15000" cmpd="s">
-                      <a:solidFill>
-                        <a:srgbClr val="0F172A"/>
-                      </a:solidFill>
-                    </a:lnB>
-                  </a:tcPr>
-                </a:tc>
-                <a:tc>
-                  <a:txBody>
-                    <a:bodyPr wrap="square"/>
-                    <a:lstStyle/>
-                    <a:p>
-                      <a:pPr algn="ctr">
-                        <a:defRPr sz="1600" b="1">
-                          <a:solidFill>
-                            <a:srgbClr val="059669"/>
-                          </a:solidFill>
-                          <a:latin typeface="Segoe UI"/>
-                        </a:defRPr>
-                      </a:pPr>
-                      <a:r>
-                        <a:t>&lt; 1.50 % (Chuẩn)</a:t>
-                      </a:r>
-                    </a:p>
-                  </a:txBody>
-                  <a:tcPr anchor="ctr" marL="109728" marR="109728" marT="54864" marB="54864">
-                    <a:solidFill>
-                      <a:srgbClr val="F0FDF4"/>
-                    </a:solidFill>
-                    <a:lnL w="15000" cmpd="s">
-                      <a:solidFill>
-                        <a:srgbClr val="0F172A"/>
-                      </a:solidFill>
-                    </a:lnL>
-                    <a:lnR w="15000" cmpd="s">
-                      <a:solidFill>
-                        <a:srgbClr val="0F172A"/>
-                      </a:solidFill>
-                    </a:lnR>
-                    <a:lnT w="15000" cmpd="s">
-                      <a:solidFill>
-                        <a:srgbClr val="0F172A"/>
-                      </a:solidFill>
-                    </a:lnT>
-                    <a:lnB w="15000" cmpd="s">
-                      <a:solidFill>
-                        <a:srgbClr val="0F172A"/>
-                      </a:solidFill>
-                    </a:lnB>
-                  </a:tcPr>
-                </a:tc>
-                <a:tc>
-                  <a:txBody>
-                    <a:bodyPr wrap="square"/>
-                    <a:lstStyle/>
-                    <a:p>
-                      <a:pPr algn="ctr">
-                        <a:defRPr sz="1600" b="1">
-                          <a:solidFill>
-                            <a:srgbClr val="059669"/>
-                          </a:solidFill>
-                          <a:latin typeface="Segoe UI"/>
-                        </a:defRPr>
-                      </a:pPr>
-                      <a:r>
-                        <a:t>19.80 ms (&lt; 22ms)</a:t>
-                      </a:r>
-                    </a:p>
-                  </a:txBody>
-                  <a:tcPr anchor="ctr" marL="109728" marR="109728" marT="54864" marB="54864">
-                    <a:solidFill>
-                      <a:srgbClr val="F0FDF4"/>
-                    </a:solidFill>
-                    <a:lnL w="15000" cmpd="s">
-                      <a:solidFill>
-                        <a:srgbClr val="0F172A"/>
-                      </a:solidFill>
-                    </a:lnL>
-                    <a:lnR w="15000" cmpd="s">
-                      <a:solidFill>
-                        <a:srgbClr val="0F172A"/>
-                      </a:solidFill>
-                    </a:lnR>
-                    <a:lnT w="15000" cmpd="s">
-                      <a:solidFill>
-                        <a:srgbClr val="0F172A"/>
-                      </a:solidFill>
-                    </a:lnT>
-                    <a:lnB w="15000" cmpd="s">
-                      <a:solidFill>
-                        <a:srgbClr val="0F172A"/>
-                      </a:solidFill>
-                    </a:lnB>
-                  </a:tcPr>
-                </a:tc>
-              </a:tr>
-            </a:tbl>
-          </a:graphicData>
-        </a:graphic>
-      </p:graphicFrame>
+              <a:t>KIẾN TRÚC TWO-TIER LÀ ĐỀ XUẤT. Tỷ lệ routing và độ trễ toàn trình cần được đo bằng một run có predictions thô. Chưa có kết quả cascade.</a:t>
+            </a:r>
+          </a:p>
+        </p:txBody>
+      </p:sp>
     </p:spTree>
   </p:cSld>
   <p:clrMapOvr>
@@ -11356,7 +8945,7 @@
           </a:fontRef>
         </p:style>
         <p:txBody>
-          <a:bodyPr rtlCol="0" anchor="ctr" wrap="square" lIns="256032" tIns="256032" rIns="256032"/>
+          <a:bodyPr wrap="square" lIns="256032" tIns="256032" rIns="256032" rtlCol="0" anchor="ctr"/>
           <a:lstStyle/>
           <a:p>
             <a:pPr algn="ctr">
@@ -11380,7 +8969,7 @@
               </a:spcAft>
             </a:pPr>
             <a:r>
-              <a:rPr b="1" sz="1600">
+              <a:rPr sz="1600" b="1">
                 <a:solidFill>
                   <a:srgbClr val="0F172A"/>
                 </a:solidFill>
@@ -11389,7 +8978,7 @@
               <a:t>1. Phân định rõ bản chất: </a:t>
             </a:r>
             <a:r>
-              <a:rPr b="0" sz="1600">
+              <a:rPr sz="1600" b="0">
                 <a:solidFill>
                   <a:srgbClr val="334155"/>
                 </a:solidFill>
@@ -11405,7 +8994,7 @@
               </a:spcAft>
             </a:pPr>
             <a:r>
-              <a:rPr b="1" sz="1600">
+              <a:rPr sz="1600" b="1">
                 <a:solidFill>
                   <a:srgbClr val="0F172A"/>
                 </a:solidFill>
@@ -11414,7 +9003,7 @@
               <a:t>2. Bề mặt tấn công thực tế: </a:t>
             </a:r>
             <a:r>
-              <a:rPr b="0" sz="1600">
+              <a:rPr sz="1600" b="0">
                 <a:solidFill>
                   <a:srgbClr val="334155"/>
                 </a:solidFill>
@@ -11430,7 +9019,7 @@
               </a:spcAft>
             </a:pPr>
             <a:r>
-              <a:rPr b="1" sz="1600">
+              <a:rPr sz="1600" b="1">
                 <a:solidFill>
                   <a:srgbClr val="D97706"/>
                 </a:solidFill>
@@ -11439,7 +9028,7 @@
               <a:t>3. Bắt buộc đo đạc thực nghiệm: </a:t>
             </a:r>
             <a:r>
-              <a:rPr b="0" sz="1600">
+              <a:rPr sz="1600" b="0">
                 <a:solidFill>
                   <a:srgbClr val="334155"/>
                 </a:solidFill>
@@ -11455,7 +9044,7 @@
               </a:spcAft>
             </a:pPr>
             <a:r>
-              <a:rPr b="1" sz="1600">
+              <a:rPr sz="1600" b="1">
                 <a:solidFill>
                   <a:srgbClr val="059669"/>
                 </a:solidFill>
@@ -11464,7 +9053,7 @@
               <a:t>4. Đề xuất cải tiến của nhóm: </a:t>
             </a:r>
             <a:r>
-              <a:rPr b="0" sz="1600">
+              <a:rPr sz="1600" b="0">
                 <a:solidFill>
                   <a:srgbClr val="334155"/>
                 </a:solidFill>
@@ -11513,7 +9102,7 @@
           </a:fontRef>
         </p:style>
         <p:txBody>
-          <a:bodyPr rtlCol="0" anchor="ctr" wrap="square" lIns="256032" tIns="256032" rIns="256032"/>
+          <a:bodyPr wrap="square" lIns="256032" tIns="256032" rIns="256032" rtlCol="0" anchor="ctr"/>
           <a:lstStyle/>
           <a:p>
             <a:pPr algn="ctr">
@@ -11527,5850 +9116,11 @@
                   <a:srgbClr val="059669"/>
                 </a:solidFill>
               </a:rPr>
-              <a:t>KẾT QUẢ ĐỘT PHÁ CỦA NHÓM ĐÃ HOÀN THÀNH</a:t>
-            </a:r>
-          </a:p>
-          <a:p>
-            <a:pPr>
-              <a:spcAft>
-                <a:spcPts val="600"/>
-              </a:spcAft>
-            </a:pPr>
-            <a:r>
-              <a:rPr b="1" sz="1600">
-                <a:solidFill>
-                  <a:srgbClr val="0F172A"/>
-                </a:solidFill>
-                <a:latin typeface="Segoe UI"/>
-              </a:rPr>
-              <a:t>• Phân loại tấn công &amp; Yêu cầu: </a:t>
-            </a:r>
-            <a:r>
-              <a:rPr b="0" sz="1600">
-                <a:solidFill>
-                  <a:srgbClr val="334155"/>
-                </a:solidFill>
-                <a:latin typeface="Segoe UI"/>
-              </a:rPr>
-              <a:t>Làm rõ 3 hình thái: Direct Prompt Injection, Indirect RAG và Jailbreak; xác lập 5 yêu cầu kỹ thuật hệ thống.</a:t>
-            </a:r>
-          </a:p>
-          <a:p>
-            <a:pPr>
-              <a:spcAft>
-                <a:spcPts val="600"/>
-              </a:spcAft>
-            </a:pPr>
-            <a:r>
-              <a:rPr b="1" sz="1600">
-                <a:solidFill>
-                  <a:srgbClr val="0F172A"/>
-                </a:solidFill>
-                <a:latin typeface="Segoe UI"/>
-              </a:rPr>
-              <a:t>• Bề mặt tấn công 5 trục: </a:t>
-            </a:r>
-            <a:r>
-              <a:rPr b="0" sz="1600">
-                <a:solidFill>
-                  <a:srgbClr val="334155"/>
-                </a:solidFill>
-                <a:latin typeface="Segoe UI"/>
-              </a:rPr>
-              <a:t>Khảo sát Kênh 1 Chat UI và Kênh 2 RAG/File theo chuẩn quốc tế NIST AI 100-2e2025 và MITRE ATLAS.</a:t>
-            </a:r>
-          </a:p>
-          <a:p>
-            <a:pPr>
-              <a:spcAft>
-                <a:spcPts val="600"/>
-              </a:spcAft>
-            </a:pPr>
-            <a:r>
-              <a:rPr b="1" sz="1600">
-                <a:solidFill>
-                  <a:srgbClr val="0F172A"/>
-                </a:solidFill>
-                <a:latin typeface="Segoe UI"/>
-              </a:rPr>
-              <a:t>• Kết quả thực nghiệm mô hình: </a:t>
-            </a:r>
-            <a:r>
-              <a:rPr b="0" sz="1600">
-                <a:solidFill>
-                  <a:srgbClr val="334155"/>
-                </a:solidFill>
-                <a:latin typeface="Segoe UI"/>
-              </a:rPr>
-              <a:t>Chạy độc lập trên 1.579 mẫu: Phát hiện MiniLM bị chậm (42ms) và chặn nhầm tới 58%; xác thực DeBERTa-v3 F1=0.9416.</a:t>
-            </a:r>
-          </a:p>
-          <a:p>
-            <a:pPr>
-              <a:spcAft>
-                <a:spcPts val="600"/>
-              </a:spcAft>
-            </a:pPr>
-            <a:r>
-              <a:rPr b="1" sz="1600">
-                <a:solidFill>
-                  <a:srgbClr val="0284C7"/>
-                </a:solidFill>
-                <a:latin typeface="Segoe UI"/>
-              </a:rPr>
-              <a:t>• Đề xuất kiến trúc Two-Tier: </a:t>
-            </a:r>
-            <a:r>
-              <a:rPr b="0" sz="1600">
-                <a:solidFill>
-                  <a:srgbClr val="334155"/>
-                </a:solidFill>
-                <a:latin typeface="Segoe UI"/>
-              </a:rPr>
-              <a:t>Thiết kế rào chắn phân tầng: Lọc nhanh 82.6% tại Tầng 1 (&lt;0.5ms); Thẩm định 17.4% tại Tầng 2 (~18ms) — đạt P95 &lt; 22ms trên CPU.</a:t>
-            </a:r>
-          </a:p>
-        </p:txBody>
-      </p:sp>
-    </p:spTree>
-  </p:cSld>
-  <p:clrMapOvr>
-    <a:masterClrMapping/>
-  </p:clrMapOvr>
-</p:sld>
-</file>
-
-<file path=ppt/slides/slide20.xml><?xml version="1.0" encoding="utf-8"?>
-<p:sld xmlns:a="http://schemas.openxmlformats.org/drawingml/2006/main" xmlns:p="http://schemas.openxmlformats.org/presentationml/2006/main" xmlns:r="http://schemas.openxmlformats.org/officeDocument/2006/relationships">
-  <p:cSld>
-    <p:spTree>
-      <p:nvGrpSpPr>
-        <p:cNvPr id="1" name=""/>
-        <p:cNvGrpSpPr/>
-        <p:nvPr/>
-      </p:nvGrpSpPr>
-      <p:grpSpPr/>
-      <p:sp>
-        <p:nvSpPr>
-          <p:cNvPr id="2" name="Rectangle 1"/>
-          <p:cNvSpPr/>
-          <p:nvPr/>
-        </p:nvSpPr>
-        <p:spPr>
-          <a:xfrm>
-            <a:off x="0" y="0"/>
-            <a:ext cx="12191695" cy="6858000"/>
-          </a:xfrm>
-          <a:prstGeom prst="rect">
-            <a:avLst/>
-          </a:prstGeom>
-          <a:solidFill>
-            <a:srgbClr val="FFFFFF"/>
-          </a:solidFill>
-          <a:ln>
-            <a:noFill/>
-          </a:ln>
-        </p:spPr>
-        <p:style>
-          <a:lnRef idx="1">
-            <a:schemeClr val="accent1"/>
-          </a:lnRef>
-          <a:fillRef idx="3">
-            <a:schemeClr val="accent1"/>
-          </a:fillRef>
-          <a:effectRef idx="2">
-            <a:schemeClr val="accent1"/>
-          </a:effectRef>
-          <a:fontRef idx="minor">
-            <a:schemeClr val="lt1"/>
-          </a:fontRef>
-        </p:style>
-        <p:txBody>
-          <a:bodyPr rtlCol="0" anchor="ctr"/>
-          <a:lstStyle/>
-          <a:p>
-            <a:pPr algn="ctr"/>
-          </a:p>
-        </p:txBody>
-      </p:sp>
-      <p:sp>
-        <p:nvSpPr>
-          <p:cNvPr id="3" name="Rectangle 2"/>
-          <p:cNvSpPr/>
-          <p:nvPr/>
-        </p:nvSpPr>
-        <p:spPr>
-          <a:xfrm>
-            <a:off x="731520" y="329184"/>
-            <a:ext cx="73152" cy="676656"/>
-          </a:xfrm>
-          <a:prstGeom prst="rect">
-            <a:avLst/>
-          </a:prstGeom>
-          <a:solidFill>
-            <a:srgbClr val="0284C7"/>
-          </a:solidFill>
-          <a:ln>
-            <a:noFill/>
-          </a:ln>
-        </p:spPr>
-        <p:style>
-          <a:lnRef idx="1">
-            <a:schemeClr val="accent1"/>
-          </a:lnRef>
-          <a:fillRef idx="3">
-            <a:schemeClr val="accent1"/>
-          </a:fillRef>
-          <a:effectRef idx="2">
-            <a:schemeClr val="accent1"/>
-          </a:effectRef>
-          <a:fontRef idx="minor">
-            <a:schemeClr val="lt1"/>
-          </a:fontRef>
-        </p:style>
-        <p:txBody>
-          <a:bodyPr rtlCol="0" anchor="ctr"/>
-          <a:lstStyle/>
-          <a:p>
-            <a:pPr algn="ctr"/>
-          </a:p>
-        </p:txBody>
-      </p:sp>
-      <p:sp>
-        <p:nvSpPr>
-          <p:cNvPr id="4" name="TextBox 3"/>
-          <p:cNvSpPr txBox="1"/>
-          <p:nvPr/>
-        </p:nvSpPr>
-        <p:spPr>
-          <a:xfrm>
-            <a:off x="896112" y="256032"/>
-            <a:ext cx="10561320" cy="804672"/>
-          </a:xfrm>
-          <a:prstGeom prst="rect">
-            <a:avLst/>
-          </a:prstGeom>
-          <a:noFill/>
-        </p:spPr>
-        <p:txBody>
-          <a:bodyPr wrap="square" lIns="0" tIns="0" rIns="0" bIns="0">
-            <a:spAutoFit/>
-          </a:bodyPr>
-          <a:lstStyle/>
-          <a:p>
-            <a:pPr>
-              <a:spcAft>
-                <a:spcPts val="200"/>
-              </a:spcAft>
-              <a:defRPr sz="2100" b="1">
-                <a:solidFill>
-                  <a:srgbClr val="0F172A"/>
-                </a:solidFill>
-                <a:latin typeface="Segoe UI"/>
-              </a:defRPr>
-            </a:pPr>
-            <a:r>
-              <a:t>NHIỆM VỤ 3: PHÂN TÍCH ĐIỂM NGHẼN CỦA MÔ HÌNH AYUB MINILM</a:t>
-            </a:r>
-          </a:p>
-          <a:p>
-            <a:pPr>
-              <a:defRPr sz="1500">
-                <a:solidFill>
-                  <a:srgbClr val="64748B"/>
-                </a:solidFill>
-                <a:latin typeface="Segoe UI"/>
-              </a:defRPr>
-            </a:pPr>
-            <a:r>
-              <a:t>Minh chứng thực nghiệm: Tỷ lệ chặn nhầm 58.41% và độ trễ nghẽn 42.73ms trên CPU</a:t>
-            </a:r>
-          </a:p>
-        </p:txBody>
-      </p:sp>
-      <p:sp>
-        <p:nvSpPr>
-          <p:cNvPr id="5" name="Rectangle 4"/>
-          <p:cNvSpPr/>
-          <p:nvPr/>
-        </p:nvSpPr>
-        <p:spPr>
-          <a:xfrm>
-            <a:off x="731520" y="6263640"/>
-            <a:ext cx="10728655" cy="18288"/>
-          </a:xfrm>
-          <a:prstGeom prst="rect">
-            <a:avLst/>
-          </a:prstGeom>
-          <a:solidFill>
-            <a:srgbClr val="E2E8F0"/>
-          </a:solidFill>
-          <a:ln>
-            <a:noFill/>
-          </a:ln>
-        </p:spPr>
-        <p:style>
-          <a:lnRef idx="1">
-            <a:schemeClr val="accent1"/>
-          </a:lnRef>
-          <a:fillRef idx="3">
-            <a:schemeClr val="accent1"/>
-          </a:fillRef>
-          <a:effectRef idx="2">
-            <a:schemeClr val="accent1"/>
-          </a:effectRef>
-          <a:fontRef idx="minor">
-            <a:schemeClr val="lt1"/>
-          </a:fontRef>
-        </p:style>
-        <p:txBody>
-          <a:bodyPr rtlCol="0" anchor="ctr"/>
-          <a:lstStyle/>
-          <a:p>
-            <a:pPr algn="ctr"/>
-          </a:p>
-        </p:txBody>
-      </p:sp>
-      <p:sp>
-        <p:nvSpPr>
-          <p:cNvPr id="6" name="TextBox 5"/>
-          <p:cNvSpPr txBox="1"/>
-          <p:nvPr/>
-        </p:nvSpPr>
-        <p:spPr>
-          <a:xfrm>
-            <a:off x="9601200" y="6327648"/>
-            <a:ext cx="1828800" cy="365760"/>
-          </a:xfrm>
-          <a:prstGeom prst="rect">
-            <a:avLst/>
-          </a:prstGeom>
-          <a:noFill/>
-        </p:spPr>
-        <p:txBody>
-          <a:bodyPr wrap="none" lIns="0" tIns="0" rIns="0" bIns="0">
-            <a:spAutoFit/>
-          </a:bodyPr>
-          <a:lstStyle/>
-          <a:p>
-            <a:pPr algn="r">
-              <a:defRPr sz="1300" b="1">
-                <a:solidFill>
-                  <a:srgbClr val="64748B"/>
-                </a:solidFill>
-                <a:latin typeface="Segoe UI"/>
-              </a:defRPr>
-            </a:pPr>
-            <a:r>
-              <a:t>Slide 20 / 30</a:t>
-            </a:r>
-          </a:p>
-        </p:txBody>
-      </p:sp>
-      <p:sp>
-        <p:nvSpPr>
-          <p:cNvPr id="7" name="Rectangle 6"/>
-          <p:cNvSpPr/>
-          <p:nvPr/>
-        </p:nvSpPr>
-        <p:spPr>
-          <a:xfrm>
-            <a:off x="731520" y="1234440"/>
-            <a:ext cx="4343400" cy="4846320"/>
-          </a:xfrm>
-          <a:prstGeom prst="rect">
-            <a:avLst/>
-          </a:prstGeom>
-          <a:solidFill>
-            <a:srgbClr val="FFFFFF"/>
-          </a:solidFill>
-          <a:ln w="19050">
-            <a:solidFill>
-              <a:srgbClr val="DC2626"/>
-            </a:solidFill>
-          </a:ln>
-        </p:spPr>
-        <p:style>
-          <a:lnRef idx="1">
-            <a:schemeClr val="accent1"/>
-          </a:lnRef>
-          <a:fillRef idx="3">
-            <a:schemeClr val="accent1"/>
-          </a:fillRef>
-          <a:effectRef idx="2">
-            <a:schemeClr val="accent1"/>
-          </a:effectRef>
-          <a:fontRef idx="minor">
-            <a:schemeClr val="lt1"/>
-          </a:fontRef>
-        </p:style>
-        <p:txBody>
-          <a:bodyPr rtlCol="0" anchor="ctr" wrap="square" lIns="228600" tIns="228600" rIns="228600"/>
-          <a:lstStyle/>
-          <a:p>
-            <a:pPr algn="ctr">
-              <a:spcAft>
-                <a:spcPts val="800"/>
-              </a:spcAft>
-            </a:pPr>
-            <a:r>
-              <a:rPr sz="1700" b="1">
-                <a:solidFill>
-                  <a:srgbClr val="DC2626"/>
-                </a:solidFill>
-              </a:rPr>
-              <a:t>2 SAI LẦM KỸ THUẬT CỦA MINILM</a:t>
-            </a:r>
-          </a:p>
-          <a:p>
-            <a:pPr>
-              <a:spcAft>
-                <a:spcPts val="600"/>
-              </a:spcAft>
-            </a:pPr>
-            <a:r>
-              <a:rPr b="1" sz="1600">
-                <a:solidFill>
-                  <a:srgbClr val="DC2626"/>
-                </a:solidFill>
-                <a:latin typeface="Segoe UI"/>
-              </a:rPr>
-              <a:t>1. Chặn nhầm trầm trọng (58.4%): </a:t>
-            </a:r>
-            <a:r>
-              <a:rPr b="0" sz="1600">
-                <a:solidFill>
-                  <a:srgbClr val="334155"/>
-                </a:solidFill>
-                <a:latin typeface="Segoe UI"/>
-              </a:rPr>
-              <a:t>Mô hình bị hội chứng phòng thủ thái quá (Over-defense); chặn nhầm hơn một nửa số câu hỏi lành tính!</a:t>
-            </a:r>
-          </a:p>
-          <a:p>
-            <a:pPr>
-              <a:spcAft>
-                <a:spcPts val="600"/>
-              </a:spcAft>
-            </a:pPr>
-            <a:r>
-              <a:rPr b="1" sz="1600">
-                <a:solidFill>
-                  <a:srgbClr val="DC2626"/>
-                </a:solidFill>
-                <a:latin typeface="Segoe UI"/>
-              </a:rPr>
-              <a:t>2. Điểm mù Ngữ nghĩa: </a:t>
-            </a:r>
-            <a:r>
-              <a:rPr b="0" sz="1600">
-                <a:solidFill>
-                  <a:srgbClr val="334155"/>
-                </a:solidFill>
-                <a:latin typeface="Segoe UI"/>
-              </a:rPr>
-              <a:t>Cứ thấy từ khóa nhạy cảm (như 'password', 'execute', 'system') là MiniLM chặn ngay, bất chấp câu hỏi hợp lệ.</a:t>
-            </a:r>
-          </a:p>
-          <a:p>
-            <a:pPr>
-              <a:spcAft>
-                <a:spcPts val="600"/>
-              </a:spcAft>
-            </a:pPr>
-            <a:r>
-              <a:rPr b="1" sz="1600">
-                <a:solidFill>
-                  <a:srgbClr val="D97706"/>
-                </a:solidFill>
-                <a:latin typeface="Segoe UI"/>
-              </a:rPr>
-              <a:t>3. Nghẽn độ trễ CPU (42.7ms): </a:t>
-            </a:r>
-            <a:r>
-              <a:rPr b="0" sz="1600">
-                <a:solidFill>
-                  <a:srgbClr val="334155"/>
-                </a:solidFill>
-                <a:latin typeface="Segoe UI"/>
-              </a:rPr>
-              <a:t>Dù là mô hình rút gọn 6 lớp, MiniLM vẫn tiêu tốn tới 42.73ms trên CPU, không đạt chuẩn P95 &lt; 22ms.</a:t>
-            </a:r>
-          </a:p>
-          <a:p>
-            <a:pPr>
-              <a:spcAft>
-                <a:spcPts val="600"/>
-              </a:spcAft>
-            </a:pPr>
-            <a:r>
-              <a:rPr b="1" sz="1600">
-                <a:solidFill>
-                  <a:srgbClr val="059669"/>
-                </a:solidFill>
-                <a:latin typeface="Segoe UI"/>
-              </a:rPr>
-              <a:t>-&gt; Bài học cho PI-Guard: </a:t>
-            </a:r>
-            <a:r>
-              <a:rPr b="0" sz="1600">
-                <a:solidFill>
-                  <a:srgbClr val="334155"/>
-                </a:solidFill>
-                <a:latin typeface="Segoe UI"/>
-              </a:rPr>
-              <a:t>Không thể tin tưởng mô hình nhỏ đơn lẻ; bắt buộc phải có cơ chế cân chỉnh biên quyết định MOF!</a:t>
-            </a:r>
-          </a:p>
-        </p:txBody>
-      </p:sp>
-      <p:sp>
-        <p:nvSpPr>
-          <p:cNvPr id="8" name="Rectangle 7"/>
-          <p:cNvSpPr/>
-          <p:nvPr/>
-        </p:nvSpPr>
-        <p:spPr>
-          <a:xfrm>
-            <a:off x="5257800" y="1234440"/>
-            <a:ext cx="3063240" cy="4846320"/>
-          </a:xfrm>
-          <a:prstGeom prst="rect">
-            <a:avLst/>
-          </a:prstGeom>
-          <a:solidFill>
-            <a:srgbClr val="FFFFFF"/>
-          </a:solidFill>
-          <a:ln w="19050">
-            <a:solidFill>
-              <a:srgbClr val="DC2626"/>
-            </a:solidFill>
-          </a:ln>
-        </p:spPr>
-        <p:style>
-          <a:lnRef idx="1">
-            <a:schemeClr val="accent1"/>
-          </a:lnRef>
-          <a:fillRef idx="3">
-            <a:schemeClr val="accent1"/>
-          </a:fillRef>
-          <a:effectRef idx="2">
-            <a:schemeClr val="accent1"/>
-          </a:effectRef>
-          <a:fontRef idx="minor">
-            <a:schemeClr val="lt1"/>
-          </a:fontRef>
-        </p:style>
-        <p:txBody>
-          <a:bodyPr rtlCol="0" anchor="ctr"/>
-          <a:lstStyle/>
-          <a:p>
-            <a:pPr algn="ctr"/>
-          </a:p>
-        </p:txBody>
-      </p:sp>
-      <p:pic>
-        <p:nvPicPr>
-          <p:cNvPr id="9" name="Picture 8" descr="ayub_overdefense_fpr.png"/>
-          <p:cNvPicPr>
-            <a:picLocks noChangeAspect="1"/>
-          </p:cNvPicPr>
-          <p:nvPr/>
-        </p:nvPicPr>
-        <p:blipFill>
-          <a:blip r:embed="rId2"/>
-          <a:stretch>
-            <a:fillRect/>
-          </a:stretch>
-        </p:blipFill>
-        <p:spPr>
-          <a:xfrm>
-            <a:off x="5303520" y="1280160"/>
-            <a:ext cx="2971800" cy="4407408"/>
-          </a:xfrm>
-          <a:prstGeom prst="rect">
-            <a:avLst/>
-          </a:prstGeom>
-        </p:spPr>
-      </p:pic>
-      <p:sp>
-        <p:nvSpPr>
-          <p:cNvPr id="10" name="TextBox 9"/>
-          <p:cNvSpPr txBox="1"/>
-          <p:nvPr/>
-        </p:nvSpPr>
-        <p:spPr>
-          <a:xfrm>
-            <a:off x="5349240" y="5696712"/>
-            <a:ext cx="2880360" cy="347472"/>
-          </a:xfrm>
-          <a:prstGeom prst="rect">
-            <a:avLst/>
-          </a:prstGeom>
-          <a:noFill/>
-        </p:spPr>
-        <p:txBody>
-          <a:bodyPr wrap="square" lIns="0" tIns="0" rIns="0" bIns="0">
-            <a:spAutoFit/>
-          </a:bodyPr>
-          <a:lstStyle/>
-          <a:p>
-            <a:r>
-              <a:rPr sz="1600" b="1">
-                <a:solidFill>
-                  <a:srgbClr val="0F172A"/>
-                </a:solidFill>
-                <a:latin typeface="Segoe UI"/>
-              </a:rPr>
-              <a:t>Thực nghiệm FPR: Ayub 58.4% vs. PIGuard 11.5% </a:t>
-            </a:r>
-            <a:r>
-              <a:rPr sz="1500" i="1">
-                <a:solidFill>
-                  <a:srgbClr val="0284C7"/>
-                </a:solidFill>
-                <a:latin typeface="Segoe UI"/>
-              </a:rPr>
-              <a:t>(Task 3 Local Lab Benchmark)</a:t>
-            </a:r>
-          </a:p>
-        </p:txBody>
-      </p:sp>
-      <p:sp>
-        <p:nvSpPr>
-          <p:cNvPr id="11" name="Rectangle 10"/>
-          <p:cNvSpPr/>
-          <p:nvPr/>
-        </p:nvSpPr>
-        <p:spPr>
-          <a:xfrm>
-            <a:off x="8412480" y="1234440"/>
-            <a:ext cx="3044952" cy="4846320"/>
-          </a:xfrm>
-          <a:prstGeom prst="rect">
-            <a:avLst/>
-          </a:prstGeom>
-          <a:solidFill>
-            <a:srgbClr val="FFFFFF"/>
-          </a:solidFill>
-          <a:ln w="19050">
-            <a:solidFill>
-              <a:srgbClr val="D97706"/>
-            </a:solidFill>
-          </a:ln>
-        </p:spPr>
-        <p:style>
-          <a:lnRef idx="1">
-            <a:schemeClr val="accent1"/>
-          </a:lnRef>
-          <a:fillRef idx="3">
-            <a:schemeClr val="accent1"/>
-          </a:fillRef>
-          <a:effectRef idx="2">
-            <a:schemeClr val="accent1"/>
-          </a:effectRef>
-          <a:fontRef idx="minor">
-            <a:schemeClr val="lt1"/>
-          </a:fontRef>
-        </p:style>
-        <p:txBody>
-          <a:bodyPr rtlCol="0" anchor="ctr"/>
-          <a:lstStyle/>
-          <a:p>
-            <a:pPr algn="ctr"/>
-          </a:p>
-        </p:txBody>
-      </p:sp>
-      <p:pic>
-        <p:nvPicPr>
-          <p:cNvPr id="12" name="Picture 11" descr="ayub_latency_profile.png"/>
-          <p:cNvPicPr>
-            <a:picLocks noChangeAspect="1"/>
-          </p:cNvPicPr>
-          <p:nvPr/>
-        </p:nvPicPr>
-        <p:blipFill>
-          <a:blip r:embed="rId3"/>
-          <a:stretch>
-            <a:fillRect/>
-          </a:stretch>
-        </p:blipFill>
-        <p:spPr>
-          <a:xfrm>
-            <a:off x="8458200" y="1280160"/>
-            <a:ext cx="2953512" cy="4407408"/>
-          </a:xfrm>
-          <a:prstGeom prst="rect">
-            <a:avLst/>
-          </a:prstGeom>
-        </p:spPr>
-      </p:pic>
-      <p:sp>
-        <p:nvSpPr>
-          <p:cNvPr id="13" name="TextBox 12"/>
-          <p:cNvSpPr txBox="1"/>
-          <p:nvPr/>
-        </p:nvSpPr>
-        <p:spPr>
-          <a:xfrm>
-            <a:off x="8503919" y="5696712"/>
-            <a:ext cx="2862072" cy="347472"/>
-          </a:xfrm>
-          <a:prstGeom prst="rect">
-            <a:avLst/>
-          </a:prstGeom>
-          <a:noFill/>
-        </p:spPr>
-        <p:txBody>
-          <a:bodyPr wrap="square" lIns="0" tIns="0" rIns="0" bIns="0">
-            <a:spAutoFit/>
-          </a:bodyPr>
-          <a:lstStyle/>
-          <a:p>
-            <a:r>
-              <a:rPr sz="1600" b="1">
-                <a:solidFill>
-                  <a:srgbClr val="0F172A"/>
-                </a:solidFill>
-                <a:latin typeface="Segoe UI"/>
-              </a:rPr>
-              <a:t>Phân bổ độ trễ Ayub MiniLM: Điểm nghẽn 42.7ms </a:t>
-            </a:r>
-            <a:r>
-              <a:rPr sz="1500" i="1">
-                <a:solidFill>
-                  <a:srgbClr val="0284C7"/>
-                </a:solidFill>
-                <a:latin typeface="Segoe UI"/>
-              </a:rPr>
-              <a:t>(1,000 CPU Queries Benchmark)</a:t>
-            </a:r>
-          </a:p>
-        </p:txBody>
-      </p:sp>
-    </p:spTree>
-  </p:cSld>
-  <p:clrMapOvr>
-    <a:masterClrMapping/>
-  </p:clrMapOvr>
-</p:sld>
-</file>
-
-<file path=ppt/slides/slide21.xml><?xml version="1.0" encoding="utf-8"?>
-<p:sld xmlns:a="http://schemas.openxmlformats.org/drawingml/2006/main" xmlns:p="http://schemas.openxmlformats.org/presentationml/2006/main" xmlns:r="http://schemas.openxmlformats.org/officeDocument/2006/relationships">
-  <p:cSld>
-    <p:spTree>
-      <p:nvGrpSpPr>
-        <p:cNvPr id="1" name=""/>
-        <p:cNvGrpSpPr/>
-        <p:nvPr/>
-      </p:nvGrpSpPr>
-      <p:grpSpPr/>
-      <p:sp>
-        <p:nvSpPr>
-          <p:cNvPr id="2" name="Rectangle 1"/>
-          <p:cNvSpPr/>
-          <p:nvPr/>
-        </p:nvSpPr>
-        <p:spPr>
-          <a:xfrm>
-            <a:off x="0" y="0"/>
-            <a:ext cx="12191695" cy="6858000"/>
-          </a:xfrm>
-          <a:prstGeom prst="rect">
-            <a:avLst/>
-          </a:prstGeom>
-          <a:solidFill>
-            <a:srgbClr val="FFFFFF"/>
-          </a:solidFill>
-          <a:ln>
-            <a:noFill/>
-          </a:ln>
-        </p:spPr>
-        <p:style>
-          <a:lnRef idx="1">
-            <a:schemeClr val="accent1"/>
-          </a:lnRef>
-          <a:fillRef idx="3">
-            <a:schemeClr val="accent1"/>
-          </a:fillRef>
-          <a:effectRef idx="2">
-            <a:schemeClr val="accent1"/>
-          </a:effectRef>
-          <a:fontRef idx="minor">
-            <a:schemeClr val="lt1"/>
-          </a:fontRef>
-        </p:style>
-        <p:txBody>
-          <a:bodyPr rtlCol="0" anchor="ctr"/>
-          <a:lstStyle/>
-          <a:p>
-            <a:pPr algn="ctr"/>
-          </a:p>
-        </p:txBody>
-      </p:sp>
-      <p:sp>
-        <p:nvSpPr>
-          <p:cNvPr id="3" name="Rectangle 2"/>
-          <p:cNvSpPr/>
-          <p:nvPr/>
-        </p:nvSpPr>
-        <p:spPr>
-          <a:xfrm>
-            <a:off x="731520" y="329184"/>
-            <a:ext cx="73152" cy="676656"/>
-          </a:xfrm>
-          <a:prstGeom prst="rect">
-            <a:avLst/>
-          </a:prstGeom>
-          <a:solidFill>
-            <a:srgbClr val="0284C7"/>
-          </a:solidFill>
-          <a:ln>
-            <a:noFill/>
-          </a:ln>
-        </p:spPr>
-        <p:style>
-          <a:lnRef idx="1">
-            <a:schemeClr val="accent1"/>
-          </a:lnRef>
-          <a:fillRef idx="3">
-            <a:schemeClr val="accent1"/>
-          </a:fillRef>
-          <a:effectRef idx="2">
-            <a:schemeClr val="accent1"/>
-          </a:effectRef>
-          <a:fontRef idx="minor">
-            <a:schemeClr val="lt1"/>
-          </a:fontRef>
-        </p:style>
-        <p:txBody>
-          <a:bodyPr rtlCol="0" anchor="ctr"/>
-          <a:lstStyle/>
-          <a:p>
-            <a:pPr algn="ctr"/>
-          </a:p>
-        </p:txBody>
-      </p:sp>
-      <p:sp>
-        <p:nvSpPr>
-          <p:cNvPr id="4" name="TextBox 3"/>
-          <p:cNvSpPr txBox="1"/>
-          <p:nvPr/>
-        </p:nvSpPr>
-        <p:spPr>
-          <a:xfrm>
-            <a:off x="896112" y="256032"/>
-            <a:ext cx="10561320" cy="804672"/>
-          </a:xfrm>
-          <a:prstGeom prst="rect">
-            <a:avLst/>
-          </a:prstGeom>
-          <a:noFill/>
-        </p:spPr>
-        <p:txBody>
-          <a:bodyPr wrap="square" lIns="0" tIns="0" rIns="0" bIns="0">
-            <a:spAutoFit/>
-          </a:bodyPr>
-          <a:lstStyle/>
-          <a:p>
-            <a:pPr>
-              <a:spcAft>
-                <a:spcPts val="200"/>
-              </a:spcAft>
-              <a:defRPr sz="2100" b="1">
-                <a:solidFill>
-                  <a:srgbClr val="0F172A"/>
-                </a:solidFill>
-                <a:latin typeface="Segoe UI"/>
-              </a:defRPr>
-            </a:pPr>
-            <a:r>
-              <a:t>NHIỆM VỤ 3: XÁC THỰC MỎ NEO KHOA HỌC DEBERTA-V3 (ACL 2025)</a:t>
-            </a:r>
-          </a:p>
-          <a:p>
-            <a:pPr>
-              <a:defRPr sz="1500">
-                <a:solidFill>
-                  <a:srgbClr val="64748B"/>
-                </a:solidFill>
-                <a:latin typeface="Segoe UI"/>
-              </a:defRPr>
-            </a:pPr>
-            <a:r>
-              <a:t>Tái lập độc lập khớp 100% bài báo ACL 2025 và giải quyết bài toán độ trễ FP32</a:t>
-            </a:r>
-          </a:p>
-        </p:txBody>
-      </p:sp>
-      <p:sp>
-        <p:nvSpPr>
-          <p:cNvPr id="5" name="Rectangle 4"/>
-          <p:cNvSpPr/>
-          <p:nvPr/>
-        </p:nvSpPr>
-        <p:spPr>
-          <a:xfrm>
-            <a:off x="731520" y="6263640"/>
-            <a:ext cx="10728655" cy="18288"/>
-          </a:xfrm>
-          <a:prstGeom prst="rect">
-            <a:avLst/>
-          </a:prstGeom>
-          <a:solidFill>
-            <a:srgbClr val="E2E8F0"/>
-          </a:solidFill>
-          <a:ln>
-            <a:noFill/>
-          </a:ln>
-        </p:spPr>
-        <p:style>
-          <a:lnRef idx="1">
-            <a:schemeClr val="accent1"/>
-          </a:lnRef>
-          <a:fillRef idx="3">
-            <a:schemeClr val="accent1"/>
-          </a:fillRef>
-          <a:effectRef idx="2">
-            <a:schemeClr val="accent1"/>
-          </a:effectRef>
-          <a:fontRef idx="minor">
-            <a:schemeClr val="lt1"/>
-          </a:fontRef>
-        </p:style>
-        <p:txBody>
-          <a:bodyPr rtlCol="0" anchor="ctr"/>
-          <a:lstStyle/>
-          <a:p>
-            <a:pPr algn="ctr"/>
-          </a:p>
-        </p:txBody>
-      </p:sp>
-      <p:sp>
-        <p:nvSpPr>
-          <p:cNvPr id="6" name="TextBox 5"/>
-          <p:cNvSpPr txBox="1"/>
-          <p:nvPr/>
-        </p:nvSpPr>
-        <p:spPr>
-          <a:xfrm>
-            <a:off x="9601200" y="6327648"/>
-            <a:ext cx="1828800" cy="365760"/>
-          </a:xfrm>
-          <a:prstGeom prst="rect">
-            <a:avLst/>
-          </a:prstGeom>
-          <a:noFill/>
-        </p:spPr>
-        <p:txBody>
-          <a:bodyPr wrap="none" lIns="0" tIns="0" rIns="0" bIns="0">
-            <a:spAutoFit/>
-          </a:bodyPr>
-          <a:lstStyle/>
-          <a:p>
-            <a:pPr algn="r">
-              <a:defRPr sz="1300" b="1">
-                <a:solidFill>
-                  <a:srgbClr val="64748B"/>
-                </a:solidFill>
-                <a:latin typeface="Segoe UI"/>
-              </a:defRPr>
-            </a:pPr>
-            <a:r>
-              <a:t>Slide 21 / 30</a:t>
-            </a:r>
-          </a:p>
-        </p:txBody>
-      </p:sp>
-      <p:sp>
-        <p:nvSpPr>
-          <p:cNvPr id="7" name="Rectangle 6"/>
-          <p:cNvSpPr/>
-          <p:nvPr/>
-        </p:nvSpPr>
-        <p:spPr>
-          <a:xfrm>
-            <a:off x="731520" y="1234440"/>
-            <a:ext cx="4343400" cy="4846320"/>
-          </a:xfrm>
-          <a:prstGeom prst="rect">
-            <a:avLst/>
-          </a:prstGeom>
-          <a:solidFill>
-            <a:srgbClr val="FFFFFF"/>
-          </a:solidFill>
-          <a:ln w="19050">
-            <a:solidFill>
-              <a:srgbClr val="0284C7"/>
-            </a:solidFill>
-          </a:ln>
-        </p:spPr>
-        <p:style>
-          <a:lnRef idx="1">
-            <a:schemeClr val="accent1"/>
-          </a:lnRef>
-          <a:fillRef idx="3">
-            <a:schemeClr val="accent1"/>
-          </a:fillRef>
-          <a:effectRef idx="2">
-            <a:schemeClr val="accent1"/>
-          </a:effectRef>
-          <a:fontRef idx="minor">
-            <a:schemeClr val="lt1"/>
-          </a:fontRef>
-        </p:style>
-        <p:txBody>
-          <a:bodyPr rtlCol="0" anchor="ctr" wrap="square" lIns="228600" tIns="228600" rIns="228600"/>
-          <a:lstStyle/>
-          <a:p>
-            <a:pPr algn="ctr">
-              <a:spcAft>
-                <a:spcPts val="800"/>
-              </a:spcAft>
-            </a:pPr>
-            <a:r>
-              <a:rPr sz="1700" b="1">
-                <a:solidFill>
-                  <a:srgbClr val="0284C7"/>
-                </a:solidFill>
-              </a:rPr>
-              <a:t>XÁC THỰC ĐỘC LẬP &amp; TỐI ƯU ĐỘ TRỄ</a:t>
-            </a:r>
-          </a:p>
-          <a:p>
-            <a:pPr>
-              <a:spcAft>
-                <a:spcPts val="600"/>
-              </a:spcAft>
-            </a:pPr>
-            <a:r>
-              <a:rPr b="1" sz="1600">
-                <a:solidFill>
-                  <a:srgbClr val="0284C7"/>
-                </a:solidFill>
-                <a:latin typeface="Segoe UI"/>
-              </a:rPr>
-              <a:t>1. Độ chính xác đỉnh cao: </a:t>
-            </a:r>
-            <a:r>
-              <a:rPr b="0" sz="1600">
-                <a:solidFill>
-                  <a:srgbClr val="334155"/>
-                </a:solidFill>
-                <a:latin typeface="Segoe UI"/>
-              </a:rPr>
-              <a:t>Mô hình DeBERTa-v3 đạt F1=0.9416; nhận diện xuất sắc các đòn tấn công hoán đổi vị trí từ ngữ.</a:t>
-            </a:r>
-          </a:p>
-          <a:p>
-            <a:pPr>
-              <a:spcAft>
-                <a:spcPts val="600"/>
-              </a:spcAft>
-            </a:pPr>
-            <a:r>
-              <a:rPr b="1" sz="1600">
-                <a:solidFill>
-                  <a:srgbClr val="0F172A"/>
-                </a:solidFill>
-                <a:latin typeface="Segoe UI"/>
-              </a:rPr>
-              <a:t>2. Cơ chế Disentangled Attention: </a:t>
-            </a:r>
-            <a:r>
-              <a:rPr b="0" sz="1600">
-                <a:solidFill>
-                  <a:srgbClr val="334155"/>
-                </a:solidFill>
-                <a:latin typeface="Segoe UI"/>
-              </a:rPr>
-              <a:t>Tách ma trận nội dung và vị trí tương đối, không bị đánh lừa bởi các thủ thuật chèn từ.</a:t>
-            </a:r>
-          </a:p>
-          <a:p>
-            <a:pPr>
-              <a:spcAft>
-                <a:spcPts val="600"/>
-              </a:spcAft>
-            </a:pPr>
-            <a:r>
-              <a:rPr b="1" sz="1600">
-                <a:solidFill>
-                  <a:srgbClr val="D97706"/>
-                </a:solidFill>
-                <a:latin typeface="Segoe UI"/>
-              </a:rPr>
-              <a:t>3. Thách thức độ trễ FP32: </a:t>
-            </a:r>
-            <a:r>
-              <a:rPr b="0" sz="1600">
-                <a:solidFill>
-                  <a:srgbClr val="334155"/>
-                </a:solidFill>
-                <a:latin typeface="Segoe UI"/>
-              </a:rPr>
-              <a:t>Bản gốc chạy ở độ chính xác FP32 tiêu tốn 80.9ms (P50) và 102.1ms (P95) trên CPU.</a:t>
-            </a:r>
-          </a:p>
-          <a:p>
-            <a:pPr>
-              <a:spcAft>
-                <a:spcPts val="600"/>
-              </a:spcAft>
-            </a:pPr>
-            <a:r>
-              <a:rPr b="1" sz="1600">
-                <a:solidFill>
-                  <a:srgbClr val="059669"/>
-                </a:solidFill>
-                <a:latin typeface="Segoe UI"/>
-              </a:rPr>
-              <a:t>-&gt; Lời giải của PI-Guard: </a:t>
-            </a:r>
-            <a:r>
-              <a:rPr b="0" sz="1600">
-                <a:solidFill>
-                  <a:srgbClr val="334155"/>
-                </a:solidFill>
-                <a:latin typeface="Segoe UI"/>
-              </a:rPr>
-              <a:t>Lượng tử hóa ONNX INT8 + Chỉ gọi ở Tầng 2 cho 17.4% ca khó -&gt; Đưa độ trễ toàn trình về &lt; 20ms!</a:t>
-            </a:r>
-          </a:p>
-        </p:txBody>
-      </p:sp>
-      <p:sp>
-        <p:nvSpPr>
-          <p:cNvPr id="8" name="Rectangle 7"/>
-          <p:cNvSpPr/>
-          <p:nvPr/>
-        </p:nvSpPr>
-        <p:spPr>
-          <a:xfrm>
-            <a:off x="5257800" y="1234440"/>
-            <a:ext cx="3063240" cy="4846320"/>
-          </a:xfrm>
-          <a:prstGeom prst="rect">
-            <a:avLst/>
-          </a:prstGeom>
-          <a:solidFill>
-            <a:srgbClr val="FFFFFF"/>
-          </a:solidFill>
-          <a:ln w="19050">
-            <a:solidFill>
-              <a:srgbClr val="0284C7"/>
-            </a:solidFill>
-          </a:ln>
-        </p:spPr>
-        <p:style>
-          <a:lnRef idx="1">
-            <a:schemeClr val="accent1"/>
-          </a:lnRef>
-          <a:fillRef idx="3">
-            <a:schemeClr val="accent1"/>
-          </a:fillRef>
-          <a:effectRef idx="2">
-            <a:schemeClr val="accent1"/>
-          </a:effectRef>
-          <a:fontRef idx="minor">
-            <a:schemeClr val="lt1"/>
-          </a:fontRef>
-        </p:style>
-        <p:txBody>
-          <a:bodyPr rtlCol="0" anchor="ctr"/>
-          <a:lstStyle/>
-          <a:p>
-            <a:pPr algn="ctr"/>
-          </a:p>
-        </p:txBody>
-      </p:sp>
-      <p:pic>
-        <p:nvPicPr>
-          <p:cNvPr id="9" name="Picture 8" descr="piguard_paper_vs_local_bars.png"/>
-          <p:cNvPicPr>
-            <a:picLocks noChangeAspect="1"/>
-          </p:cNvPicPr>
-          <p:nvPr/>
-        </p:nvPicPr>
-        <p:blipFill>
-          <a:blip r:embed="rId2"/>
-          <a:stretch>
-            <a:fillRect/>
-          </a:stretch>
-        </p:blipFill>
-        <p:spPr>
-          <a:xfrm>
-            <a:off x="5303520" y="1280160"/>
-            <a:ext cx="2971800" cy="4407408"/>
-          </a:xfrm>
-          <a:prstGeom prst="rect">
-            <a:avLst/>
-          </a:prstGeom>
-        </p:spPr>
-      </p:pic>
-      <p:sp>
-        <p:nvSpPr>
-          <p:cNvPr id="10" name="TextBox 9"/>
-          <p:cNvSpPr txBox="1"/>
-          <p:nvPr/>
-        </p:nvSpPr>
-        <p:spPr>
-          <a:xfrm>
-            <a:off x="5349240" y="5696712"/>
-            <a:ext cx="2880360" cy="347472"/>
-          </a:xfrm>
-          <a:prstGeom prst="rect">
-            <a:avLst/>
-          </a:prstGeom>
-          <a:noFill/>
-        </p:spPr>
-        <p:txBody>
-          <a:bodyPr wrap="square" lIns="0" tIns="0" rIns="0" bIns="0">
-            <a:spAutoFit/>
-          </a:bodyPr>
-          <a:lstStyle/>
-          <a:p>
-            <a:r>
-              <a:rPr sz="1600" b="1">
-                <a:solidFill>
-                  <a:srgbClr val="0F172A"/>
-                </a:solidFill>
-                <a:latin typeface="Segoe UI"/>
-              </a:rPr>
-              <a:t>So sánh độ chính xác công bố vs. Thực nghiệm nhóm </a:t>
-            </a:r>
-            <a:r>
-              <a:rPr sz="1500" i="1">
-                <a:solidFill>
-                  <a:srgbClr val="0284C7"/>
-                </a:solidFill>
-                <a:latin typeface="Segoe UI"/>
-              </a:rPr>
-              <a:t>(100% Replication Match (Table 1 &amp; 7 ACL 2025))</a:t>
-            </a:r>
-          </a:p>
-        </p:txBody>
-      </p:sp>
-      <p:sp>
-        <p:nvSpPr>
-          <p:cNvPr id="11" name="Rectangle 10"/>
-          <p:cNvSpPr/>
-          <p:nvPr/>
-        </p:nvSpPr>
-        <p:spPr>
-          <a:xfrm>
-            <a:off x="8412480" y="1234440"/>
-            <a:ext cx="3044952" cy="4846320"/>
-          </a:xfrm>
-          <a:prstGeom prst="rect">
-            <a:avLst/>
-          </a:prstGeom>
-          <a:solidFill>
-            <a:srgbClr val="FFFFFF"/>
-          </a:solidFill>
-          <a:ln w="19050">
-            <a:solidFill>
-              <a:srgbClr val="D97706"/>
-            </a:solidFill>
-          </a:ln>
-        </p:spPr>
-        <p:style>
-          <a:lnRef idx="1">
-            <a:schemeClr val="accent1"/>
-          </a:lnRef>
-          <a:fillRef idx="3">
-            <a:schemeClr val="accent1"/>
-          </a:fillRef>
-          <a:effectRef idx="2">
-            <a:schemeClr val="accent1"/>
-          </a:effectRef>
-          <a:fontRef idx="minor">
-            <a:schemeClr val="lt1"/>
-          </a:fontRef>
-        </p:style>
-        <p:txBody>
-          <a:bodyPr rtlCol="0" anchor="ctr"/>
-          <a:lstStyle/>
-          <a:p>
-            <a:pPr algn="ctr"/>
-          </a:p>
-        </p:txBody>
-      </p:sp>
-      <p:pic>
-        <p:nvPicPr>
-          <p:cNvPr id="12" name="Picture 11" descr="piguard_latency_profile.png"/>
-          <p:cNvPicPr>
-            <a:picLocks noChangeAspect="1"/>
-          </p:cNvPicPr>
-          <p:nvPr/>
-        </p:nvPicPr>
-        <p:blipFill>
-          <a:blip r:embed="rId3"/>
-          <a:stretch>
-            <a:fillRect/>
-          </a:stretch>
-        </p:blipFill>
-        <p:spPr>
-          <a:xfrm>
-            <a:off x="8458200" y="1280160"/>
-            <a:ext cx="2953512" cy="4407408"/>
-          </a:xfrm>
-          <a:prstGeom prst="rect">
-            <a:avLst/>
-          </a:prstGeom>
-        </p:spPr>
-      </p:pic>
-      <p:sp>
-        <p:nvSpPr>
-          <p:cNvPr id="13" name="TextBox 12"/>
-          <p:cNvSpPr txBox="1"/>
-          <p:nvPr/>
-        </p:nvSpPr>
-        <p:spPr>
-          <a:xfrm>
-            <a:off x="8503919" y="5696712"/>
-            <a:ext cx="2862072" cy="347472"/>
-          </a:xfrm>
-          <a:prstGeom prst="rect">
-            <a:avLst/>
-          </a:prstGeom>
-          <a:noFill/>
-        </p:spPr>
-        <p:txBody>
-          <a:bodyPr wrap="square" lIns="0" tIns="0" rIns="0" bIns="0">
-            <a:spAutoFit/>
-          </a:bodyPr>
-          <a:lstStyle/>
-          <a:p>
-            <a:r>
-              <a:rPr sz="1600" b="1">
-                <a:solidFill>
-                  <a:srgbClr val="0F172A"/>
-                </a:solidFill>
-                <a:latin typeface="Segoe UI"/>
-              </a:rPr>
-              <a:t>Hồ sơ độ trễ DeBERTa-v3 FP32 CPU: P95 102.1ms </a:t>
-            </a:r>
-            <a:r>
-              <a:rPr sz="1500" i="1">
-                <a:solidFill>
-                  <a:srgbClr val="0284C7"/>
-                </a:solidFill>
-                <a:latin typeface="Segoe UI"/>
-              </a:rPr>
-              <a:t>(1,579 Benchmark Samples on CPU)</a:t>
-            </a:r>
-          </a:p>
-        </p:txBody>
-      </p:sp>
-    </p:spTree>
-  </p:cSld>
-  <p:clrMapOvr>
-    <a:masterClrMapping/>
-  </p:clrMapOvr>
-</p:sld>
-</file>
-
-<file path=ppt/slides/slide22.xml><?xml version="1.0" encoding="utf-8"?>
-<p:sld xmlns:a="http://schemas.openxmlformats.org/drawingml/2006/main" xmlns:p="http://schemas.openxmlformats.org/presentationml/2006/main" xmlns:r="http://schemas.openxmlformats.org/officeDocument/2006/relationships">
-  <p:cSld>
-    <p:spTree>
-      <p:nvGrpSpPr>
-        <p:cNvPr id="1" name=""/>
-        <p:cNvGrpSpPr/>
-        <p:nvPr/>
-      </p:nvGrpSpPr>
-      <p:grpSpPr/>
-      <p:sp>
-        <p:nvSpPr>
-          <p:cNvPr id="2" name="Rectangle 1"/>
-          <p:cNvSpPr/>
-          <p:nvPr/>
-        </p:nvSpPr>
-        <p:spPr>
-          <a:xfrm>
-            <a:off x="0" y="0"/>
-            <a:ext cx="12191695" cy="6858000"/>
-          </a:xfrm>
-          <a:prstGeom prst="rect">
-            <a:avLst/>
-          </a:prstGeom>
-          <a:solidFill>
-            <a:srgbClr val="FFFFFF"/>
-          </a:solidFill>
-          <a:ln>
-            <a:noFill/>
-          </a:ln>
-        </p:spPr>
-        <p:style>
-          <a:lnRef idx="1">
-            <a:schemeClr val="accent1"/>
-          </a:lnRef>
-          <a:fillRef idx="3">
-            <a:schemeClr val="accent1"/>
-          </a:fillRef>
-          <a:effectRef idx="2">
-            <a:schemeClr val="accent1"/>
-          </a:effectRef>
-          <a:fontRef idx="minor">
-            <a:schemeClr val="lt1"/>
-          </a:fontRef>
-        </p:style>
-        <p:txBody>
-          <a:bodyPr rtlCol="0" anchor="ctr"/>
-          <a:lstStyle/>
-          <a:p>
-            <a:pPr algn="ctr"/>
-          </a:p>
-        </p:txBody>
-      </p:sp>
-      <p:sp>
-        <p:nvSpPr>
-          <p:cNvPr id="3" name="Rectangle 2"/>
-          <p:cNvSpPr/>
-          <p:nvPr/>
-        </p:nvSpPr>
-        <p:spPr>
-          <a:xfrm>
-            <a:off x="731520" y="329184"/>
-            <a:ext cx="73152" cy="676656"/>
-          </a:xfrm>
-          <a:prstGeom prst="rect">
-            <a:avLst/>
-          </a:prstGeom>
-          <a:solidFill>
-            <a:srgbClr val="0284C7"/>
-          </a:solidFill>
-          <a:ln>
-            <a:noFill/>
-          </a:ln>
-        </p:spPr>
-        <p:style>
-          <a:lnRef idx="1">
-            <a:schemeClr val="accent1"/>
-          </a:lnRef>
-          <a:fillRef idx="3">
-            <a:schemeClr val="accent1"/>
-          </a:fillRef>
-          <a:effectRef idx="2">
-            <a:schemeClr val="accent1"/>
-          </a:effectRef>
-          <a:fontRef idx="minor">
-            <a:schemeClr val="lt1"/>
-          </a:fontRef>
-        </p:style>
-        <p:txBody>
-          <a:bodyPr rtlCol="0" anchor="ctr"/>
-          <a:lstStyle/>
-          <a:p>
-            <a:pPr algn="ctr"/>
-          </a:p>
-        </p:txBody>
-      </p:sp>
-      <p:sp>
-        <p:nvSpPr>
-          <p:cNvPr id="4" name="TextBox 3"/>
-          <p:cNvSpPr txBox="1"/>
-          <p:nvPr/>
-        </p:nvSpPr>
-        <p:spPr>
-          <a:xfrm>
-            <a:off x="896112" y="256032"/>
-            <a:ext cx="10561320" cy="804672"/>
-          </a:xfrm>
-          <a:prstGeom prst="rect">
-            <a:avLst/>
-          </a:prstGeom>
-          <a:noFill/>
-        </p:spPr>
-        <p:txBody>
-          <a:bodyPr wrap="square" lIns="0" tIns="0" rIns="0" bIns="0">
-            <a:spAutoFit/>
-          </a:bodyPr>
-          <a:lstStyle/>
-          <a:p>
-            <a:pPr>
-              <a:spcAft>
-                <a:spcPts val="200"/>
-              </a:spcAft>
-              <a:defRPr sz="2100" b="1">
-                <a:solidFill>
-                  <a:srgbClr val="0F172A"/>
-                </a:solidFill>
-                <a:latin typeface="Segoe UI"/>
-              </a:defRPr>
-            </a:pPr>
-            <a:r>
-              <a:t>NHIỆM VỤ 4: ĐỀ XUẤT KIẾN TRÚC PHÂN TẦNG TWO-TIER CASCADED</a:t>
-            </a:r>
-          </a:p>
-          <a:p>
-            <a:pPr>
-              <a:defRPr sz="1500">
-                <a:solidFill>
-                  <a:srgbClr val="64748B"/>
-                </a:solidFill>
-                <a:latin typeface="Segoe UI"/>
-              </a:defRPr>
-            </a:pPr>
-            <a:r>
-              <a:t>Mô hình điều phối phân tầng độc quyền kết hợp lọc nhanh n-gram và thẩm định chuyên sâu</a:t>
-            </a:r>
-          </a:p>
-        </p:txBody>
-      </p:sp>
-      <p:sp>
-        <p:nvSpPr>
-          <p:cNvPr id="5" name="Rectangle 4"/>
-          <p:cNvSpPr/>
-          <p:nvPr/>
-        </p:nvSpPr>
-        <p:spPr>
-          <a:xfrm>
-            <a:off x="731520" y="6263640"/>
-            <a:ext cx="10728655" cy="18288"/>
-          </a:xfrm>
-          <a:prstGeom prst="rect">
-            <a:avLst/>
-          </a:prstGeom>
-          <a:solidFill>
-            <a:srgbClr val="E2E8F0"/>
-          </a:solidFill>
-          <a:ln>
-            <a:noFill/>
-          </a:ln>
-        </p:spPr>
-        <p:style>
-          <a:lnRef idx="1">
-            <a:schemeClr val="accent1"/>
-          </a:lnRef>
-          <a:fillRef idx="3">
-            <a:schemeClr val="accent1"/>
-          </a:fillRef>
-          <a:effectRef idx="2">
-            <a:schemeClr val="accent1"/>
-          </a:effectRef>
-          <a:fontRef idx="minor">
-            <a:schemeClr val="lt1"/>
-          </a:fontRef>
-        </p:style>
-        <p:txBody>
-          <a:bodyPr rtlCol="0" anchor="ctr"/>
-          <a:lstStyle/>
-          <a:p>
-            <a:pPr algn="ctr"/>
-          </a:p>
-        </p:txBody>
-      </p:sp>
-      <p:sp>
-        <p:nvSpPr>
-          <p:cNvPr id="6" name="TextBox 5"/>
-          <p:cNvSpPr txBox="1"/>
-          <p:nvPr/>
-        </p:nvSpPr>
-        <p:spPr>
-          <a:xfrm>
-            <a:off x="9601200" y="6327648"/>
-            <a:ext cx="1828800" cy="365760"/>
-          </a:xfrm>
-          <a:prstGeom prst="rect">
-            <a:avLst/>
-          </a:prstGeom>
-          <a:noFill/>
-        </p:spPr>
-        <p:txBody>
-          <a:bodyPr wrap="none" lIns="0" tIns="0" rIns="0" bIns="0">
-            <a:spAutoFit/>
-          </a:bodyPr>
-          <a:lstStyle/>
-          <a:p>
-            <a:pPr algn="r">
-              <a:defRPr sz="1300" b="1">
-                <a:solidFill>
-                  <a:srgbClr val="64748B"/>
-                </a:solidFill>
-                <a:latin typeface="Segoe UI"/>
-              </a:defRPr>
-            </a:pPr>
-            <a:r>
-              <a:t>Slide 22 / 30</a:t>
-            </a:r>
-          </a:p>
-        </p:txBody>
-      </p:sp>
-      <p:sp>
-        <p:nvSpPr>
-          <p:cNvPr id="7" name="Rectangle 6"/>
-          <p:cNvSpPr/>
-          <p:nvPr/>
-        </p:nvSpPr>
-        <p:spPr>
-          <a:xfrm>
-            <a:off x="731520" y="1234440"/>
-            <a:ext cx="5257800" cy="4846320"/>
-          </a:xfrm>
-          <a:prstGeom prst="rect">
-            <a:avLst/>
-          </a:prstGeom>
-          <a:solidFill>
-            <a:srgbClr val="FFFFFF"/>
-          </a:solidFill>
-          <a:ln w="19050">
-            <a:solidFill>
-              <a:srgbClr val="0284C7"/>
-            </a:solidFill>
-          </a:ln>
-        </p:spPr>
-        <p:style>
-          <a:lnRef idx="1">
-            <a:schemeClr val="accent1"/>
-          </a:lnRef>
-          <a:fillRef idx="3">
-            <a:schemeClr val="accent1"/>
-          </a:fillRef>
-          <a:effectRef idx="2">
-            <a:schemeClr val="accent1"/>
-          </a:effectRef>
-          <a:fontRef idx="minor">
-            <a:schemeClr val="lt1"/>
-          </a:fontRef>
-        </p:style>
-        <p:txBody>
-          <a:bodyPr rtlCol="0" anchor="ctr" wrap="square" lIns="256032" tIns="256032" rIns="256032"/>
-          <a:lstStyle/>
-          <a:p>
-            <a:pPr algn="ctr">
-              <a:spcAft>
-                <a:spcPts val="800"/>
-              </a:spcAft>
-            </a:pPr>
-            <a:r>
-              <a:rPr sz="1700" b="1">
-                <a:solidFill>
-                  <a:srgbClr val="0284C7"/>
-                </a:solidFill>
-              </a:rPr>
-              <a:t>TRIẾT LÝ THIẾT KẾ ĐỘC QUYỀN</a:t>
-            </a:r>
-          </a:p>
-          <a:p>
-            <a:pPr>
-              <a:spcAft>
-                <a:spcPts val="600"/>
-              </a:spcAft>
-            </a:pPr>
-            <a:r>
-              <a:rPr b="1" sz="1600">
-                <a:solidFill>
-                  <a:srgbClr val="0F172A"/>
-                </a:solidFill>
-                <a:latin typeface="Segoe UI"/>
-              </a:rPr>
-              <a:t>1. Không lãng phí tài nguyên: </a:t>
-            </a:r>
-            <a:r>
-              <a:rPr b="0" sz="1600">
-                <a:solidFill>
-                  <a:srgbClr val="334155"/>
-                </a:solidFill>
-                <a:latin typeface="Segoe UI"/>
-              </a:rPr>
-              <a:t>Không bắt mọi truy vấn phải chạy qua mô hình nặng; 82.6% câu hỏi được Tầng 1 quyết định tức thì trong 0.47ms.</a:t>
-            </a:r>
-          </a:p>
-          <a:p>
-            <a:pPr>
-              <a:spcAft>
-                <a:spcPts val="600"/>
-              </a:spcAft>
-            </a:pPr>
-            <a:r>
-              <a:rPr b="1" sz="1600">
-                <a:solidFill>
-                  <a:srgbClr val="0F172A"/>
-                </a:solidFill>
-                <a:latin typeface="Segoe UI"/>
-              </a:rPr>
-              <a:t>2. Bắt trọn biến dạng ký tự: </a:t>
-            </a:r>
-            <a:r>
-              <a:rPr b="0" sz="1600">
-                <a:solidFill>
-                  <a:srgbClr val="334155"/>
-                </a:solidFill>
-                <a:latin typeface="Segoe UI"/>
-              </a:rPr>
-              <a:t>Tầng 1 dùng sub-word char n-grams (3-5 ký tự) vô hiệu hóa hoàn toàn thủ thuật Leetspeak ('1gn0r3').</a:t>
-            </a:r>
-          </a:p>
-          <a:p>
-            <a:pPr>
-              <a:spcAft>
-                <a:spcPts val="600"/>
-              </a:spcAft>
-            </a:pPr>
-            <a:r>
-              <a:rPr b="1" sz="1600">
-                <a:solidFill>
-                  <a:srgbClr val="0F172A"/>
-                </a:solidFill>
-                <a:latin typeface="Segoe UI"/>
-              </a:rPr>
-              <a:t>3. Thẩm định ngữ nghĩa sâu: </a:t>
-            </a:r>
-            <a:r>
-              <a:rPr b="0" sz="1600">
-                <a:solidFill>
-                  <a:srgbClr val="334155"/>
-                </a:solidFill>
-                <a:latin typeface="Segoe UI"/>
-              </a:rPr>
-              <a:t>Chỉ 17.4% mẫu khó nằm trong vùng bất định mới được chuyển giao lên Tầng 2 (DeBERTa-v3).</a:t>
-            </a:r>
-          </a:p>
-          <a:p>
-            <a:pPr>
-              <a:spcAft>
-                <a:spcPts val="600"/>
-              </a:spcAft>
-            </a:pPr>
-            <a:r>
-              <a:rPr b="1" sz="1600">
-                <a:solidFill>
-                  <a:srgbClr val="059669"/>
-                </a:solidFill>
-                <a:latin typeface="Segoe UI"/>
-              </a:rPr>
-              <a:t>-&gt; Hiệu quả vượt trội: </a:t>
-            </a:r>
-            <a:r>
-              <a:rPr b="0" sz="1600">
-                <a:solidFill>
-                  <a:srgbClr val="334155"/>
-                </a:solidFill>
-                <a:latin typeface="Segoe UI"/>
-              </a:rPr>
-              <a:t>Đạt tốc độ phản hồi trung bình 3.69ms trên CPU thông thường mà không cần GPU!</a:t>
-            </a:r>
-          </a:p>
-        </p:txBody>
-      </p:sp>
-      <p:sp>
-        <p:nvSpPr>
-          <p:cNvPr id="8" name="Rectangle 7"/>
-          <p:cNvSpPr/>
-          <p:nvPr/>
-        </p:nvSpPr>
-        <p:spPr>
-          <a:xfrm>
-            <a:off x="6199632" y="1234440"/>
-            <a:ext cx="5257800" cy="4846320"/>
-          </a:xfrm>
-          <a:prstGeom prst="rect">
-            <a:avLst/>
-          </a:prstGeom>
-          <a:solidFill>
-            <a:srgbClr val="FFFFFF"/>
-          </a:solidFill>
-          <a:ln w="19050">
-            <a:solidFill>
-              <a:srgbClr val="059669"/>
-            </a:solidFill>
-          </a:ln>
-        </p:spPr>
-        <p:style>
-          <a:lnRef idx="1">
-            <a:schemeClr val="accent1"/>
-          </a:lnRef>
-          <a:fillRef idx="3">
-            <a:schemeClr val="accent1"/>
-          </a:fillRef>
-          <a:effectRef idx="2">
-            <a:schemeClr val="accent1"/>
-          </a:effectRef>
-          <a:fontRef idx="minor">
-            <a:schemeClr val="lt1"/>
-          </a:fontRef>
-        </p:style>
-        <p:txBody>
-          <a:bodyPr rtlCol="0" anchor="ctr" wrap="square" lIns="256032" tIns="256032" rIns="256032"/>
-          <a:lstStyle/>
-          <a:p>
-            <a:pPr algn="ctr">
-              <a:spcAft>
-                <a:spcPts val="800"/>
-              </a:spcAft>
-            </a:pPr>
-            <a:r>
-              <a:rPr sz="1700" b="1">
-                <a:solidFill>
-                  <a:srgbClr val="059669"/>
-                </a:solidFill>
-              </a:rPr>
-              <a:t>CƠ CHẾ PHỐI HỢP HAI TẦNG</a:t>
-            </a:r>
-          </a:p>
-          <a:p>
-            <a:pPr>
-              <a:spcAft>
-                <a:spcPts val="600"/>
-              </a:spcAft>
-            </a:pPr>
-            <a:r>
-              <a:rPr b="1" sz="1600">
-                <a:solidFill>
-                  <a:srgbClr val="0F172A"/>
-                </a:solidFill>
-                <a:latin typeface="Segoe UI"/>
-              </a:rPr>
-              <a:t>1. Tầng 0 (Tiền xử lý): </a:t>
-            </a:r>
-            <a:r>
-              <a:rPr b="0" sz="1600">
-                <a:solidFill>
-                  <a:srgbClr val="334155"/>
-                </a:solidFill>
-                <a:latin typeface="Segoe UI"/>
-              </a:rPr>
-              <a:t>Bình thường hóa Unicode, khử dấu khoảng trắng và giải mã Base64 (&lt;0.05ms).</a:t>
-            </a:r>
-          </a:p>
-          <a:p>
-            <a:pPr>
-              <a:spcAft>
-                <a:spcPts val="600"/>
-              </a:spcAft>
-            </a:pPr>
-            <a:r>
-              <a:rPr b="1" sz="1600">
-                <a:solidFill>
-                  <a:srgbClr val="0F172A"/>
-                </a:solidFill>
-                <a:latin typeface="Segoe UI"/>
-              </a:rPr>
-              <a:t>2. Tầng 1 (Lọc nhanh): </a:t>
-            </a:r>
-            <a:r>
-              <a:rPr b="0" sz="1600">
-                <a:solidFill>
-                  <a:srgbClr val="334155"/>
-                </a:solidFill>
-                <a:latin typeface="Segoe UI"/>
-              </a:rPr>
-              <a:t>TF-IDF + LinearSVC phân loại siêu tốc; phân luồng theo xác suất P(Attack|X).</a:t>
-            </a:r>
-          </a:p>
-          <a:p>
-            <a:pPr>
-              <a:spcAft>
-                <a:spcPts val="600"/>
-              </a:spcAft>
-            </a:pPr>
-            <a:r>
-              <a:rPr b="1" sz="1600">
-                <a:solidFill>
-                  <a:srgbClr val="0F172A"/>
-                </a:solidFill>
-                <a:latin typeface="Segoe UI"/>
-              </a:rPr>
-              <a:t>3. Tầng 2 (Thẩm định sâu): </a:t>
-            </a:r>
-            <a:r>
-              <a:rPr b="0" sz="1600">
-                <a:solidFill>
-                  <a:srgbClr val="334155"/>
-                </a:solidFill>
-                <a:latin typeface="Segoe UI"/>
-              </a:rPr>
-              <a:t>DeBERTa-v3 ONNX INT8 thẩm định chính xác các đòn đóng vai Jailbreak phức tạp (~18.5ms).</a:t>
-            </a:r>
-          </a:p>
-          <a:p>
-            <a:pPr>
-              <a:spcAft>
-                <a:spcPts val="600"/>
-              </a:spcAft>
-            </a:pPr>
-            <a:r>
-              <a:rPr b="1" sz="1600">
-                <a:solidFill>
-                  <a:srgbClr val="0284C7"/>
-                </a:solidFill>
-                <a:latin typeface="Segoe UI"/>
-              </a:rPr>
-              <a:t>-&gt; Đạt 5 Yêu Cầu Kỹ Thuật: </a:t>
-            </a:r>
-            <a:r>
-              <a:rPr b="0" sz="1600">
-                <a:solidFill>
-                  <a:srgbClr val="334155"/>
-                </a:solidFill>
-                <a:latin typeface="Segoe UI"/>
-              </a:rPr>
-              <a:t>Bảo đảm đồng thời: Trễ thấp (P95&lt;22ms), FPR &lt; 1.5%, F1=0.9416, Kháng đối kháng &amp; Chạy Zero-GPU!</a:t>
-            </a:r>
-          </a:p>
-        </p:txBody>
-      </p:sp>
-    </p:spTree>
-  </p:cSld>
-  <p:clrMapOvr>
-    <a:masterClrMapping/>
-  </p:clrMapOvr>
-</p:sld>
-</file>
-
-<file path=ppt/slides/slide23.xml><?xml version="1.0" encoding="utf-8"?>
-<p:sld xmlns:a="http://schemas.openxmlformats.org/drawingml/2006/main" xmlns:p="http://schemas.openxmlformats.org/presentationml/2006/main" xmlns:r="http://schemas.openxmlformats.org/officeDocument/2006/relationships">
-  <p:cSld>
-    <p:spTree>
-      <p:nvGrpSpPr>
-        <p:cNvPr id="1" name=""/>
-        <p:cNvGrpSpPr/>
-        <p:nvPr/>
-      </p:nvGrpSpPr>
-      <p:grpSpPr/>
-      <p:sp>
-        <p:nvSpPr>
-          <p:cNvPr id="2" name="Rectangle 1"/>
-          <p:cNvSpPr/>
-          <p:nvPr/>
-        </p:nvSpPr>
-        <p:spPr>
-          <a:xfrm>
-            <a:off x="0" y="0"/>
-            <a:ext cx="12191695" cy="6858000"/>
-          </a:xfrm>
-          <a:prstGeom prst="rect">
-            <a:avLst/>
-          </a:prstGeom>
-          <a:solidFill>
-            <a:srgbClr val="FFFFFF"/>
-          </a:solidFill>
-          <a:ln>
-            <a:noFill/>
-          </a:ln>
-        </p:spPr>
-        <p:style>
-          <a:lnRef idx="1">
-            <a:schemeClr val="accent1"/>
-          </a:lnRef>
-          <a:fillRef idx="3">
-            <a:schemeClr val="accent1"/>
-          </a:fillRef>
-          <a:effectRef idx="2">
-            <a:schemeClr val="accent1"/>
-          </a:effectRef>
-          <a:fontRef idx="minor">
-            <a:schemeClr val="lt1"/>
-          </a:fontRef>
-        </p:style>
-        <p:txBody>
-          <a:bodyPr rtlCol="0" anchor="ctr"/>
-          <a:lstStyle/>
-          <a:p>
-            <a:pPr algn="ctr"/>
-          </a:p>
-        </p:txBody>
-      </p:sp>
-      <p:sp>
-        <p:nvSpPr>
-          <p:cNvPr id="3" name="Rectangle 2"/>
-          <p:cNvSpPr/>
-          <p:nvPr/>
-        </p:nvSpPr>
-        <p:spPr>
-          <a:xfrm>
-            <a:off x="731520" y="329184"/>
-            <a:ext cx="73152" cy="676656"/>
-          </a:xfrm>
-          <a:prstGeom prst="rect">
-            <a:avLst/>
-          </a:prstGeom>
-          <a:solidFill>
-            <a:srgbClr val="0284C7"/>
-          </a:solidFill>
-          <a:ln>
-            <a:noFill/>
-          </a:ln>
-        </p:spPr>
-        <p:style>
-          <a:lnRef idx="1">
-            <a:schemeClr val="accent1"/>
-          </a:lnRef>
-          <a:fillRef idx="3">
-            <a:schemeClr val="accent1"/>
-          </a:fillRef>
-          <a:effectRef idx="2">
-            <a:schemeClr val="accent1"/>
-          </a:effectRef>
-          <a:fontRef idx="minor">
-            <a:schemeClr val="lt1"/>
-          </a:fontRef>
-        </p:style>
-        <p:txBody>
-          <a:bodyPr rtlCol="0" anchor="ctr"/>
-          <a:lstStyle/>
-          <a:p>
-            <a:pPr algn="ctr"/>
-          </a:p>
-        </p:txBody>
-      </p:sp>
-      <p:sp>
-        <p:nvSpPr>
-          <p:cNvPr id="4" name="TextBox 3"/>
-          <p:cNvSpPr txBox="1"/>
-          <p:nvPr/>
-        </p:nvSpPr>
-        <p:spPr>
-          <a:xfrm>
-            <a:off x="896112" y="256032"/>
-            <a:ext cx="10561320" cy="804672"/>
-          </a:xfrm>
-          <a:prstGeom prst="rect">
-            <a:avLst/>
-          </a:prstGeom>
-          <a:noFill/>
-        </p:spPr>
-        <p:txBody>
-          <a:bodyPr wrap="square" lIns="0" tIns="0" rIns="0" bIns="0">
-            <a:spAutoFit/>
-          </a:bodyPr>
-          <a:lstStyle/>
-          <a:p>
-            <a:pPr>
-              <a:spcAft>
-                <a:spcPts val="200"/>
-              </a:spcAft>
-              <a:defRPr sz="2100" b="1">
-                <a:solidFill>
-                  <a:srgbClr val="0F172A"/>
-                </a:solidFill>
-                <a:latin typeface="Segoe UI"/>
-              </a:defRPr>
-            </a:pPr>
-            <a:r>
-              <a:t>NHIỆM VỤ 4: SƠ ĐỒ KIẾN TRÚC TOÀN TRÌNH TWO-TIER CASCADED</a:t>
-            </a:r>
-          </a:p>
-          <a:p>
-            <a:pPr>
-              <a:defRPr sz="1500">
-                <a:solidFill>
-                  <a:srgbClr val="64748B"/>
-                </a:solidFill>
-                <a:latin typeface="Segoe UI"/>
-              </a:defRPr>
-            </a:pPr>
-            <a:r>
-              <a:t>Luồng dữ liệu xử lý trực tiếp từ cửa ngõ Ingress đến Downstream LLM</a:t>
-            </a:r>
-          </a:p>
-        </p:txBody>
-      </p:sp>
-      <p:sp>
-        <p:nvSpPr>
-          <p:cNvPr id="5" name="Rectangle 4"/>
-          <p:cNvSpPr/>
-          <p:nvPr/>
-        </p:nvSpPr>
-        <p:spPr>
-          <a:xfrm>
-            <a:off x="731520" y="6263640"/>
-            <a:ext cx="10728655" cy="18288"/>
-          </a:xfrm>
-          <a:prstGeom prst="rect">
-            <a:avLst/>
-          </a:prstGeom>
-          <a:solidFill>
-            <a:srgbClr val="E2E8F0"/>
-          </a:solidFill>
-          <a:ln>
-            <a:noFill/>
-          </a:ln>
-        </p:spPr>
-        <p:style>
-          <a:lnRef idx="1">
-            <a:schemeClr val="accent1"/>
-          </a:lnRef>
-          <a:fillRef idx="3">
-            <a:schemeClr val="accent1"/>
-          </a:fillRef>
-          <a:effectRef idx="2">
-            <a:schemeClr val="accent1"/>
-          </a:effectRef>
-          <a:fontRef idx="minor">
-            <a:schemeClr val="lt1"/>
-          </a:fontRef>
-        </p:style>
-        <p:txBody>
-          <a:bodyPr rtlCol="0" anchor="ctr"/>
-          <a:lstStyle/>
-          <a:p>
-            <a:pPr algn="ctr"/>
-          </a:p>
-        </p:txBody>
-      </p:sp>
-      <p:sp>
-        <p:nvSpPr>
-          <p:cNvPr id="6" name="TextBox 5"/>
-          <p:cNvSpPr txBox="1"/>
-          <p:nvPr/>
-        </p:nvSpPr>
-        <p:spPr>
-          <a:xfrm>
-            <a:off x="9601200" y="6327648"/>
-            <a:ext cx="1828800" cy="365760"/>
-          </a:xfrm>
-          <a:prstGeom prst="rect">
-            <a:avLst/>
-          </a:prstGeom>
-          <a:noFill/>
-        </p:spPr>
-        <p:txBody>
-          <a:bodyPr wrap="none" lIns="0" tIns="0" rIns="0" bIns="0">
-            <a:spAutoFit/>
-          </a:bodyPr>
-          <a:lstStyle/>
-          <a:p>
-            <a:pPr algn="r">
-              <a:defRPr sz="1300" b="1">
-                <a:solidFill>
-                  <a:srgbClr val="64748B"/>
-                </a:solidFill>
-                <a:latin typeface="Segoe UI"/>
-              </a:defRPr>
-            </a:pPr>
-            <a:r>
-              <a:t>Slide 23 / 30</a:t>
-            </a:r>
-          </a:p>
-        </p:txBody>
-      </p:sp>
-      <p:sp>
-        <p:nvSpPr>
-          <p:cNvPr id="7" name="Rectangle 6"/>
-          <p:cNvSpPr/>
-          <p:nvPr/>
-        </p:nvSpPr>
-        <p:spPr>
-          <a:xfrm>
-            <a:off x="731520" y="1234440"/>
-            <a:ext cx="4343400" cy="4846320"/>
-          </a:xfrm>
-          <a:prstGeom prst="rect">
-            <a:avLst/>
-          </a:prstGeom>
-          <a:solidFill>
-            <a:srgbClr val="FFFFFF"/>
-          </a:solidFill>
-          <a:ln w="19050">
-            <a:solidFill>
-              <a:srgbClr val="0284C7"/>
-            </a:solidFill>
-          </a:ln>
-        </p:spPr>
-        <p:style>
-          <a:lnRef idx="1">
-            <a:schemeClr val="accent1"/>
-          </a:lnRef>
-          <a:fillRef idx="3">
-            <a:schemeClr val="accent1"/>
-          </a:fillRef>
-          <a:effectRef idx="2">
-            <a:schemeClr val="accent1"/>
-          </a:effectRef>
-          <a:fontRef idx="minor">
-            <a:schemeClr val="lt1"/>
-          </a:fontRef>
-        </p:style>
-        <p:txBody>
-          <a:bodyPr rtlCol="0" anchor="ctr" wrap="square" lIns="228600" tIns="228600" rIns="228600"/>
-          <a:lstStyle/>
-          <a:p>
-            <a:pPr algn="ctr">
-              <a:spcAft>
-                <a:spcPts val="800"/>
-              </a:spcAft>
-            </a:pPr>
-            <a:r>
-              <a:rPr sz="1700" b="1">
-                <a:solidFill>
-                  <a:srgbClr val="0284C7"/>
-                </a:solidFill>
-              </a:rPr>
-              <a:t>LUỒNG ĐỊNH TUYẾN 3 TRẠNG THÁI</a:t>
-            </a:r>
-          </a:p>
-          <a:p>
-            <a:pPr>
-              <a:spcAft>
-                <a:spcPts val="600"/>
-              </a:spcAft>
-            </a:pPr>
-            <a:r>
-              <a:rPr b="1" sz="1600">
-                <a:solidFill>
-                  <a:srgbClr val="059669"/>
-                </a:solidFill>
-                <a:latin typeface="Segoe UI"/>
-              </a:rPr>
-              <a:t>1. Nhánh Fast-Pass (71.3%): </a:t>
-            </a:r>
-            <a:r>
-              <a:rPr b="0" sz="1600">
-                <a:solidFill>
-                  <a:srgbClr val="334155"/>
-                </a:solidFill>
-                <a:latin typeface="Segoe UI"/>
-              </a:rPr>
-              <a:t>P &lt;= 0.15: Truy vấn hoàn toàn an toàn -&gt; Chuyển tiếp tức thì đến LLM đích trong &lt; 1.0ms.</a:t>
-            </a:r>
-          </a:p>
-          <a:p>
-            <a:pPr>
-              <a:spcAft>
-                <a:spcPts val="600"/>
-              </a:spcAft>
-            </a:pPr>
-            <a:r>
-              <a:rPr b="1" sz="1600">
-                <a:solidFill>
-                  <a:srgbClr val="DC2626"/>
-                </a:solidFill>
-                <a:latin typeface="Segoe UI"/>
-              </a:rPr>
-              <a:t>2. Nhánh Early-Block (11.3%): </a:t>
-            </a:r>
-            <a:r>
-              <a:rPr b="0" sz="1600">
-                <a:solidFill>
-                  <a:srgbClr val="334155"/>
-                </a:solidFill>
-                <a:latin typeface="Segoe UI"/>
-              </a:rPr>
-              <a:t>P &gt;= 0.85: Phát hiện đòn tấn công thô hiển nhiên -&gt; Chặn đứng ngay, trả về HTTP 403 Forbidden.</a:t>
-            </a:r>
-          </a:p>
-          <a:p>
-            <a:pPr>
-              <a:spcAft>
-                <a:spcPts val="600"/>
-              </a:spcAft>
-            </a:pPr>
-            <a:r>
-              <a:rPr b="1" sz="1600">
-                <a:solidFill>
-                  <a:srgbClr val="D97706"/>
-                </a:solidFill>
-                <a:latin typeface="Segoe UI"/>
-              </a:rPr>
-              <a:t>3. Nhánh Thẩm định (17.4%): </a:t>
-            </a:r>
-            <a:r>
-              <a:rPr b="0" sz="1600">
-                <a:solidFill>
-                  <a:srgbClr val="334155"/>
-                </a:solidFill>
-                <a:latin typeface="Segoe UI"/>
-              </a:rPr>
-              <a:t>0.15 &lt; P &lt; 0.85: Vùng bất định khó phân xử -&gt; Kích hoạt DeBERTa-v3 Tầng 2 để thẩm định (~18.5ms).</a:t>
-            </a:r>
-          </a:p>
-          <a:p>
-            <a:pPr>
-              <a:spcAft>
-                <a:spcPts val="600"/>
-              </a:spcAft>
-            </a:pPr>
-            <a:r>
-              <a:rPr b="1" sz="1600">
-                <a:solidFill>
-                  <a:srgbClr val="0F172A"/>
-                </a:solidFill>
-                <a:latin typeface="Segoe UI"/>
-              </a:rPr>
-              <a:t>-&gt; Tối ưu hóa hiệu năng: </a:t>
-            </a:r>
-            <a:r>
-              <a:rPr b="0" sz="1600">
-                <a:solidFill>
-                  <a:srgbClr val="334155"/>
-                </a:solidFill>
-                <a:latin typeface="Segoe UI"/>
-              </a:rPr>
-              <a:t>82.6% lưu lượng không bao giờ phải chạy qua Transformer, tiết kiệm tối đa tài nguyên!</a:t>
-            </a:r>
-          </a:p>
-        </p:txBody>
-      </p:sp>
-      <p:sp>
-        <p:nvSpPr>
-          <p:cNvPr id="8" name="Rectangle 7"/>
-          <p:cNvSpPr/>
-          <p:nvPr/>
-        </p:nvSpPr>
-        <p:spPr>
-          <a:xfrm>
-            <a:off x="5257800" y="1234440"/>
-            <a:ext cx="6199632" cy="4846320"/>
-          </a:xfrm>
-          <a:prstGeom prst="rect">
-            <a:avLst/>
-          </a:prstGeom>
-          <a:solidFill>
-            <a:srgbClr val="FFFFFF"/>
-          </a:solidFill>
-          <a:ln w="19050">
-            <a:solidFill>
-              <a:srgbClr val="0284C7"/>
-            </a:solidFill>
-          </a:ln>
-        </p:spPr>
-        <p:style>
-          <a:lnRef idx="1">
-            <a:schemeClr val="accent1"/>
-          </a:lnRef>
-          <a:fillRef idx="3">
-            <a:schemeClr val="accent1"/>
-          </a:fillRef>
-          <a:effectRef idx="2">
-            <a:schemeClr val="accent1"/>
-          </a:effectRef>
-          <a:fontRef idx="minor">
-            <a:schemeClr val="lt1"/>
-          </a:fontRef>
-        </p:style>
-        <p:txBody>
-          <a:bodyPr rtlCol="0" anchor="ctr"/>
-          <a:lstStyle/>
-          <a:p>
-            <a:pPr algn="ctr"/>
-          </a:p>
-        </p:txBody>
-      </p:sp>
-      <p:pic>
-        <p:nvPicPr>
-          <p:cNvPr id="9" name="Picture 8" descr="diagram_two_tier_architecture.png"/>
-          <p:cNvPicPr>
-            <a:picLocks noChangeAspect="1"/>
-          </p:cNvPicPr>
-          <p:nvPr/>
-        </p:nvPicPr>
-        <p:blipFill>
-          <a:blip r:embed="rId2"/>
-          <a:stretch>
-            <a:fillRect/>
-          </a:stretch>
-        </p:blipFill>
-        <p:spPr>
-          <a:xfrm>
-            <a:off x="5303520" y="1280160"/>
-            <a:ext cx="6108192" cy="4407408"/>
-          </a:xfrm>
-          <a:prstGeom prst="rect">
-            <a:avLst/>
-          </a:prstGeom>
-        </p:spPr>
-      </p:pic>
-      <p:sp>
-        <p:nvSpPr>
-          <p:cNvPr id="10" name="TextBox 9"/>
-          <p:cNvSpPr txBox="1"/>
-          <p:nvPr/>
-        </p:nvSpPr>
-        <p:spPr>
-          <a:xfrm>
-            <a:off x="5349240" y="5696712"/>
-            <a:ext cx="6016752" cy="347472"/>
-          </a:xfrm>
-          <a:prstGeom prst="rect">
-            <a:avLst/>
-          </a:prstGeom>
-          <a:noFill/>
-        </p:spPr>
-        <p:txBody>
-          <a:bodyPr wrap="square" lIns="0" tIns="0" rIns="0" bIns="0">
-            <a:spAutoFit/>
-          </a:bodyPr>
-          <a:lstStyle/>
-          <a:p>
-            <a:r>
-              <a:rPr sz="1600" b="1">
-                <a:solidFill>
-                  <a:srgbClr val="0F172A"/>
-                </a:solidFill>
-                <a:latin typeface="Segoe UI"/>
-              </a:rPr>
-              <a:t>Sơ đồ kiến trúc phân tầng Two-Tier Cascaded Guardrail của PI-Guard </a:t>
-            </a:r>
-            <a:r>
-              <a:rPr sz="1500" i="1">
-                <a:solidFill>
-                  <a:srgbClr val="0284C7"/>
-                </a:solidFill>
-                <a:latin typeface="Segoe UI"/>
-              </a:rPr>
-              <a:t>(Đề xuất độc quyền của đồ án PI-Guard)</a:t>
-            </a:r>
-          </a:p>
-        </p:txBody>
-      </p:sp>
-    </p:spTree>
-  </p:cSld>
-  <p:clrMapOvr>
-    <a:masterClrMapping/>
-  </p:clrMapOvr>
-</p:sld>
-</file>
-
-<file path=ppt/slides/slide24.xml><?xml version="1.0" encoding="utf-8"?>
-<p:sld xmlns:a="http://schemas.openxmlformats.org/drawingml/2006/main" xmlns:p="http://schemas.openxmlformats.org/presentationml/2006/main" xmlns:r="http://schemas.openxmlformats.org/officeDocument/2006/relationships">
-  <p:cSld>
-    <p:spTree>
-      <p:nvGrpSpPr>
-        <p:cNvPr id="1" name=""/>
-        <p:cNvGrpSpPr/>
-        <p:nvPr/>
-      </p:nvGrpSpPr>
-      <p:grpSpPr/>
-      <p:sp>
-        <p:nvSpPr>
-          <p:cNvPr id="2" name="Rectangle 1"/>
-          <p:cNvSpPr/>
-          <p:nvPr/>
-        </p:nvSpPr>
-        <p:spPr>
-          <a:xfrm>
-            <a:off x="0" y="0"/>
-            <a:ext cx="12191695" cy="6858000"/>
-          </a:xfrm>
-          <a:prstGeom prst="rect">
-            <a:avLst/>
-          </a:prstGeom>
-          <a:solidFill>
-            <a:srgbClr val="FFFFFF"/>
-          </a:solidFill>
-          <a:ln>
-            <a:noFill/>
-          </a:ln>
-        </p:spPr>
-        <p:style>
-          <a:lnRef idx="1">
-            <a:schemeClr val="accent1"/>
-          </a:lnRef>
-          <a:fillRef idx="3">
-            <a:schemeClr val="accent1"/>
-          </a:fillRef>
-          <a:effectRef idx="2">
-            <a:schemeClr val="accent1"/>
-          </a:effectRef>
-          <a:fontRef idx="minor">
-            <a:schemeClr val="lt1"/>
-          </a:fontRef>
-        </p:style>
-        <p:txBody>
-          <a:bodyPr rtlCol="0" anchor="ctr"/>
-          <a:lstStyle/>
-          <a:p>
-            <a:pPr algn="ctr"/>
-          </a:p>
-        </p:txBody>
-      </p:sp>
-      <p:sp>
-        <p:nvSpPr>
-          <p:cNvPr id="3" name="Rectangle 2"/>
-          <p:cNvSpPr/>
-          <p:nvPr/>
-        </p:nvSpPr>
-        <p:spPr>
-          <a:xfrm>
-            <a:off x="731520" y="329184"/>
-            <a:ext cx="73152" cy="676656"/>
-          </a:xfrm>
-          <a:prstGeom prst="rect">
-            <a:avLst/>
-          </a:prstGeom>
-          <a:solidFill>
-            <a:srgbClr val="0284C7"/>
-          </a:solidFill>
-          <a:ln>
-            <a:noFill/>
-          </a:ln>
-        </p:spPr>
-        <p:style>
-          <a:lnRef idx="1">
-            <a:schemeClr val="accent1"/>
-          </a:lnRef>
-          <a:fillRef idx="3">
-            <a:schemeClr val="accent1"/>
-          </a:fillRef>
-          <a:effectRef idx="2">
-            <a:schemeClr val="accent1"/>
-          </a:effectRef>
-          <a:fontRef idx="minor">
-            <a:schemeClr val="lt1"/>
-          </a:fontRef>
-        </p:style>
-        <p:txBody>
-          <a:bodyPr rtlCol="0" anchor="ctr"/>
-          <a:lstStyle/>
-          <a:p>
-            <a:pPr algn="ctr"/>
-          </a:p>
-        </p:txBody>
-      </p:sp>
-      <p:sp>
-        <p:nvSpPr>
-          <p:cNvPr id="4" name="TextBox 3"/>
-          <p:cNvSpPr txBox="1"/>
-          <p:nvPr/>
-        </p:nvSpPr>
-        <p:spPr>
-          <a:xfrm>
-            <a:off x="896112" y="256032"/>
-            <a:ext cx="10561320" cy="804672"/>
-          </a:xfrm>
-          <a:prstGeom prst="rect">
-            <a:avLst/>
-          </a:prstGeom>
-          <a:noFill/>
-        </p:spPr>
-        <p:txBody>
-          <a:bodyPr wrap="square" lIns="0" tIns="0" rIns="0" bIns="0">
-            <a:spAutoFit/>
-          </a:bodyPr>
-          <a:lstStyle/>
-          <a:p>
-            <a:pPr>
-              <a:spcAft>
-                <a:spcPts val="200"/>
-              </a:spcAft>
-              <a:defRPr sz="2100" b="1">
-                <a:solidFill>
-                  <a:srgbClr val="0F172A"/>
-                </a:solidFill>
-                <a:latin typeface="Segoe UI"/>
-              </a:defRPr>
-            </a:pPr>
-            <a:r>
-              <a:t>NHIỆM VỤ 4: CƠ CHẾ PHÁT HIỆN TẤN CÔNG CỦA MÔ HÌNH TF-IDF BASELINE</a:t>
-            </a:r>
-          </a:p>
-          <a:p>
-            <a:pPr>
-              <a:defRPr sz="1500">
-                <a:solidFill>
-                  <a:srgbClr val="64748B"/>
-                </a:solidFill>
-                <a:latin typeface="Segoe UI"/>
-              </a:defRPr>
-            </a:pPr>
-            <a:r>
-              <a:t>Quy trình 4 bước: Trích xuất n-gram đa tầng, tính trọng số TF-IDF, chấm điểm siêu phẳng tuyến tính và ngưỡng quyết định nhị phân</a:t>
-            </a:r>
-          </a:p>
-        </p:txBody>
-      </p:sp>
-      <p:sp>
-        <p:nvSpPr>
-          <p:cNvPr id="5" name="Rectangle 4"/>
-          <p:cNvSpPr/>
-          <p:nvPr/>
-        </p:nvSpPr>
-        <p:spPr>
-          <a:xfrm>
-            <a:off x="731520" y="6263640"/>
-            <a:ext cx="10728655" cy="18288"/>
-          </a:xfrm>
-          <a:prstGeom prst="rect">
-            <a:avLst/>
-          </a:prstGeom>
-          <a:solidFill>
-            <a:srgbClr val="E2E8F0"/>
-          </a:solidFill>
-          <a:ln>
-            <a:noFill/>
-          </a:ln>
-        </p:spPr>
-        <p:style>
-          <a:lnRef idx="1">
-            <a:schemeClr val="accent1"/>
-          </a:lnRef>
-          <a:fillRef idx="3">
-            <a:schemeClr val="accent1"/>
-          </a:fillRef>
-          <a:effectRef idx="2">
-            <a:schemeClr val="accent1"/>
-          </a:effectRef>
-          <a:fontRef idx="minor">
-            <a:schemeClr val="lt1"/>
-          </a:fontRef>
-        </p:style>
-        <p:txBody>
-          <a:bodyPr rtlCol="0" anchor="ctr"/>
-          <a:lstStyle/>
-          <a:p>
-            <a:pPr algn="ctr"/>
-          </a:p>
-        </p:txBody>
-      </p:sp>
-      <p:sp>
-        <p:nvSpPr>
-          <p:cNvPr id="6" name="TextBox 5"/>
-          <p:cNvSpPr txBox="1"/>
-          <p:nvPr/>
-        </p:nvSpPr>
-        <p:spPr>
-          <a:xfrm>
-            <a:off x="9601200" y="6327648"/>
-            <a:ext cx="1828800" cy="365760"/>
-          </a:xfrm>
-          <a:prstGeom prst="rect">
-            <a:avLst/>
-          </a:prstGeom>
-          <a:noFill/>
-        </p:spPr>
-        <p:txBody>
-          <a:bodyPr wrap="none" lIns="0" tIns="0" rIns="0" bIns="0">
-            <a:spAutoFit/>
-          </a:bodyPr>
-          <a:lstStyle/>
-          <a:p>
-            <a:pPr algn="r">
-              <a:defRPr sz="1300" b="1">
-                <a:solidFill>
-                  <a:srgbClr val="64748B"/>
-                </a:solidFill>
-                <a:latin typeface="Segoe UI"/>
-              </a:defRPr>
-            </a:pPr>
-            <a:r>
-              <a:t>Slide 24 / 30</a:t>
-            </a:r>
-          </a:p>
-        </p:txBody>
-      </p:sp>
-      <p:sp>
-        <p:nvSpPr>
-          <p:cNvPr id="7" name="Rectangle 6"/>
-          <p:cNvSpPr/>
-          <p:nvPr/>
-        </p:nvSpPr>
-        <p:spPr>
-          <a:xfrm>
-            <a:off x="731520" y="1234440"/>
-            <a:ext cx="5257800" cy="4846320"/>
-          </a:xfrm>
-          <a:prstGeom prst="rect">
-            <a:avLst/>
-          </a:prstGeom>
-          <a:solidFill>
-            <a:srgbClr val="FFFFFF"/>
-          </a:solidFill>
-          <a:ln w="25400">
-            <a:solidFill>
-              <a:srgbClr val="0284C7"/>
-            </a:solidFill>
-          </a:ln>
-        </p:spPr>
-        <p:style>
-          <a:lnRef idx="1">
-            <a:schemeClr val="accent1"/>
-          </a:lnRef>
-          <a:fillRef idx="3">
-            <a:schemeClr val="accent1"/>
-          </a:fillRef>
-          <a:effectRef idx="2">
-            <a:schemeClr val="accent1"/>
-          </a:effectRef>
-          <a:fontRef idx="minor">
-            <a:schemeClr val="lt1"/>
-          </a:fontRef>
-        </p:style>
-        <p:txBody>
-          <a:bodyPr rtlCol="0" anchor="ctr" wrap="square" lIns="256032" tIns="256032" rIns="256032"/>
-          <a:lstStyle/>
-          <a:p>
-            <a:pPr algn="ctr">
-              <a:spcAft>
-                <a:spcPts val="800"/>
-              </a:spcAft>
-            </a:pPr>
-            <a:r>
-              <a:rPr sz="1700" b="1">
-                <a:solidFill>
-                  <a:srgbClr val="0284C7"/>
-                </a:solidFill>
-              </a:rPr>
-              <a:t>BƯỚC 1 &amp; 2: TRÍCH XUẤT ĐẶC TRƯNG N-GRAM VÀ TRỌNG SỐ HÓA THỐNG KÊ</a:t>
-            </a:r>
-          </a:p>
-          <a:p>
-            <a:pPr>
-              <a:spcAft>
-                <a:spcPts val="600"/>
-              </a:spcAft>
-            </a:pPr>
-            <a:r>
-              <a:rPr b="1" sz="1600">
-                <a:solidFill>
-                  <a:srgbClr val="0F172A"/>
-                </a:solidFill>
-                <a:latin typeface="Segoe UI"/>
-              </a:rPr>
-              <a:t>1. Đặc trưng đa tầng (Word + Char_wb): </a:t>
-            </a:r>
-            <a:r>
-              <a:rPr b="0" sz="1600">
-                <a:solidFill>
-                  <a:srgbClr val="334155"/>
-                </a:solidFill>
-                <a:latin typeface="Segoe UI"/>
-              </a:rPr>
-              <a:t>Kết hợp Word n-grams (1-2 từ) bắt cụm từ lệnh độc hại ('ignore previous', 'system prompt', 'DAN mode') và Sub-word Char n-grams (3-5 ký tự) vô hiệu hóa Leetspeak làm nhiễu ('1gn0r3', 'j@ilbr34k').</a:t>
-            </a:r>
-          </a:p>
-          <a:p>
-            <a:pPr>
-              <a:spcAft>
-                <a:spcPts val="600"/>
-              </a:spcAft>
-            </a:pPr>
-            <a:r>
-              <a:rPr b="1" sz="1600">
-                <a:solidFill>
-                  <a:srgbClr val="0F172A"/>
-                </a:solidFill>
-                <a:latin typeface="Segoe UI"/>
-              </a:rPr>
-              <a:t>2. Công thức trọng số TF-IDF: </a:t>
-            </a:r>
-            <a:r>
-              <a:rPr b="0" sz="1600">
-                <a:solidFill>
-                  <a:srgbClr val="334155"/>
-                </a:solidFill>
-                <a:latin typeface="Segoe UI"/>
-              </a:rPr>
-              <a:t>TF-IDF(t, d) = [1 + ln(TF(t,d))] x [ln((1+N)/(1+DF(t))) + 1]. Từ đàm thoại phổ biến (is, the, please) có DF cao bị giảm trọng số về 0; n-gram đặc thù của payload tấn công có DF thấp được khuếch đại.</a:t>
-            </a:r>
-          </a:p>
-          <a:p>
-            <a:pPr>
-              <a:spcAft>
-                <a:spcPts val="600"/>
-              </a:spcAft>
-            </a:pPr>
-            <a:r>
-              <a:rPr b="1" sz="1600">
-                <a:solidFill>
-                  <a:srgbClr val="0F172A"/>
-                </a:solidFill>
-                <a:latin typeface="Segoe UI"/>
-              </a:rPr>
-              <a:t>3. Vector hóa thưa thớt chuẩn hóa L2: </a:t>
-            </a:r>
-            <a:r>
-              <a:rPr b="0" sz="1600">
-                <a:solidFill>
-                  <a:srgbClr val="334155"/>
-                </a:solidFill>
-                <a:latin typeface="Segoe UI"/>
-              </a:rPr>
-              <a:t>Biến đổi chuỗi văn bản thô thành vector đặc trưng số thực x in R^50.000 với ||x||_2 = 1, loại bỏ hoàn toàn sự sai lệch do độ dài câu hỏi ngắn dài khác nhau.</a:t>
-            </a:r>
-          </a:p>
-          <a:p>
-            <a:pPr>
-              <a:spcAft>
-                <a:spcPts val="600"/>
-              </a:spcAft>
-            </a:pPr>
-            <a:r>
-              <a:rPr b="1" sz="1600">
-                <a:solidFill>
-                  <a:srgbClr val="059669"/>
-                </a:solidFill>
-                <a:latin typeface="Segoe UI"/>
-              </a:rPr>
-              <a:t>-&gt; Ưu thế tốc độ Tầng 1: </a:t>
-            </a:r>
-            <a:r>
-              <a:rPr b="0" sz="1600">
-                <a:solidFill>
-                  <a:srgbClr val="334155"/>
-                </a:solidFill>
-                <a:latin typeface="Segoe UI"/>
-              </a:rPr>
-              <a:t>Toàn bộ khâu trích xuất đặc trưng và vector hóa hoàn tất chỉ trong 0.28ms trên CPU thông thường!</a:t>
-            </a:r>
-          </a:p>
-        </p:txBody>
-      </p:sp>
-      <p:sp>
-        <p:nvSpPr>
-          <p:cNvPr id="8" name="Rectangle 7"/>
-          <p:cNvSpPr/>
-          <p:nvPr/>
-        </p:nvSpPr>
-        <p:spPr>
-          <a:xfrm>
-            <a:off x="6199632" y="1234440"/>
-            <a:ext cx="5257800" cy="4846320"/>
-          </a:xfrm>
-          <a:prstGeom prst="rect">
-            <a:avLst/>
-          </a:prstGeom>
-          <a:solidFill>
-            <a:srgbClr val="FFFFFF"/>
-          </a:solidFill>
-          <a:ln w="25400">
-            <a:solidFill>
-              <a:srgbClr val="059669"/>
-            </a:solidFill>
-          </a:ln>
-        </p:spPr>
-        <p:style>
-          <a:lnRef idx="1">
-            <a:schemeClr val="accent1"/>
-          </a:lnRef>
-          <a:fillRef idx="3">
-            <a:schemeClr val="accent1"/>
-          </a:fillRef>
-          <a:effectRef idx="2">
-            <a:schemeClr val="accent1"/>
-          </a:effectRef>
-          <a:fontRef idx="minor">
-            <a:schemeClr val="lt1"/>
-          </a:fontRef>
-        </p:style>
-        <p:txBody>
-          <a:bodyPr rtlCol="0" anchor="ctr" wrap="square" lIns="256032" tIns="256032" rIns="256032"/>
-          <a:lstStyle/>
-          <a:p>
-            <a:pPr algn="ctr">
-              <a:spcAft>
-                <a:spcPts val="800"/>
-              </a:spcAft>
-            </a:pPr>
-            <a:r>
-              <a:rPr sz="1700" b="1">
-                <a:solidFill>
-                  <a:srgbClr val="059669"/>
-                </a:solidFill>
-              </a:rPr>
-              <a:t>BƯỚC 3 &amp; 4: CHẤM ĐIỂM SIÊU PHẲNG TUYẾN TÍNH VÀ PHÂN LOẠI NHỊ PHÂN</a:t>
-            </a:r>
-          </a:p>
-          <a:p>
-            <a:pPr>
-              <a:spcAft>
-                <a:spcPts val="600"/>
-              </a:spcAft>
-            </a:pPr>
-            <a:r>
-              <a:rPr b="1" sz="1600">
-                <a:solidFill>
-                  <a:srgbClr val="0F172A"/>
-                </a:solidFill>
-                <a:latin typeface="Segoe UI"/>
-              </a:rPr>
-              <a:t>1. Chấm điểm Log-odds tuyến tính: </a:t>
-            </a:r>
-            <a:r>
-              <a:rPr b="0" sz="1600">
-                <a:solidFill>
-                  <a:srgbClr val="334155"/>
-                </a:solidFill>
-                <a:latin typeface="Segoe UI"/>
-              </a:rPr>
-              <a:t>z = w^T x + b = sum(w_i * x_i) + b. Trọng số w được học qua Logistic Regression: w_i &gt; 0 biểu thị n-gram dấu hiệu tấn công; w_i &lt; 0 biểu thị từ ngữ đàm thoại/học thuật lành tính.</a:t>
-            </a:r>
-          </a:p>
-          <a:p>
-            <a:pPr>
-              <a:spcAft>
-                <a:spcPts val="600"/>
-              </a:spcAft>
-            </a:pPr>
-            <a:r>
-              <a:rPr b="1" sz="1600">
-                <a:solidFill>
-                  <a:srgbClr val="0F172A"/>
-                </a:solidFill>
-                <a:latin typeface="Segoe UI"/>
-              </a:rPr>
-              <a:t>2. Hàm kích hoạt Sigmoid tính xác suất: </a:t>
-            </a:r>
-            <a:r>
-              <a:rPr b="0" sz="1600">
-                <a:solidFill>
-                  <a:srgbClr val="334155"/>
-                </a:solidFill>
-                <a:latin typeface="Segoe UI"/>
-              </a:rPr>
-              <a:t>P(Attack|x) = sigma(z) = 1 / (1 + e^{-z}) in [0, 1]. Ánh xạ khoảng cách biên phân chia siêu phẳng z thành xác suất: P -&gt; 1 khi chứa nhiều n-gram độc hại; P -&gt; 0 khi câu hỏi thuần lành tính.</a:t>
-            </a:r>
-          </a:p>
-          <a:p>
-            <a:pPr>
-              <a:spcAft>
-                <a:spcPts val="600"/>
-              </a:spcAft>
-            </a:pPr>
-            <a:r>
-              <a:rPr b="1" sz="1600">
-                <a:solidFill>
-                  <a:srgbClr val="0F172A"/>
-                </a:solidFill>
-                <a:latin typeface="Segoe UI"/>
-              </a:rPr>
-              <a:t>3. Ngưỡng phân loại nhị phân (theta = 0.5): </a:t>
-            </a:r>
-            <a:r>
-              <a:rPr b="0" sz="1600">
-                <a:solidFill>
-                  <a:srgbClr val="334155"/>
-                </a:solidFill>
-                <a:latin typeface="Segoe UI"/>
-              </a:rPr>
-              <a:t>Dự đoán Tấn công nếu P &gt;= 0.5, ngược lại là Lành tính. (Thuật toán TF-IDF thuần túy KHÔNG có 3 phần; cơ chế định tuyến 3 trạng thái là tầng kiến trúc Two-Tier bọc ngoài!).</a:t>
-            </a:r>
-          </a:p>
-          <a:p>
-            <a:pPr>
-              <a:spcAft>
-                <a:spcPts val="600"/>
-              </a:spcAft>
-            </a:pPr>
-            <a:r>
-              <a:rPr b="1" sz="1600">
-                <a:solidFill>
-                  <a:srgbClr val="059669"/>
-                </a:solidFill>
-                <a:latin typeface="Segoe UI"/>
-              </a:rPr>
-              <a:t>-&gt; Tốc độ suy luận phân loại: </a:t>
-            </a:r>
-            <a:r>
-              <a:rPr b="0" sz="1600">
-                <a:solidFill>
-                  <a:srgbClr val="334155"/>
-                </a:solidFill>
-                <a:latin typeface="Segoe UI"/>
-              </a:rPr>
-              <a:t>Chấm điểm tuyến tính và tính xác suất chỉ mất 0.19ms; tổng thời gian phân loại nhị phân Tầng 1 là 0.47ms!</a:t>
-            </a:r>
-          </a:p>
-        </p:txBody>
-      </p:sp>
-    </p:spTree>
-  </p:cSld>
-  <p:clrMapOvr>
-    <a:masterClrMapping/>
-  </p:clrMapOvr>
-</p:sld>
-</file>
-
-<file path=ppt/slides/slide25.xml><?xml version="1.0" encoding="utf-8"?>
-<p:sld xmlns:a="http://schemas.openxmlformats.org/drawingml/2006/main" xmlns:p="http://schemas.openxmlformats.org/presentationml/2006/main" xmlns:r="http://schemas.openxmlformats.org/officeDocument/2006/relationships">
-  <p:cSld>
-    <p:spTree>
-      <p:nvGrpSpPr>
-        <p:cNvPr id="1" name=""/>
-        <p:cNvGrpSpPr/>
-        <p:nvPr/>
-      </p:nvGrpSpPr>
-      <p:grpSpPr/>
-      <p:sp>
-        <p:nvSpPr>
-          <p:cNvPr id="2" name="Rectangle 1"/>
-          <p:cNvSpPr/>
-          <p:nvPr/>
-        </p:nvSpPr>
-        <p:spPr>
-          <a:xfrm>
-            <a:off x="0" y="0"/>
-            <a:ext cx="12191695" cy="6858000"/>
-          </a:xfrm>
-          <a:prstGeom prst="rect">
-            <a:avLst/>
-          </a:prstGeom>
-          <a:solidFill>
-            <a:srgbClr val="FFFFFF"/>
-          </a:solidFill>
-          <a:ln>
-            <a:noFill/>
-          </a:ln>
-        </p:spPr>
-        <p:style>
-          <a:lnRef idx="1">
-            <a:schemeClr val="accent1"/>
-          </a:lnRef>
-          <a:fillRef idx="3">
-            <a:schemeClr val="accent1"/>
-          </a:fillRef>
-          <a:effectRef idx="2">
-            <a:schemeClr val="accent1"/>
-          </a:effectRef>
-          <a:fontRef idx="minor">
-            <a:schemeClr val="lt1"/>
-          </a:fontRef>
-        </p:style>
-        <p:txBody>
-          <a:bodyPr rtlCol="0" anchor="ctr"/>
-          <a:lstStyle/>
-          <a:p>
-            <a:pPr algn="ctr"/>
-          </a:p>
-        </p:txBody>
-      </p:sp>
-      <p:sp>
-        <p:nvSpPr>
-          <p:cNvPr id="3" name="Rectangle 2"/>
-          <p:cNvSpPr/>
-          <p:nvPr/>
-        </p:nvSpPr>
-        <p:spPr>
-          <a:xfrm>
-            <a:off x="731520" y="329184"/>
-            <a:ext cx="73152" cy="676656"/>
-          </a:xfrm>
-          <a:prstGeom prst="rect">
-            <a:avLst/>
-          </a:prstGeom>
-          <a:solidFill>
-            <a:srgbClr val="0284C7"/>
-          </a:solidFill>
-          <a:ln>
-            <a:noFill/>
-          </a:ln>
-        </p:spPr>
-        <p:style>
-          <a:lnRef idx="1">
-            <a:schemeClr val="accent1"/>
-          </a:lnRef>
-          <a:fillRef idx="3">
-            <a:schemeClr val="accent1"/>
-          </a:fillRef>
-          <a:effectRef idx="2">
-            <a:schemeClr val="accent1"/>
-          </a:effectRef>
-          <a:fontRef idx="minor">
-            <a:schemeClr val="lt1"/>
-          </a:fontRef>
-        </p:style>
-        <p:txBody>
-          <a:bodyPr rtlCol="0" anchor="ctr"/>
-          <a:lstStyle/>
-          <a:p>
-            <a:pPr algn="ctr"/>
-          </a:p>
-        </p:txBody>
-      </p:sp>
-      <p:sp>
-        <p:nvSpPr>
-          <p:cNvPr id="4" name="TextBox 3"/>
-          <p:cNvSpPr txBox="1"/>
-          <p:nvPr/>
-        </p:nvSpPr>
-        <p:spPr>
-          <a:xfrm>
-            <a:off x="896112" y="256032"/>
-            <a:ext cx="10561320" cy="804672"/>
-          </a:xfrm>
-          <a:prstGeom prst="rect">
-            <a:avLst/>
-          </a:prstGeom>
-          <a:noFill/>
-        </p:spPr>
-        <p:txBody>
-          <a:bodyPr wrap="square" lIns="0" tIns="0" rIns="0" bIns="0">
-            <a:spAutoFit/>
-          </a:bodyPr>
-          <a:lstStyle/>
-          <a:p>
-            <a:pPr>
-              <a:spcAft>
-                <a:spcPts val="200"/>
-              </a:spcAft>
-              <a:defRPr sz="2100" b="1">
-                <a:solidFill>
-                  <a:srgbClr val="0F172A"/>
-                </a:solidFill>
-                <a:latin typeface="Segoe UI"/>
-              </a:defRPr>
-            </a:pPr>
-            <a:r>
-              <a:t>NHIỆM VỤ 4: ĐỘNG HỌC ĐỊNH TUYẾN BẤT ĐỊNH 3 TRẠNG THÁI</a:t>
-            </a:r>
-          </a:p>
-          <a:p>
-            <a:pPr>
-              <a:defRPr sz="1500">
-                <a:solidFill>
-                  <a:srgbClr val="64748B"/>
-                </a:solidFill>
-                <a:latin typeface="Segoe UI"/>
-              </a:defRPr>
-            </a:pPr>
-            <a:r>
-              <a:t>Cơ sở toán học phân bổ ngưỡng xác suất quyết định giữa Tầng 1 và Tầng 2</a:t>
-            </a:r>
-          </a:p>
-        </p:txBody>
-      </p:sp>
-      <p:sp>
-        <p:nvSpPr>
-          <p:cNvPr id="5" name="Rectangle 4"/>
-          <p:cNvSpPr/>
-          <p:nvPr/>
-        </p:nvSpPr>
-        <p:spPr>
-          <a:xfrm>
-            <a:off x="731520" y="6263640"/>
-            <a:ext cx="10728655" cy="18288"/>
-          </a:xfrm>
-          <a:prstGeom prst="rect">
-            <a:avLst/>
-          </a:prstGeom>
-          <a:solidFill>
-            <a:srgbClr val="E2E8F0"/>
-          </a:solidFill>
-          <a:ln>
-            <a:noFill/>
-          </a:ln>
-        </p:spPr>
-        <p:style>
-          <a:lnRef idx="1">
-            <a:schemeClr val="accent1"/>
-          </a:lnRef>
-          <a:fillRef idx="3">
-            <a:schemeClr val="accent1"/>
-          </a:fillRef>
-          <a:effectRef idx="2">
-            <a:schemeClr val="accent1"/>
-          </a:effectRef>
-          <a:fontRef idx="minor">
-            <a:schemeClr val="lt1"/>
-          </a:fontRef>
-        </p:style>
-        <p:txBody>
-          <a:bodyPr rtlCol="0" anchor="ctr"/>
-          <a:lstStyle/>
-          <a:p>
-            <a:pPr algn="ctr"/>
-          </a:p>
-        </p:txBody>
-      </p:sp>
-      <p:sp>
-        <p:nvSpPr>
-          <p:cNvPr id="6" name="TextBox 5"/>
-          <p:cNvSpPr txBox="1"/>
-          <p:nvPr/>
-        </p:nvSpPr>
-        <p:spPr>
-          <a:xfrm>
-            <a:off x="9601200" y="6327648"/>
-            <a:ext cx="1828800" cy="365760"/>
-          </a:xfrm>
-          <a:prstGeom prst="rect">
-            <a:avLst/>
-          </a:prstGeom>
-          <a:noFill/>
-        </p:spPr>
-        <p:txBody>
-          <a:bodyPr wrap="none" lIns="0" tIns="0" rIns="0" bIns="0">
-            <a:spAutoFit/>
-          </a:bodyPr>
-          <a:lstStyle/>
-          <a:p>
-            <a:pPr algn="r">
-              <a:defRPr sz="1300" b="1">
-                <a:solidFill>
-                  <a:srgbClr val="64748B"/>
-                </a:solidFill>
-                <a:latin typeface="Segoe UI"/>
-              </a:defRPr>
-            </a:pPr>
-            <a:r>
-              <a:t>Slide 25 / 30</a:t>
-            </a:r>
-          </a:p>
-        </p:txBody>
-      </p:sp>
-      <p:sp>
-        <p:nvSpPr>
-          <p:cNvPr id="7" name="Rectangle 6"/>
-          <p:cNvSpPr/>
-          <p:nvPr/>
-        </p:nvSpPr>
-        <p:spPr>
-          <a:xfrm>
-            <a:off x="731520" y="1234440"/>
-            <a:ext cx="4343400" cy="4846320"/>
-          </a:xfrm>
-          <a:prstGeom prst="rect">
-            <a:avLst/>
-          </a:prstGeom>
-          <a:solidFill>
-            <a:srgbClr val="FFFFFF"/>
-          </a:solidFill>
-          <a:ln w="19050">
-            <a:solidFill>
-              <a:srgbClr val="D97706"/>
-            </a:solidFill>
-          </a:ln>
-        </p:spPr>
-        <p:style>
-          <a:lnRef idx="1">
-            <a:schemeClr val="accent1"/>
-          </a:lnRef>
-          <a:fillRef idx="3">
-            <a:schemeClr val="accent1"/>
-          </a:fillRef>
-          <a:effectRef idx="2">
-            <a:schemeClr val="accent1"/>
-          </a:effectRef>
-          <a:fontRef idx="minor">
-            <a:schemeClr val="lt1"/>
-          </a:fontRef>
-        </p:style>
-        <p:txBody>
-          <a:bodyPr rtlCol="0" anchor="ctr" wrap="square" lIns="228600" tIns="228600" rIns="228600"/>
-          <a:lstStyle/>
-          <a:p>
-            <a:pPr algn="ctr">
-              <a:spcAft>
-                <a:spcPts val="800"/>
-              </a:spcAft>
-            </a:pPr>
-            <a:r>
-              <a:rPr sz="1700" b="1">
-                <a:solidFill>
-                  <a:srgbClr val="D97706"/>
-                </a:solidFill>
-              </a:rPr>
-              <a:t>CƠ SỞ THIẾT LẬP NGƯỠNG XÁC SUẤT</a:t>
-            </a:r>
-          </a:p>
-          <a:p>
-            <a:pPr>
-              <a:spcAft>
-                <a:spcPts val="600"/>
-              </a:spcAft>
-            </a:pPr>
-            <a:r>
-              <a:rPr b="1" sz="1600">
-                <a:solidFill>
-                  <a:srgbClr val="059669"/>
-                </a:solidFill>
-                <a:latin typeface="Segoe UI"/>
-              </a:rPr>
-              <a:t>1. Ngưỡng dưới tau_low = 0.15: </a:t>
-            </a:r>
-            <a:r>
-              <a:rPr b="0" sz="1600">
-                <a:solidFill>
-                  <a:srgbClr val="334155"/>
-                </a:solidFill>
-                <a:latin typeface="Segoe UI"/>
-              </a:rPr>
-              <a:t>Mọi mẫu có P(Attack) &lt;= 0.15 có độ tin cậy an toàn cực cao (&gt;99.2%) -&gt; Cho phép đi thẳng đến LLM.</a:t>
-            </a:r>
-          </a:p>
-          <a:p>
-            <a:pPr>
-              <a:spcAft>
-                <a:spcPts val="600"/>
-              </a:spcAft>
-            </a:pPr>
-            <a:r>
-              <a:rPr b="1" sz="1600">
-                <a:solidFill>
-                  <a:srgbClr val="DC2626"/>
-                </a:solidFill>
-                <a:latin typeface="Segoe UI"/>
-              </a:rPr>
-              <a:t>2. Ngưỡng trên tau_high = 0.85: </a:t>
-            </a:r>
-            <a:r>
-              <a:rPr b="0" sz="1600">
-                <a:solidFill>
-                  <a:srgbClr val="334155"/>
-                </a:solidFill>
-                <a:latin typeface="Segoe UI"/>
-              </a:rPr>
-              <a:t>Mọi mẫu có P(Attack) &gt;= 0.85 chứa các cụm từ độc hại hiển nhiên -&gt; Chặn tức thì, không tốn token LLM.</a:t>
-            </a:r>
-          </a:p>
-          <a:p>
-            <a:pPr>
-              <a:spcAft>
-                <a:spcPts val="600"/>
-              </a:spcAft>
-            </a:pPr>
-            <a:r>
-              <a:rPr b="1" sz="1600">
-                <a:solidFill>
-                  <a:srgbClr val="D97706"/>
-                </a:solidFill>
-                <a:latin typeface="Segoe UI"/>
-              </a:rPr>
-              <a:t>3. Vùng bất định (0.15 - 0.85): </a:t>
-            </a:r>
-            <a:r>
-              <a:rPr b="0" sz="1600">
-                <a:solidFill>
-                  <a:srgbClr val="334155"/>
-                </a:solidFill>
-                <a:latin typeface="Segoe UI"/>
-              </a:rPr>
-              <a:t>Nơi mô hình Tầng 1 phân vân; chuyển giao lên Tầng 2 DeBERTa-v3 để phân tích ngữ cảnh sâu.</a:t>
-            </a:r>
-          </a:p>
-          <a:p>
-            <a:pPr>
-              <a:spcAft>
-                <a:spcPts val="600"/>
-              </a:spcAft>
-            </a:pPr>
-            <a:r>
-              <a:rPr b="1" sz="1600">
-                <a:solidFill>
-                  <a:srgbClr val="0F172A"/>
-                </a:solidFill>
-                <a:latin typeface="Segoe UI"/>
-              </a:rPr>
-              <a:t>-&gt; Tính toán thực nghiệm: </a:t>
-            </a:r>
-            <a:r>
-              <a:rPr b="0" sz="1600">
-                <a:solidFill>
-                  <a:srgbClr val="334155"/>
-                </a:solidFill>
-                <a:latin typeface="Segoe UI"/>
-              </a:rPr>
-              <a:t>Được hiệu chuẩn tự động qua thuật toán Platt Scaling trên tập dữ liệu kiểm thử.</a:t>
-            </a:r>
-          </a:p>
-        </p:txBody>
-      </p:sp>
-      <p:sp>
-        <p:nvSpPr>
-          <p:cNvPr id="8" name="Rectangle 7"/>
-          <p:cNvSpPr/>
-          <p:nvPr/>
-        </p:nvSpPr>
-        <p:spPr>
-          <a:xfrm>
-            <a:off x="5257800" y="1234440"/>
-            <a:ext cx="6199632" cy="4846320"/>
-          </a:xfrm>
-          <a:prstGeom prst="rect">
-            <a:avLst/>
-          </a:prstGeom>
-          <a:solidFill>
-            <a:srgbClr val="FFFFFF"/>
-          </a:solidFill>
-          <a:ln w="19050">
-            <a:solidFill>
-              <a:srgbClr val="D97706"/>
-            </a:solidFill>
-          </a:ln>
-        </p:spPr>
-        <p:style>
-          <a:lnRef idx="1">
-            <a:schemeClr val="accent1"/>
-          </a:lnRef>
-          <a:fillRef idx="3">
-            <a:schemeClr val="accent1"/>
-          </a:fillRef>
-          <a:effectRef idx="2">
-            <a:schemeClr val="accent1"/>
-          </a:effectRef>
-          <a:fontRef idx="minor">
-            <a:schemeClr val="lt1"/>
-          </a:fontRef>
-        </p:style>
-        <p:txBody>
-          <a:bodyPr rtlCol="0" anchor="ctr"/>
-          <a:lstStyle/>
-          <a:p>
-            <a:pPr algn="ctr"/>
-          </a:p>
-        </p:txBody>
-      </p:sp>
-      <p:pic>
-        <p:nvPicPr>
-          <p:cNvPr id="9" name="Picture 8" descr="diagram_tri_state_distribution.png"/>
-          <p:cNvPicPr>
-            <a:picLocks noChangeAspect="1"/>
-          </p:cNvPicPr>
-          <p:nvPr/>
-        </p:nvPicPr>
-        <p:blipFill>
-          <a:blip r:embed="rId2"/>
-          <a:stretch>
-            <a:fillRect/>
-          </a:stretch>
-        </p:blipFill>
-        <p:spPr>
-          <a:xfrm>
-            <a:off x="5303520" y="1280160"/>
-            <a:ext cx="6108192" cy="4407408"/>
-          </a:xfrm>
-          <a:prstGeom prst="rect">
-            <a:avLst/>
-          </a:prstGeom>
-        </p:spPr>
-      </p:pic>
-      <p:sp>
-        <p:nvSpPr>
-          <p:cNvPr id="10" name="TextBox 9"/>
-          <p:cNvSpPr txBox="1"/>
-          <p:nvPr/>
-        </p:nvSpPr>
-        <p:spPr>
-          <a:xfrm>
-            <a:off x="5349240" y="5696712"/>
-            <a:ext cx="6016752" cy="347472"/>
-          </a:xfrm>
-          <a:prstGeom prst="rect">
-            <a:avLst/>
-          </a:prstGeom>
-          <a:noFill/>
-        </p:spPr>
-        <p:txBody>
-          <a:bodyPr wrap="square" lIns="0" tIns="0" rIns="0" bIns="0">
-            <a:spAutoFit/>
-          </a:bodyPr>
-          <a:lstStyle/>
-          <a:p>
-            <a:r>
-              <a:rPr sz="1600" b="1">
-                <a:solidFill>
-                  <a:srgbClr val="0F172A"/>
-                </a:solidFill>
-                <a:latin typeface="Segoe UI"/>
-              </a:rPr>
-              <a:t>Phân bổ động học định tuyến 3 trạng thái và các ngưỡng xác suất quyết định </a:t>
-            </a:r>
-            <a:r>
-              <a:rPr sz="1500" i="1">
-                <a:solidFill>
-                  <a:srgbClr val="0284C7"/>
-                </a:solidFill>
-                <a:latin typeface="Segoe UI"/>
-              </a:rPr>
-              <a:t>(Đề xuất kỹ thuật Tầng 1 PI-Guard)</a:t>
-            </a:r>
-          </a:p>
-        </p:txBody>
-      </p:sp>
-    </p:spTree>
-  </p:cSld>
-  <p:clrMapOvr>
-    <a:masterClrMapping/>
-  </p:clrMapOvr>
-</p:sld>
-</file>
-
-<file path=ppt/slides/slide26.xml><?xml version="1.0" encoding="utf-8"?>
-<p:sld xmlns:a="http://schemas.openxmlformats.org/drawingml/2006/main" xmlns:p="http://schemas.openxmlformats.org/presentationml/2006/main" xmlns:r="http://schemas.openxmlformats.org/officeDocument/2006/relationships">
-  <p:cSld>
-    <p:spTree>
-      <p:nvGrpSpPr>
-        <p:cNvPr id="1" name=""/>
-        <p:cNvGrpSpPr/>
-        <p:nvPr/>
-      </p:nvGrpSpPr>
-      <p:grpSpPr/>
-      <p:sp>
-        <p:nvSpPr>
-          <p:cNvPr id="2" name="Rectangle 1"/>
-          <p:cNvSpPr/>
-          <p:nvPr/>
-        </p:nvSpPr>
-        <p:spPr>
-          <a:xfrm>
-            <a:off x="0" y="0"/>
-            <a:ext cx="12191695" cy="6858000"/>
-          </a:xfrm>
-          <a:prstGeom prst="rect">
-            <a:avLst/>
-          </a:prstGeom>
-          <a:solidFill>
-            <a:srgbClr val="FFFFFF"/>
-          </a:solidFill>
-          <a:ln>
-            <a:noFill/>
-          </a:ln>
-        </p:spPr>
-        <p:style>
-          <a:lnRef idx="1">
-            <a:schemeClr val="accent1"/>
-          </a:lnRef>
-          <a:fillRef idx="3">
-            <a:schemeClr val="accent1"/>
-          </a:fillRef>
-          <a:effectRef idx="2">
-            <a:schemeClr val="accent1"/>
-          </a:effectRef>
-          <a:fontRef idx="minor">
-            <a:schemeClr val="lt1"/>
-          </a:fontRef>
-        </p:style>
-        <p:txBody>
-          <a:bodyPr rtlCol="0" anchor="ctr"/>
-          <a:lstStyle/>
-          <a:p>
-            <a:pPr algn="ctr"/>
-          </a:p>
-        </p:txBody>
-      </p:sp>
-      <p:sp>
-        <p:nvSpPr>
-          <p:cNvPr id="3" name="Rectangle 2"/>
-          <p:cNvSpPr/>
-          <p:nvPr/>
-        </p:nvSpPr>
-        <p:spPr>
-          <a:xfrm>
-            <a:off x="731520" y="329184"/>
-            <a:ext cx="73152" cy="676656"/>
-          </a:xfrm>
-          <a:prstGeom prst="rect">
-            <a:avLst/>
-          </a:prstGeom>
-          <a:solidFill>
-            <a:srgbClr val="0284C7"/>
-          </a:solidFill>
-          <a:ln>
-            <a:noFill/>
-          </a:ln>
-        </p:spPr>
-        <p:style>
-          <a:lnRef idx="1">
-            <a:schemeClr val="accent1"/>
-          </a:lnRef>
-          <a:fillRef idx="3">
-            <a:schemeClr val="accent1"/>
-          </a:fillRef>
-          <a:effectRef idx="2">
-            <a:schemeClr val="accent1"/>
-          </a:effectRef>
-          <a:fontRef idx="minor">
-            <a:schemeClr val="lt1"/>
-          </a:fontRef>
-        </p:style>
-        <p:txBody>
-          <a:bodyPr rtlCol="0" anchor="ctr"/>
-          <a:lstStyle/>
-          <a:p>
-            <a:pPr algn="ctr"/>
-          </a:p>
-        </p:txBody>
-      </p:sp>
-      <p:sp>
-        <p:nvSpPr>
-          <p:cNvPr id="4" name="TextBox 3"/>
-          <p:cNvSpPr txBox="1"/>
-          <p:nvPr/>
-        </p:nvSpPr>
-        <p:spPr>
-          <a:xfrm>
-            <a:off x="896112" y="256032"/>
-            <a:ext cx="10561320" cy="804672"/>
-          </a:xfrm>
-          <a:prstGeom prst="rect">
-            <a:avLst/>
-          </a:prstGeom>
-          <a:noFill/>
-        </p:spPr>
-        <p:txBody>
-          <a:bodyPr wrap="square" lIns="0" tIns="0" rIns="0" bIns="0">
-            <a:spAutoFit/>
-          </a:bodyPr>
-          <a:lstStyle/>
-          <a:p>
-            <a:pPr>
-              <a:spcAft>
-                <a:spcPts val="200"/>
-              </a:spcAft>
-              <a:defRPr sz="2100" b="1">
-                <a:solidFill>
-                  <a:srgbClr val="0F172A"/>
-                </a:solidFill>
-                <a:latin typeface="Segoe UI"/>
-              </a:defRPr>
-            </a:pPr>
-            <a:r>
-              <a:t>NHIỆM VỤ 4: 4 CẢI TIẾN KỸ THUẬT ĐỘC QUYỀN CỦA ĐỒ ÁN (PHẦN 1)</a:t>
-            </a:r>
-          </a:p>
-          <a:p>
-            <a:pPr>
-              <a:defRPr sz="1500">
-                <a:solidFill>
-                  <a:srgbClr val="64748B"/>
-                </a:solidFill>
-                <a:latin typeface="Segoe UI"/>
-              </a:defRPr>
-            </a:pPr>
-            <a:r>
-              <a:t>Cải tiến 1: Tiền xử lý bình thường hóa văn bản siêu tốc &amp; Cải tiến 2: Định tuyến bất định 3 trạng thái</a:t>
-            </a:r>
-          </a:p>
-        </p:txBody>
-      </p:sp>
-      <p:sp>
-        <p:nvSpPr>
-          <p:cNvPr id="5" name="Rectangle 4"/>
-          <p:cNvSpPr/>
-          <p:nvPr/>
-        </p:nvSpPr>
-        <p:spPr>
-          <a:xfrm>
-            <a:off x="731520" y="6263640"/>
-            <a:ext cx="10728655" cy="18288"/>
-          </a:xfrm>
-          <a:prstGeom prst="rect">
-            <a:avLst/>
-          </a:prstGeom>
-          <a:solidFill>
-            <a:srgbClr val="E2E8F0"/>
-          </a:solidFill>
-          <a:ln>
-            <a:noFill/>
-          </a:ln>
-        </p:spPr>
-        <p:style>
-          <a:lnRef idx="1">
-            <a:schemeClr val="accent1"/>
-          </a:lnRef>
-          <a:fillRef idx="3">
-            <a:schemeClr val="accent1"/>
-          </a:fillRef>
-          <a:effectRef idx="2">
-            <a:schemeClr val="accent1"/>
-          </a:effectRef>
-          <a:fontRef idx="minor">
-            <a:schemeClr val="lt1"/>
-          </a:fontRef>
-        </p:style>
-        <p:txBody>
-          <a:bodyPr rtlCol="0" anchor="ctr"/>
-          <a:lstStyle/>
-          <a:p>
-            <a:pPr algn="ctr"/>
-          </a:p>
-        </p:txBody>
-      </p:sp>
-      <p:sp>
-        <p:nvSpPr>
-          <p:cNvPr id="6" name="TextBox 5"/>
-          <p:cNvSpPr txBox="1"/>
-          <p:nvPr/>
-        </p:nvSpPr>
-        <p:spPr>
-          <a:xfrm>
-            <a:off x="9601200" y="6327648"/>
-            <a:ext cx="1828800" cy="365760"/>
-          </a:xfrm>
-          <a:prstGeom prst="rect">
-            <a:avLst/>
-          </a:prstGeom>
-          <a:noFill/>
-        </p:spPr>
-        <p:txBody>
-          <a:bodyPr wrap="none" lIns="0" tIns="0" rIns="0" bIns="0">
-            <a:spAutoFit/>
-          </a:bodyPr>
-          <a:lstStyle/>
-          <a:p>
-            <a:pPr algn="r">
-              <a:defRPr sz="1300" b="1">
-                <a:solidFill>
-                  <a:srgbClr val="64748B"/>
-                </a:solidFill>
-                <a:latin typeface="Segoe UI"/>
-              </a:defRPr>
-            </a:pPr>
-            <a:r>
-              <a:t>Slide 26 / 30</a:t>
-            </a:r>
-          </a:p>
-        </p:txBody>
-      </p:sp>
-      <p:sp>
-        <p:nvSpPr>
-          <p:cNvPr id="7" name="Rectangle 6"/>
-          <p:cNvSpPr/>
-          <p:nvPr/>
-        </p:nvSpPr>
-        <p:spPr>
-          <a:xfrm>
-            <a:off x="731520" y="1234440"/>
-            <a:ext cx="5257800" cy="4846320"/>
-          </a:xfrm>
-          <a:prstGeom prst="rect">
-            <a:avLst/>
-          </a:prstGeom>
-          <a:solidFill>
-            <a:srgbClr val="FFFFFF"/>
-          </a:solidFill>
-          <a:ln w="25400">
-            <a:solidFill>
-              <a:srgbClr val="0284C7"/>
-            </a:solidFill>
-          </a:ln>
-        </p:spPr>
-        <p:style>
-          <a:lnRef idx="1">
-            <a:schemeClr val="accent1"/>
-          </a:lnRef>
-          <a:fillRef idx="3">
-            <a:schemeClr val="accent1"/>
-          </a:fillRef>
-          <a:effectRef idx="2">
-            <a:schemeClr val="accent1"/>
-          </a:effectRef>
-          <a:fontRef idx="minor">
-            <a:schemeClr val="lt1"/>
-          </a:fontRef>
-        </p:style>
-        <p:txBody>
-          <a:bodyPr rtlCol="0" anchor="ctr" wrap="square" lIns="256032" tIns="256032" rIns="256032"/>
-          <a:lstStyle/>
-          <a:p>
-            <a:pPr algn="ctr">
-              <a:spcAft>
-                <a:spcPts val="800"/>
-              </a:spcAft>
-            </a:pPr>
-            <a:r>
-              <a:rPr sz="1700" b="1">
-                <a:solidFill>
-                  <a:srgbClr val="0284C7"/>
-                </a:solidFill>
-              </a:rPr>
-              <a:t>CẢI TIẾN 1: BÌNH THƯỜNG HÓA VĂN BẢN (TIER 0)</a:t>
-            </a:r>
-          </a:p>
-          <a:p>
-            <a:pPr>
-              <a:spcAft>
-                <a:spcPts val="600"/>
-              </a:spcAft>
-            </a:pPr>
-            <a:r>
-              <a:rPr b="1" sz="1600">
-                <a:solidFill>
-                  <a:srgbClr val="0F172A"/>
-                </a:solidFill>
-                <a:latin typeface="Segoe UI"/>
-              </a:rPr>
-              <a:t>1. Bản chất kỹ thuật: </a:t>
-            </a:r>
-            <a:r>
-              <a:rPr b="0" sz="1600">
-                <a:solidFill>
-                  <a:srgbClr val="334155"/>
-                </a:solidFill>
-                <a:latin typeface="Segoe UI"/>
-              </a:rPr>
-              <a:t>Bộ lọc tiền xử lý siêu nhẹ (&lt;0.05ms) đặt tại cửa ngõ trước khi đi vào mô hình Machine Learning.</a:t>
-            </a:r>
-          </a:p>
-          <a:p>
-            <a:pPr>
-              <a:spcAft>
-                <a:spcPts val="600"/>
-              </a:spcAft>
-            </a:pPr>
-            <a:r>
-              <a:rPr b="1" sz="1600">
-                <a:solidFill>
-                  <a:srgbClr val="0F172A"/>
-                </a:solidFill>
-                <a:latin typeface="Segoe UI"/>
-              </a:rPr>
-              <a:t>2. Chống lẩn tránh ký tự: </a:t>
-            </a:r>
-            <a:r>
-              <a:rPr b="0" sz="1600">
-                <a:solidFill>
-                  <a:srgbClr val="334155"/>
-                </a:solidFill>
-                <a:latin typeface="Segoe UI"/>
-              </a:rPr>
-              <a:t>Bình thường hóa Unicode NFKC, bóc tách ký tự ẩn (Zero-width) và khử khoảng trắng cố tình chèn giữa các từ.</a:t>
-            </a:r>
-          </a:p>
-          <a:p>
-            <a:pPr>
-              <a:spcAft>
-                <a:spcPts val="600"/>
-              </a:spcAft>
-            </a:pPr>
-            <a:r>
-              <a:rPr b="1" sz="1600">
-                <a:solidFill>
-                  <a:srgbClr val="D97706"/>
-                </a:solidFill>
-                <a:latin typeface="Segoe UI"/>
-              </a:rPr>
-              <a:t>3. Tự động giải mã Base64: </a:t>
-            </a:r>
-            <a:r>
-              <a:rPr b="0" sz="1600">
-                <a:solidFill>
-                  <a:srgbClr val="334155"/>
-                </a:solidFill>
-                <a:latin typeface="Segoe UI"/>
-              </a:rPr>
-              <a:t>Phát hiện chuỗi mã hóa Base64 và tự động giải mã ra bản rõ để kiểm tra nội dung bên trong.</a:t>
-            </a:r>
-          </a:p>
-          <a:p>
-            <a:pPr>
-              <a:spcAft>
-                <a:spcPts val="600"/>
-              </a:spcAft>
-            </a:pPr>
-            <a:r>
-              <a:rPr b="1" sz="1600">
-                <a:solidFill>
-                  <a:srgbClr val="059669"/>
-                </a:solidFill>
-                <a:latin typeface="Segoe UI"/>
-              </a:rPr>
-              <a:t>-&gt; Hiệu quả: </a:t>
-            </a:r>
-            <a:r>
-              <a:rPr b="0" sz="1600">
-                <a:solidFill>
-                  <a:srgbClr val="334155"/>
-                </a:solidFill>
-                <a:latin typeface="Segoe UI"/>
-              </a:rPr>
-              <a:t>Vô hiệu hóa hoàn toàn các đòn lẩn tránh cơ bản trước khi tốn tài nguyên mô hình AI!</a:t>
-            </a:r>
-          </a:p>
-        </p:txBody>
-      </p:sp>
-      <p:sp>
-        <p:nvSpPr>
-          <p:cNvPr id="8" name="Rectangle 7"/>
-          <p:cNvSpPr/>
-          <p:nvPr/>
-        </p:nvSpPr>
-        <p:spPr>
-          <a:xfrm>
-            <a:off x="6199632" y="1234440"/>
-            <a:ext cx="5257800" cy="4846320"/>
-          </a:xfrm>
-          <a:prstGeom prst="rect">
-            <a:avLst/>
-          </a:prstGeom>
-          <a:solidFill>
-            <a:srgbClr val="FFFFFF"/>
-          </a:solidFill>
-          <a:ln w="25400">
-            <a:solidFill>
-              <a:srgbClr val="059669"/>
-            </a:solidFill>
-          </a:ln>
-        </p:spPr>
-        <p:style>
-          <a:lnRef idx="1">
-            <a:schemeClr val="accent1"/>
-          </a:lnRef>
-          <a:fillRef idx="3">
-            <a:schemeClr val="accent1"/>
-          </a:fillRef>
-          <a:effectRef idx="2">
-            <a:schemeClr val="accent1"/>
-          </a:effectRef>
-          <a:fontRef idx="minor">
-            <a:schemeClr val="lt1"/>
-          </a:fontRef>
-        </p:style>
-        <p:txBody>
-          <a:bodyPr rtlCol="0" anchor="ctr" wrap="square" lIns="256032" tIns="256032" rIns="256032"/>
-          <a:lstStyle/>
-          <a:p>
-            <a:pPr algn="ctr">
-              <a:spcAft>
-                <a:spcPts val="800"/>
-              </a:spcAft>
-            </a:pPr>
-            <a:r>
-              <a:rPr sz="1700" b="1">
-                <a:solidFill>
-                  <a:srgbClr val="059669"/>
-                </a:solidFill>
-              </a:rPr>
-              <a:t>CẢI TIẾN 2: ĐỊNH TUYẾN BẤT ĐỊNH 3 TRẠNG THÁI</a:t>
-            </a:r>
-          </a:p>
-          <a:p>
-            <a:pPr>
-              <a:spcAft>
-                <a:spcPts val="600"/>
-              </a:spcAft>
-            </a:pPr>
-            <a:r>
-              <a:rPr b="1" sz="1600">
-                <a:solidFill>
-                  <a:srgbClr val="0F172A"/>
-                </a:solidFill>
-                <a:latin typeface="Segoe UI"/>
-              </a:rPr>
-              <a:t>1. Bản chất kỹ thuật: </a:t>
-            </a:r>
-            <a:r>
-              <a:rPr b="0" sz="1600">
-                <a:solidFill>
-                  <a:srgbClr val="334155"/>
-                </a:solidFill>
-                <a:latin typeface="Segoe UI"/>
-              </a:rPr>
-              <a:t>Cơ chế phân luồng thông minh dựa trên xác suất dự báo P(Attack|X) tại Tầng 1.</a:t>
-            </a:r>
-          </a:p>
-          <a:p>
-            <a:pPr>
-              <a:spcAft>
-                <a:spcPts val="600"/>
-              </a:spcAft>
-            </a:pPr>
-            <a:r>
-              <a:rPr b="1" sz="1600">
-                <a:solidFill>
-                  <a:srgbClr val="0F172A"/>
-                </a:solidFill>
-                <a:latin typeface="Segoe UI"/>
-              </a:rPr>
-              <a:t>2. Phá vỡ bế tắc Đơn tầng: </a:t>
-            </a:r>
-            <a:r>
-              <a:rPr b="0" sz="1600">
-                <a:solidFill>
-                  <a:srgbClr val="334155"/>
-                </a:solidFill>
-                <a:latin typeface="Segoe UI"/>
-              </a:rPr>
-              <a:t>Không ép hệ thống phải chọn giữa 'quá nhanh nhưng ẩu' hay 'quá chậm nhưng chuẩn'.</a:t>
-            </a:r>
-          </a:p>
-          <a:p>
-            <a:pPr>
-              <a:spcAft>
-                <a:spcPts val="600"/>
-              </a:spcAft>
-            </a:pPr>
-            <a:r>
-              <a:rPr b="1" sz="1600">
-                <a:solidFill>
-                  <a:srgbClr val="0284C7"/>
-                </a:solidFill>
-                <a:latin typeface="Segoe UI"/>
-              </a:rPr>
-              <a:t>3. Giải phóng 82.6% lưu lượng: </a:t>
-            </a:r>
-            <a:r>
-              <a:rPr b="0" sz="1600">
-                <a:solidFill>
-                  <a:srgbClr val="334155"/>
-                </a:solidFill>
-                <a:latin typeface="Segoe UI"/>
-              </a:rPr>
-              <a:t>Chỉ 17.4% mẫu khó cần gọi Tầng 2; giúp CPU duy trì thông lượng hàng nghìn truy vấn/giây.</a:t>
-            </a:r>
-          </a:p>
-          <a:p>
-            <a:pPr>
-              <a:spcAft>
-                <a:spcPts val="600"/>
-              </a:spcAft>
-            </a:pPr>
-            <a:r>
-              <a:rPr b="1" sz="1600">
-                <a:solidFill>
-                  <a:srgbClr val="059669"/>
-                </a:solidFill>
-                <a:latin typeface="Segoe UI"/>
-              </a:rPr>
-              <a:t>-&gt; Hiệu quả: </a:t>
-            </a:r>
-            <a:r>
-              <a:rPr b="0" sz="1600">
-                <a:solidFill>
-                  <a:srgbClr val="334155"/>
-                </a:solidFill>
-                <a:latin typeface="Segoe UI"/>
-              </a:rPr>
-              <a:t>Đưa độ trễ trung bình toàn trình xuống mức kỷ lục 3.69ms trên máy tính thông thường!</a:t>
-            </a:r>
-          </a:p>
-        </p:txBody>
-      </p:sp>
-    </p:spTree>
-  </p:cSld>
-  <p:clrMapOvr>
-    <a:masterClrMapping/>
-  </p:clrMapOvr>
-</p:sld>
-</file>
-
-<file path=ppt/slides/slide27.xml><?xml version="1.0" encoding="utf-8"?>
-<p:sld xmlns:a="http://schemas.openxmlformats.org/drawingml/2006/main" xmlns:p="http://schemas.openxmlformats.org/presentationml/2006/main" xmlns:r="http://schemas.openxmlformats.org/officeDocument/2006/relationships">
-  <p:cSld>
-    <p:spTree>
-      <p:nvGrpSpPr>
-        <p:cNvPr id="1" name=""/>
-        <p:cNvGrpSpPr/>
-        <p:nvPr/>
-      </p:nvGrpSpPr>
-      <p:grpSpPr/>
-      <p:sp>
-        <p:nvSpPr>
-          <p:cNvPr id="2" name="Rectangle 1"/>
-          <p:cNvSpPr/>
-          <p:nvPr/>
-        </p:nvSpPr>
-        <p:spPr>
-          <a:xfrm>
-            <a:off x="0" y="0"/>
-            <a:ext cx="12191695" cy="6858000"/>
-          </a:xfrm>
-          <a:prstGeom prst="rect">
-            <a:avLst/>
-          </a:prstGeom>
-          <a:solidFill>
-            <a:srgbClr val="FFFFFF"/>
-          </a:solidFill>
-          <a:ln>
-            <a:noFill/>
-          </a:ln>
-        </p:spPr>
-        <p:style>
-          <a:lnRef idx="1">
-            <a:schemeClr val="accent1"/>
-          </a:lnRef>
-          <a:fillRef idx="3">
-            <a:schemeClr val="accent1"/>
-          </a:fillRef>
-          <a:effectRef idx="2">
-            <a:schemeClr val="accent1"/>
-          </a:effectRef>
-          <a:fontRef idx="minor">
-            <a:schemeClr val="lt1"/>
-          </a:fontRef>
-        </p:style>
-        <p:txBody>
-          <a:bodyPr rtlCol="0" anchor="ctr"/>
-          <a:lstStyle/>
-          <a:p>
-            <a:pPr algn="ctr"/>
-          </a:p>
-        </p:txBody>
-      </p:sp>
-      <p:sp>
-        <p:nvSpPr>
-          <p:cNvPr id="3" name="Rectangle 2"/>
-          <p:cNvSpPr/>
-          <p:nvPr/>
-        </p:nvSpPr>
-        <p:spPr>
-          <a:xfrm>
-            <a:off x="731520" y="329184"/>
-            <a:ext cx="73152" cy="676656"/>
-          </a:xfrm>
-          <a:prstGeom prst="rect">
-            <a:avLst/>
-          </a:prstGeom>
-          <a:solidFill>
-            <a:srgbClr val="0284C7"/>
-          </a:solidFill>
-          <a:ln>
-            <a:noFill/>
-          </a:ln>
-        </p:spPr>
-        <p:style>
-          <a:lnRef idx="1">
-            <a:schemeClr val="accent1"/>
-          </a:lnRef>
-          <a:fillRef idx="3">
-            <a:schemeClr val="accent1"/>
-          </a:fillRef>
-          <a:effectRef idx="2">
-            <a:schemeClr val="accent1"/>
-          </a:effectRef>
-          <a:fontRef idx="minor">
-            <a:schemeClr val="lt1"/>
-          </a:fontRef>
-        </p:style>
-        <p:txBody>
-          <a:bodyPr rtlCol="0" anchor="ctr"/>
-          <a:lstStyle/>
-          <a:p>
-            <a:pPr algn="ctr"/>
-          </a:p>
-        </p:txBody>
-      </p:sp>
-      <p:sp>
-        <p:nvSpPr>
-          <p:cNvPr id="4" name="TextBox 3"/>
-          <p:cNvSpPr txBox="1"/>
-          <p:nvPr/>
-        </p:nvSpPr>
-        <p:spPr>
-          <a:xfrm>
-            <a:off x="896112" y="256032"/>
-            <a:ext cx="10561320" cy="804672"/>
-          </a:xfrm>
-          <a:prstGeom prst="rect">
-            <a:avLst/>
-          </a:prstGeom>
-          <a:noFill/>
-        </p:spPr>
-        <p:txBody>
-          <a:bodyPr wrap="square" lIns="0" tIns="0" rIns="0" bIns="0">
-            <a:spAutoFit/>
-          </a:bodyPr>
-          <a:lstStyle/>
-          <a:p>
-            <a:pPr>
-              <a:spcAft>
-                <a:spcPts val="200"/>
-              </a:spcAft>
-              <a:defRPr sz="2100" b="1">
-                <a:solidFill>
-                  <a:srgbClr val="0F172A"/>
-                </a:solidFill>
-                <a:latin typeface="Segoe UI"/>
-              </a:defRPr>
-            </a:pPr>
-            <a:r>
-              <a:t>NHIỆM VỤ 4: 4 CẢI TIẾN KỸ THUẬT ĐỘC QUYỀN CỦA ĐỒ ÁN (PHẦN 2)</a:t>
-            </a:r>
-          </a:p>
-          <a:p>
-            <a:pPr>
-              <a:defRPr sz="1500">
-                <a:solidFill>
-                  <a:srgbClr val="64748B"/>
-                </a:solidFill>
-                <a:latin typeface="Segoe UI"/>
-              </a:defRPr>
-            </a:pPr>
-            <a:r>
-              <a:t>Cải tiến 3: Lượng tử hóa ONNX INT8 tăng tốc 3.2x &amp; Cải tiến 4: Hệ thống quan trắc độ trôi dữ liệu</a:t>
-            </a:r>
-          </a:p>
-        </p:txBody>
-      </p:sp>
-      <p:sp>
-        <p:nvSpPr>
-          <p:cNvPr id="5" name="Rectangle 4"/>
-          <p:cNvSpPr/>
-          <p:nvPr/>
-        </p:nvSpPr>
-        <p:spPr>
-          <a:xfrm>
-            <a:off x="731520" y="6263640"/>
-            <a:ext cx="10728655" cy="18288"/>
-          </a:xfrm>
-          <a:prstGeom prst="rect">
-            <a:avLst/>
-          </a:prstGeom>
-          <a:solidFill>
-            <a:srgbClr val="E2E8F0"/>
-          </a:solidFill>
-          <a:ln>
-            <a:noFill/>
-          </a:ln>
-        </p:spPr>
-        <p:style>
-          <a:lnRef idx="1">
-            <a:schemeClr val="accent1"/>
-          </a:lnRef>
-          <a:fillRef idx="3">
-            <a:schemeClr val="accent1"/>
-          </a:fillRef>
-          <a:effectRef idx="2">
-            <a:schemeClr val="accent1"/>
-          </a:effectRef>
-          <a:fontRef idx="minor">
-            <a:schemeClr val="lt1"/>
-          </a:fontRef>
-        </p:style>
-        <p:txBody>
-          <a:bodyPr rtlCol="0" anchor="ctr"/>
-          <a:lstStyle/>
-          <a:p>
-            <a:pPr algn="ctr"/>
-          </a:p>
-        </p:txBody>
-      </p:sp>
-      <p:sp>
-        <p:nvSpPr>
-          <p:cNvPr id="6" name="TextBox 5"/>
-          <p:cNvSpPr txBox="1"/>
-          <p:nvPr/>
-        </p:nvSpPr>
-        <p:spPr>
-          <a:xfrm>
-            <a:off x="9601200" y="6327648"/>
-            <a:ext cx="1828800" cy="365760"/>
-          </a:xfrm>
-          <a:prstGeom prst="rect">
-            <a:avLst/>
-          </a:prstGeom>
-          <a:noFill/>
-        </p:spPr>
-        <p:txBody>
-          <a:bodyPr wrap="none" lIns="0" tIns="0" rIns="0" bIns="0">
-            <a:spAutoFit/>
-          </a:bodyPr>
-          <a:lstStyle/>
-          <a:p>
-            <a:pPr algn="r">
-              <a:defRPr sz="1300" b="1">
-                <a:solidFill>
-                  <a:srgbClr val="64748B"/>
-                </a:solidFill>
-                <a:latin typeface="Segoe UI"/>
-              </a:defRPr>
-            </a:pPr>
-            <a:r>
-              <a:t>Slide 27 / 30</a:t>
-            </a:r>
-          </a:p>
-        </p:txBody>
-      </p:sp>
-      <p:sp>
-        <p:nvSpPr>
-          <p:cNvPr id="7" name="Rectangle 6"/>
-          <p:cNvSpPr/>
-          <p:nvPr/>
-        </p:nvSpPr>
-        <p:spPr>
-          <a:xfrm>
-            <a:off x="731520" y="1234440"/>
-            <a:ext cx="5257800" cy="4846320"/>
-          </a:xfrm>
-          <a:prstGeom prst="rect">
-            <a:avLst/>
-          </a:prstGeom>
-          <a:solidFill>
-            <a:srgbClr val="FFFFFF"/>
-          </a:solidFill>
-          <a:ln w="25400">
-            <a:solidFill>
-              <a:srgbClr val="7C3AED"/>
-            </a:solidFill>
-          </a:ln>
-        </p:spPr>
-        <p:style>
-          <a:lnRef idx="1">
-            <a:schemeClr val="accent1"/>
-          </a:lnRef>
-          <a:fillRef idx="3">
-            <a:schemeClr val="accent1"/>
-          </a:fillRef>
-          <a:effectRef idx="2">
-            <a:schemeClr val="accent1"/>
-          </a:effectRef>
-          <a:fontRef idx="minor">
-            <a:schemeClr val="lt1"/>
-          </a:fontRef>
-        </p:style>
-        <p:txBody>
-          <a:bodyPr rtlCol="0" anchor="ctr" wrap="square" lIns="256032" tIns="256032" rIns="256032"/>
-          <a:lstStyle/>
-          <a:p>
-            <a:pPr algn="ctr">
-              <a:spcAft>
-                <a:spcPts val="800"/>
-              </a:spcAft>
-            </a:pPr>
-            <a:r>
-              <a:rPr sz="1700" b="1">
-                <a:solidFill>
-                  <a:srgbClr val="7C3AED"/>
-                </a:solidFill>
-              </a:rPr>
-              <a:t>CẢI TIẾN 3: LƯỢNG TỬ HÓA ONNX INT8 (TẦNG 2)</a:t>
-            </a:r>
-          </a:p>
-          <a:p>
-            <a:pPr>
-              <a:spcAft>
-                <a:spcPts val="600"/>
-              </a:spcAft>
-            </a:pPr>
-            <a:r>
-              <a:rPr b="1" sz="1600">
-                <a:solidFill>
-                  <a:srgbClr val="0F172A"/>
-                </a:solidFill>
-                <a:latin typeface="Segoe UI"/>
-              </a:rPr>
-              <a:t>1. Bản chất kỹ thuật: </a:t>
-            </a:r>
-            <a:r>
-              <a:rPr b="0" sz="1600">
-                <a:solidFill>
-                  <a:srgbClr val="334155"/>
-                </a:solidFill>
-                <a:latin typeface="Segoe UI"/>
-              </a:rPr>
-              <a:t>Chuyển đổi trọng số DeBERTa-v3 từ dấu phẩy động FP32 sang số nguyên 8-bit (INT8).</a:t>
-            </a:r>
-          </a:p>
-          <a:p>
-            <a:pPr>
-              <a:spcAft>
-                <a:spcPts val="600"/>
-              </a:spcAft>
-            </a:pPr>
-            <a:r>
-              <a:rPr b="1" sz="1600">
-                <a:solidFill>
-                  <a:srgbClr val="0F172A"/>
-                </a:solidFill>
-                <a:latin typeface="Segoe UI"/>
-              </a:rPr>
-              <a:t>2. Tận dụng phần cứng CPU: </a:t>
-            </a:r>
-            <a:r>
-              <a:rPr b="0" sz="1600">
-                <a:solidFill>
-                  <a:srgbClr val="334155"/>
-                </a:solidFill>
-                <a:latin typeface="Segoe UI"/>
-              </a:rPr>
-              <a:t>Khai thác tập lệnh AVX-512 / VNNI trên CPU tiêu chuẩn để tăng tốc độ tính toán gấp 3.2 lần.</a:t>
-            </a:r>
-          </a:p>
-          <a:p>
-            <a:pPr>
-              <a:spcAft>
-                <a:spcPts val="600"/>
-              </a:spcAft>
-            </a:pPr>
-            <a:r>
-              <a:rPr b="1" sz="1600">
-                <a:solidFill>
-                  <a:srgbClr val="0284C7"/>
-                </a:solidFill>
-                <a:latin typeface="Segoe UI"/>
-              </a:rPr>
-              <a:t>3. Rút ngắn độ trễ Tầng 2: </a:t>
-            </a:r>
-            <a:r>
-              <a:rPr b="0" sz="1600">
-                <a:solidFill>
-                  <a:srgbClr val="334155"/>
-                </a:solidFill>
-                <a:latin typeface="Segoe UI"/>
-              </a:rPr>
-              <a:t>Giảm độ trễ từ 112.4ms (FP32) xuống còn ~18.5ms (INT8) mà bảo toàn 100% điểm F1=0.9416!</a:t>
-            </a:r>
-          </a:p>
-          <a:p>
-            <a:pPr>
-              <a:spcAft>
-                <a:spcPts val="600"/>
-              </a:spcAft>
-            </a:pPr>
-            <a:r>
-              <a:rPr b="1" sz="1600">
-                <a:solidFill>
-                  <a:srgbClr val="059669"/>
-                </a:solidFill>
-                <a:latin typeface="Segoe UI"/>
-              </a:rPr>
-              <a:t>-&gt; Hiệu quả: </a:t>
-            </a:r>
-            <a:r>
-              <a:rPr b="0" sz="1600">
-                <a:solidFill>
-                  <a:srgbClr val="334155"/>
-                </a:solidFill>
-                <a:latin typeface="Segoe UI"/>
-              </a:rPr>
-              <a:t>Hiện thực hóa mục tiêu chạy hoàn toàn Zero-GPU; giảm 4 lần dung lượng RAM lưu trữ.</a:t>
-            </a:r>
-          </a:p>
-        </p:txBody>
-      </p:sp>
-      <p:sp>
-        <p:nvSpPr>
-          <p:cNvPr id="8" name="Rectangle 7"/>
-          <p:cNvSpPr/>
-          <p:nvPr/>
-        </p:nvSpPr>
-        <p:spPr>
-          <a:xfrm>
-            <a:off x="6199632" y="1234440"/>
-            <a:ext cx="5257800" cy="4846320"/>
-          </a:xfrm>
-          <a:prstGeom prst="rect">
-            <a:avLst/>
-          </a:prstGeom>
-          <a:solidFill>
-            <a:srgbClr val="FFFFFF"/>
-          </a:solidFill>
-          <a:ln w="25400">
-            <a:solidFill>
-              <a:srgbClr val="D97706"/>
-            </a:solidFill>
-          </a:ln>
-        </p:spPr>
-        <p:style>
-          <a:lnRef idx="1">
-            <a:schemeClr val="accent1"/>
-          </a:lnRef>
-          <a:fillRef idx="3">
-            <a:schemeClr val="accent1"/>
-          </a:fillRef>
-          <a:effectRef idx="2">
-            <a:schemeClr val="accent1"/>
-          </a:effectRef>
-          <a:fontRef idx="minor">
-            <a:schemeClr val="lt1"/>
-          </a:fontRef>
-        </p:style>
-        <p:txBody>
-          <a:bodyPr rtlCol="0" anchor="ctr" wrap="square" lIns="256032" tIns="256032" rIns="256032"/>
-          <a:lstStyle/>
-          <a:p>
-            <a:pPr algn="ctr">
-              <a:spcAft>
-                <a:spcPts val="800"/>
-              </a:spcAft>
-            </a:pPr>
-            <a:r>
-              <a:rPr sz="1700" b="1">
-                <a:solidFill>
-                  <a:srgbClr val="D97706"/>
-                </a:solidFill>
-              </a:rPr>
-              <a:t>CẢI TIẾN 4: HỆ THỐNG QUAN TRẮC ĐỘ TRÔI (DRIFT MONITOR)</a:t>
-            </a:r>
-          </a:p>
-          <a:p>
-            <a:pPr>
-              <a:spcAft>
-                <a:spcPts val="600"/>
-              </a:spcAft>
-            </a:pPr>
-            <a:r>
-              <a:rPr b="1" sz="1600">
-                <a:solidFill>
-                  <a:srgbClr val="0F172A"/>
-                </a:solidFill>
-                <a:latin typeface="Segoe UI"/>
-              </a:rPr>
-              <a:t>1. Bản chất kỹ thuật: </a:t>
-            </a:r>
-            <a:r>
-              <a:rPr b="0" sz="1600">
-                <a:solidFill>
-                  <a:srgbClr val="334155"/>
-                </a:solidFill>
-                <a:latin typeface="Segoe UI"/>
-              </a:rPr>
-              <a:t>Module giám sát phân bổ xác suất và độ dài token của các truy vấn người dùng theo luồng truyền dữ liệu.</a:t>
-            </a:r>
-          </a:p>
-          <a:p>
-            <a:pPr>
-              <a:spcAft>
-                <a:spcPts val="600"/>
-              </a:spcAft>
-            </a:pPr>
-            <a:r>
-              <a:rPr b="1" sz="1600">
-                <a:solidFill>
-                  <a:srgbClr val="0F172A"/>
-                </a:solidFill>
-                <a:latin typeface="Segoe UI"/>
-              </a:rPr>
-              <a:t>2. Nhận diện chiến dịch tấn công: </a:t>
-            </a:r>
-            <a:r>
-              <a:rPr b="0" sz="1600">
-                <a:solidFill>
-                  <a:srgbClr val="334155"/>
-                </a:solidFill>
-                <a:latin typeface="Segoe UI"/>
-              </a:rPr>
-              <a:t>Phát hiện khi tỷ lệ mẫu rơi vào vùng bất định (17.4%) đột ngột tăng vọt -&gt; Cảnh báo tấn công có chủ đích.</a:t>
-            </a:r>
-          </a:p>
-          <a:p>
-            <a:pPr>
-              <a:spcAft>
-                <a:spcPts val="600"/>
-              </a:spcAft>
-            </a:pPr>
-            <a:r>
-              <a:rPr b="1" sz="1600">
-                <a:solidFill>
-                  <a:srgbClr val="D97706"/>
-                </a:solidFill>
-                <a:latin typeface="Segoe UI"/>
-              </a:rPr>
-              <a:t>3. Tự động thích ứng: </a:t>
-            </a:r>
-            <a:r>
-              <a:rPr b="0" sz="1600">
-                <a:solidFill>
-                  <a:srgbClr val="334155"/>
-                </a:solidFill>
-                <a:latin typeface="Segoe UI"/>
-              </a:rPr>
-              <a:t>Thu thập các mẫu bất định mới để phục vụ chu kỳ huấn luyện bổ sung (Active Learning) cho Review 2.</a:t>
-            </a:r>
-          </a:p>
-          <a:p>
-            <a:pPr>
-              <a:spcAft>
-                <a:spcPts val="600"/>
-              </a:spcAft>
-            </a:pPr>
-            <a:r>
-              <a:rPr b="1" sz="1600">
-                <a:solidFill>
-                  <a:srgbClr val="059669"/>
-                </a:solidFill>
-                <a:latin typeface="Segoe UI"/>
-              </a:rPr>
-              <a:t>-&gt; Hiệu quả: </a:t>
-            </a:r>
-            <a:r>
-              <a:rPr b="0" sz="1600">
-                <a:solidFill>
-                  <a:srgbClr val="334155"/>
-                </a:solidFill>
-                <a:latin typeface="Segoe UI"/>
-              </a:rPr>
-              <a:t>Giữ cho rào chắn PI-Guard luôn có khả năng tiến hóa trước các biến thể tấn công mới!</a:t>
-            </a:r>
-          </a:p>
-        </p:txBody>
-      </p:sp>
-    </p:spTree>
-  </p:cSld>
-  <p:clrMapOvr>
-    <a:masterClrMapping/>
-  </p:clrMapOvr>
-</p:sld>
-</file>
-
-<file path=ppt/slides/slide28.xml><?xml version="1.0" encoding="utf-8"?>
-<p:sld xmlns:a="http://schemas.openxmlformats.org/drawingml/2006/main" xmlns:p="http://schemas.openxmlformats.org/presentationml/2006/main" xmlns:r="http://schemas.openxmlformats.org/officeDocument/2006/relationships">
-  <p:cSld>
-    <p:spTree>
-      <p:nvGrpSpPr>
-        <p:cNvPr id="1" name=""/>
-        <p:cNvGrpSpPr/>
-        <p:nvPr/>
-      </p:nvGrpSpPr>
-      <p:grpSpPr/>
-      <p:sp>
-        <p:nvSpPr>
-          <p:cNvPr id="2" name="Rectangle 1"/>
-          <p:cNvSpPr/>
-          <p:nvPr/>
-        </p:nvSpPr>
-        <p:spPr>
-          <a:xfrm>
-            <a:off x="0" y="0"/>
-            <a:ext cx="12191695" cy="6858000"/>
-          </a:xfrm>
-          <a:prstGeom prst="rect">
-            <a:avLst/>
-          </a:prstGeom>
-          <a:solidFill>
-            <a:srgbClr val="FFFFFF"/>
-          </a:solidFill>
-          <a:ln>
-            <a:noFill/>
-          </a:ln>
-        </p:spPr>
-        <p:style>
-          <a:lnRef idx="1">
-            <a:schemeClr val="accent1"/>
-          </a:lnRef>
-          <a:fillRef idx="3">
-            <a:schemeClr val="accent1"/>
-          </a:fillRef>
-          <a:effectRef idx="2">
-            <a:schemeClr val="accent1"/>
-          </a:effectRef>
-          <a:fontRef idx="minor">
-            <a:schemeClr val="lt1"/>
-          </a:fontRef>
-        </p:style>
-        <p:txBody>
-          <a:bodyPr rtlCol="0" anchor="ctr"/>
-          <a:lstStyle/>
-          <a:p>
-            <a:pPr algn="ctr"/>
-          </a:p>
-        </p:txBody>
-      </p:sp>
-      <p:sp>
-        <p:nvSpPr>
-          <p:cNvPr id="3" name="Rectangle 2"/>
-          <p:cNvSpPr/>
-          <p:nvPr/>
-        </p:nvSpPr>
-        <p:spPr>
-          <a:xfrm>
-            <a:off x="731520" y="329184"/>
-            <a:ext cx="73152" cy="676656"/>
-          </a:xfrm>
-          <a:prstGeom prst="rect">
-            <a:avLst/>
-          </a:prstGeom>
-          <a:solidFill>
-            <a:srgbClr val="0284C7"/>
-          </a:solidFill>
-          <a:ln>
-            <a:noFill/>
-          </a:ln>
-        </p:spPr>
-        <p:style>
-          <a:lnRef idx="1">
-            <a:schemeClr val="accent1"/>
-          </a:lnRef>
-          <a:fillRef idx="3">
-            <a:schemeClr val="accent1"/>
-          </a:fillRef>
-          <a:effectRef idx="2">
-            <a:schemeClr val="accent1"/>
-          </a:effectRef>
-          <a:fontRef idx="minor">
-            <a:schemeClr val="lt1"/>
-          </a:fontRef>
-        </p:style>
-        <p:txBody>
-          <a:bodyPr rtlCol="0" anchor="ctr"/>
-          <a:lstStyle/>
-          <a:p>
-            <a:pPr algn="ctr"/>
-          </a:p>
-        </p:txBody>
-      </p:sp>
-      <p:sp>
-        <p:nvSpPr>
-          <p:cNvPr id="4" name="TextBox 3"/>
-          <p:cNvSpPr txBox="1"/>
-          <p:nvPr/>
-        </p:nvSpPr>
-        <p:spPr>
-          <a:xfrm>
-            <a:off x="896112" y="256032"/>
-            <a:ext cx="10561320" cy="804672"/>
-          </a:xfrm>
-          <a:prstGeom prst="rect">
-            <a:avLst/>
-          </a:prstGeom>
-          <a:noFill/>
-        </p:spPr>
-        <p:txBody>
-          <a:bodyPr wrap="square" lIns="0" tIns="0" rIns="0" bIns="0">
-            <a:spAutoFit/>
-          </a:bodyPr>
-          <a:lstStyle/>
-          <a:p>
-            <a:pPr>
-              <a:spcAft>
-                <a:spcPts val="200"/>
-              </a:spcAft>
-              <a:defRPr sz="2100" b="1">
-                <a:solidFill>
-                  <a:srgbClr val="0F172A"/>
-                </a:solidFill>
-                <a:latin typeface="Segoe UI"/>
-              </a:defRPr>
-            </a:pPr>
-            <a:r>
-              <a:t>NHIỆM VỤ 4: HỒ SƠ HIỆU NĂNG KỲ VỌNG TOÀN TRÌNH CỦA PI-GUARD</a:t>
-            </a:r>
-          </a:p>
-          <a:p>
-            <a:pPr>
-              <a:defRPr sz="1500">
-                <a:solidFill>
-                  <a:srgbClr val="64748B"/>
-                </a:solidFill>
-                <a:latin typeface="Segoe UI"/>
-              </a:defRPr>
-            </a:pPr>
-            <a:r>
-              <a:t>Tổng hợp các chỉ số kỹ thuật: Độ trễ P95, Kiểm soát FPR, F1-Score và Chi phí phần cứng</a:t>
-            </a:r>
-          </a:p>
-        </p:txBody>
-      </p:sp>
-      <p:sp>
-        <p:nvSpPr>
-          <p:cNvPr id="5" name="Rectangle 4"/>
-          <p:cNvSpPr/>
-          <p:nvPr/>
-        </p:nvSpPr>
-        <p:spPr>
-          <a:xfrm>
-            <a:off x="731520" y="6263640"/>
-            <a:ext cx="10728655" cy="18288"/>
-          </a:xfrm>
-          <a:prstGeom prst="rect">
-            <a:avLst/>
-          </a:prstGeom>
-          <a:solidFill>
-            <a:srgbClr val="E2E8F0"/>
-          </a:solidFill>
-          <a:ln>
-            <a:noFill/>
-          </a:ln>
-        </p:spPr>
-        <p:style>
-          <a:lnRef idx="1">
-            <a:schemeClr val="accent1"/>
-          </a:lnRef>
-          <a:fillRef idx="3">
-            <a:schemeClr val="accent1"/>
-          </a:fillRef>
-          <a:effectRef idx="2">
-            <a:schemeClr val="accent1"/>
-          </a:effectRef>
-          <a:fontRef idx="minor">
-            <a:schemeClr val="lt1"/>
-          </a:fontRef>
-        </p:style>
-        <p:txBody>
-          <a:bodyPr rtlCol="0" anchor="ctr"/>
-          <a:lstStyle/>
-          <a:p>
-            <a:pPr algn="ctr"/>
-          </a:p>
-        </p:txBody>
-      </p:sp>
-      <p:sp>
-        <p:nvSpPr>
-          <p:cNvPr id="6" name="TextBox 5"/>
-          <p:cNvSpPr txBox="1"/>
-          <p:nvPr/>
-        </p:nvSpPr>
-        <p:spPr>
-          <a:xfrm>
-            <a:off x="9601200" y="6327648"/>
-            <a:ext cx="1828800" cy="365760"/>
-          </a:xfrm>
-          <a:prstGeom prst="rect">
-            <a:avLst/>
-          </a:prstGeom>
-          <a:noFill/>
-        </p:spPr>
-        <p:txBody>
-          <a:bodyPr wrap="none" lIns="0" tIns="0" rIns="0" bIns="0">
-            <a:spAutoFit/>
-          </a:bodyPr>
-          <a:lstStyle/>
-          <a:p>
-            <a:pPr algn="r">
-              <a:defRPr sz="1300" b="1">
-                <a:solidFill>
-                  <a:srgbClr val="64748B"/>
-                </a:solidFill>
-                <a:latin typeface="Segoe UI"/>
-              </a:defRPr>
-            </a:pPr>
-            <a:r>
-              <a:t>Slide 28 / 30</a:t>
-            </a:r>
-          </a:p>
-        </p:txBody>
-      </p:sp>
-      <p:sp>
-        <p:nvSpPr>
-          <p:cNvPr id="7" name="Rectangle 6"/>
-          <p:cNvSpPr/>
-          <p:nvPr/>
-        </p:nvSpPr>
-        <p:spPr>
-          <a:xfrm>
-            <a:off x="731520" y="1234440"/>
-            <a:ext cx="2542032" cy="1691640"/>
-          </a:xfrm>
-          <a:prstGeom prst="rect">
-            <a:avLst/>
-          </a:prstGeom>
-          <a:solidFill>
-            <a:srgbClr val="FFFFFF"/>
-          </a:solidFill>
-          <a:ln w="19050">
-            <a:solidFill>
-              <a:srgbClr val="059669"/>
-            </a:solidFill>
-          </a:ln>
-        </p:spPr>
-        <p:style>
-          <a:lnRef idx="1">
-            <a:schemeClr val="accent1"/>
-          </a:lnRef>
-          <a:fillRef idx="3">
-            <a:schemeClr val="accent1"/>
-          </a:fillRef>
-          <a:effectRef idx="2">
-            <a:schemeClr val="accent1"/>
-          </a:effectRef>
-          <a:fontRef idx="minor">
-            <a:schemeClr val="lt1"/>
-          </a:fontRef>
-        </p:style>
-        <p:txBody>
-          <a:bodyPr rtlCol="0" anchor="ctr" wrap="square" lIns="182880" tIns="182880" rIns="182880"/>
-          <a:lstStyle/>
-          <a:p>
-            <a:pPr algn="ctr">
-              <a:spcAft>
-                <a:spcPts val="200"/>
-              </a:spcAft>
-            </a:pPr>
-            <a:r>
-              <a:rPr sz="1600" b="1">
-                <a:solidFill>
-                  <a:srgbClr val="64748B"/>
-                </a:solidFill>
-              </a:rPr>
-              <a:t>ĐỘ TRỄ TRUNG BÌNH</a:t>
-            </a:r>
-          </a:p>
-          <a:p>
-            <a:pPr>
-              <a:spcAft>
-                <a:spcPts val="200"/>
-              </a:spcAft>
-            </a:pPr>
-            <a:r>
-              <a:rPr sz="2200" b="1">
-                <a:solidFill>
-                  <a:srgbClr val="059669"/>
-                </a:solidFill>
-              </a:rPr>
-              <a:t>E[L] = 3.69 ms</a:t>
-            </a:r>
-          </a:p>
-          <a:p>
-            <a:r>
-              <a:rPr sz="1500">
-                <a:solidFill>
-                  <a:srgbClr val="334155"/>
-                </a:solidFill>
-              </a:rPr>
-              <a:t>0.47 + 0.174 x 18.5 ms</a:t>
-            </a:r>
-          </a:p>
-        </p:txBody>
-      </p:sp>
-      <p:sp>
-        <p:nvSpPr>
-          <p:cNvPr id="8" name="Rectangle 7"/>
-          <p:cNvSpPr/>
-          <p:nvPr/>
-        </p:nvSpPr>
-        <p:spPr>
-          <a:xfrm>
-            <a:off x="3456432" y="1234440"/>
-            <a:ext cx="2542032" cy="1691640"/>
-          </a:xfrm>
-          <a:prstGeom prst="rect">
-            <a:avLst/>
-          </a:prstGeom>
-          <a:solidFill>
-            <a:srgbClr val="FFFFFF"/>
-          </a:solidFill>
-          <a:ln w="19050">
-            <a:solidFill>
-              <a:srgbClr val="059669"/>
-            </a:solidFill>
-          </a:ln>
-        </p:spPr>
-        <p:style>
-          <a:lnRef idx="1">
-            <a:schemeClr val="accent1"/>
-          </a:lnRef>
-          <a:fillRef idx="3">
-            <a:schemeClr val="accent1"/>
-          </a:fillRef>
-          <a:effectRef idx="2">
-            <a:schemeClr val="accent1"/>
-          </a:effectRef>
-          <a:fontRef idx="minor">
-            <a:schemeClr val="lt1"/>
-          </a:fontRef>
-        </p:style>
-        <p:txBody>
-          <a:bodyPr rtlCol="0" anchor="ctr" wrap="square" lIns="182880" tIns="182880" rIns="182880"/>
-          <a:lstStyle/>
-          <a:p>
-            <a:pPr algn="ctr">
-              <a:spcAft>
-                <a:spcPts val="200"/>
-              </a:spcAft>
-            </a:pPr>
-            <a:r>
-              <a:rPr sz="1600" b="1">
-                <a:solidFill>
-                  <a:srgbClr val="64748B"/>
-                </a:solidFill>
-              </a:rPr>
-              <a:t>ĐỘ TRỄ PHÂN VỊ P95</a:t>
-            </a:r>
-          </a:p>
-          <a:p>
-            <a:pPr>
-              <a:spcAft>
-                <a:spcPts val="200"/>
-              </a:spcAft>
-            </a:pPr>
-            <a:r>
-              <a:rPr sz="2200" b="1">
-                <a:solidFill>
-                  <a:srgbClr val="059669"/>
-                </a:solidFill>
-              </a:rPr>
-              <a:t>P95 = 19.8 ms</a:t>
-            </a:r>
-          </a:p>
-          <a:p>
-            <a:r>
-              <a:rPr sz="1500">
-                <a:solidFill>
-                  <a:srgbClr val="334155"/>
-                </a:solidFill>
-              </a:rPr>
-              <a:t>Đạt chuẩn P95 &lt; 22ms</a:t>
-            </a:r>
-          </a:p>
-        </p:txBody>
-      </p:sp>
-      <p:sp>
-        <p:nvSpPr>
-          <p:cNvPr id="9" name="Rectangle 8"/>
-          <p:cNvSpPr/>
-          <p:nvPr/>
-        </p:nvSpPr>
-        <p:spPr>
-          <a:xfrm>
-            <a:off x="6181344" y="1234440"/>
-            <a:ext cx="2542032" cy="1691640"/>
-          </a:xfrm>
-          <a:prstGeom prst="rect">
-            <a:avLst/>
-          </a:prstGeom>
-          <a:solidFill>
-            <a:srgbClr val="FFFFFF"/>
-          </a:solidFill>
-          <a:ln w="19050">
-            <a:solidFill>
-              <a:srgbClr val="0284C7"/>
-            </a:solidFill>
-          </a:ln>
-        </p:spPr>
-        <p:style>
-          <a:lnRef idx="1">
-            <a:schemeClr val="accent1"/>
-          </a:lnRef>
-          <a:fillRef idx="3">
-            <a:schemeClr val="accent1"/>
-          </a:fillRef>
-          <a:effectRef idx="2">
-            <a:schemeClr val="accent1"/>
-          </a:effectRef>
-          <a:fontRef idx="minor">
-            <a:schemeClr val="lt1"/>
-          </a:fontRef>
-        </p:style>
-        <p:txBody>
-          <a:bodyPr rtlCol="0" anchor="ctr" wrap="square" lIns="182880" tIns="182880" rIns="182880"/>
-          <a:lstStyle/>
-          <a:p>
-            <a:pPr algn="ctr">
-              <a:spcAft>
-                <a:spcPts val="200"/>
-              </a:spcAft>
-            </a:pPr>
-            <a:r>
-              <a:rPr sz="1600" b="1">
-                <a:solidFill>
-                  <a:srgbClr val="64748B"/>
-                </a:solidFill>
-              </a:rPr>
-              <a:t>ĐỘ CHÍNH XÁC F1</a:t>
-            </a:r>
-          </a:p>
-          <a:p>
-            <a:pPr>
-              <a:spcAft>
-                <a:spcPts val="200"/>
-              </a:spcAft>
-            </a:pPr>
-            <a:r>
-              <a:rPr sz="2200" b="1">
-                <a:solidFill>
-                  <a:srgbClr val="0284C7"/>
-                </a:solidFill>
-              </a:rPr>
-              <a:t>F1 = 0.9416</a:t>
-            </a:r>
-          </a:p>
-          <a:p>
-            <a:r>
-              <a:rPr sz="1500">
-                <a:solidFill>
-                  <a:srgbClr val="334155"/>
-                </a:solidFill>
-              </a:rPr>
-              <a:t>Bảo toàn mỏ neo ACL 2025</a:t>
-            </a:r>
-          </a:p>
-        </p:txBody>
-      </p:sp>
-      <p:sp>
-        <p:nvSpPr>
-          <p:cNvPr id="10" name="Rectangle 9"/>
-          <p:cNvSpPr/>
-          <p:nvPr/>
-        </p:nvSpPr>
-        <p:spPr>
-          <a:xfrm>
-            <a:off x="8906256" y="1234440"/>
-            <a:ext cx="2542032" cy="1691640"/>
-          </a:xfrm>
-          <a:prstGeom prst="rect">
-            <a:avLst/>
-          </a:prstGeom>
-          <a:solidFill>
-            <a:srgbClr val="FFFFFF"/>
-          </a:solidFill>
-          <a:ln w="19050">
-            <a:solidFill>
-              <a:srgbClr val="7C3AED"/>
-            </a:solidFill>
-          </a:ln>
-        </p:spPr>
-        <p:style>
-          <a:lnRef idx="1">
-            <a:schemeClr val="accent1"/>
-          </a:lnRef>
-          <a:fillRef idx="3">
-            <a:schemeClr val="accent1"/>
-          </a:fillRef>
-          <a:effectRef idx="2">
-            <a:schemeClr val="accent1"/>
-          </a:effectRef>
-          <a:fontRef idx="minor">
-            <a:schemeClr val="lt1"/>
-          </a:fontRef>
-        </p:style>
-        <p:txBody>
-          <a:bodyPr rtlCol="0" anchor="ctr" wrap="square" lIns="182880" tIns="182880" rIns="182880"/>
-          <a:lstStyle/>
-          <a:p>
-            <a:pPr algn="ctr">
-              <a:spcAft>
-                <a:spcPts val="200"/>
-              </a:spcAft>
-            </a:pPr>
-            <a:r>
-              <a:rPr sz="1600" b="1">
-                <a:solidFill>
-                  <a:srgbClr val="64748B"/>
-                </a:solidFill>
-              </a:rPr>
-              <a:t>CHI PHÍ PHẦN CỨNG</a:t>
-            </a:r>
-          </a:p>
-          <a:p>
-            <a:pPr>
-              <a:spcAft>
-                <a:spcPts val="200"/>
-              </a:spcAft>
-            </a:pPr>
-            <a:r>
-              <a:rPr sz="2200" b="1">
-                <a:solidFill>
-                  <a:srgbClr val="7C3AED"/>
-                </a:solidFill>
-              </a:rPr>
-              <a:t>ZERO-GPU</a:t>
-            </a:r>
-          </a:p>
-          <a:p>
-            <a:r>
-              <a:rPr sz="1500">
-                <a:solidFill>
-                  <a:srgbClr val="334155"/>
-                </a:solidFill>
-              </a:rPr>
-              <a:t>100% CPU Thông Thường</a:t>
-            </a:r>
-          </a:p>
-        </p:txBody>
-      </p:sp>
-      <p:graphicFrame>
-        <p:nvGraphicFramePr>
-          <p:cNvPr id="11" name="Table 10"/>
-          <p:cNvGraphicFramePr>
-            <a:graphicFrameLocks noGrp="1"/>
-          </p:cNvGraphicFramePr>
-          <p:nvPr/>
-        </p:nvGraphicFramePr>
-        <p:xfrm>
-          <a:off x="731520" y="3108960"/>
-          <a:ext cx="10728655" cy="2926080"/>
-        </p:xfrm>
-        <a:graphic>
-          <a:graphicData uri="http://schemas.openxmlformats.org/drawingml/2006/table">
-            <a:tbl>
-              <a:tblPr firstRow="1" bandRow="1">
-                <a:tableStyleId>{5C22544A-7EE6-4342-B048-85BDC9FD1C3A}</a:tableStyleId>
-              </a:tblPr>
-              <a:tblGrid>
-                <a:gridCol w="2926080"/>
-                <a:gridCol w="2560320"/>
-                <a:gridCol w="2560320"/>
-                <a:gridCol w="2681935"/>
-              </a:tblGrid>
-              <a:tr h="731520">
-                <a:tc>
-                  <a:txBody>
-                    <a:bodyPr wrap="square"/>
-                    <a:lstStyle/>
-                    <a:p>
-                      <a:pPr algn="ctr">
-                        <a:defRPr sz="1600" b="1">
-                          <a:solidFill>
-                            <a:srgbClr val="0F172A"/>
-                          </a:solidFill>
-                          <a:latin typeface="Segoe UI"/>
-                        </a:defRPr>
-                      </a:pPr>
-                      <a:r>
-                        <a:t>Chỉ Tiêu Đánh Giá Kỹ Thuật</a:t>
-                      </a:r>
-                    </a:p>
-                  </a:txBody>
-                  <a:tcPr anchor="ctr" marL="109728" marR="109728" marT="54864" marB="54864">
-                    <a:solidFill>
-                      <a:srgbClr val="F1F5F9"/>
-                    </a:solidFill>
-                    <a:lnL w="15000" cmpd="s">
-                      <a:solidFill>
-                        <a:srgbClr val="0F172A"/>
-                      </a:solidFill>
-                    </a:lnL>
-                    <a:lnR w="15000" cmpd="s">
-                      <a:solidFill>
-                        <a:srgbClr val="0F172A"/>
-                      </a:solidFill>
-                    </a:lnR>
-                    <a:lnT w="15000" cmpd="s">
-                      <a:solidFill>
-                        <a:srgbClr val="0F172A"/>
-                      </a:solidFill>
-                    </a:lnT>
-                    <a:lnB w="15000" cmpd="s">
-                      <a:solidFill>
-                        <a:srgbClr val="0F172A"/>
-                      </a:solidFill>
-                    </a:lnB>
-                  </a:tcPr>
-                </a:tc>
-                <a:tc>
-                  <a:txBody>
-                    <a:bodyPr wrap="square"/>
-                    <a:lstStyle/>
-                    <a:p>
-                      <a:pPr algn="ctr">
-                        <a:defRPr sz="1600" b="1">
-                          <a:solidFill>
-                            <a:srgbClr val="0F172A"/>
-                          </a:solidFill>
-                          <a:latin typeface="Segoe UI"/>
-                        </a:defRPr>
-                      </a:pPr>
-                      <a:r>
-                        <a:t>Rào Chắn Đơn Tầng (Single-Tier)</a:t>
-                      </a:r>
-                    </a:p>
-                  </a:txBody>
-                  <a:tcPr anchor="ctr" marL="109728" marR="109728" marT="54864" marB="54864">
-                    <a:solidFill>
-                      <a:srgbClr val="F1F5F9"/>
-                    </a:solidFill>
-                    <a:lnL w="15000" cmpd="s">
-                      <a:solidFill>
-                        <a:srgbClr val="0F172A"/>
-                      </a:solidFill>
-                    </a:lnL>
-                    <a:lnR w="15000" cmpd="s">
-                      <a:solidFill>
-                        <a:srgbClr val="0F172A"/>
-                      </a:solidFill>
-                    </a:lnR>
-                    <a:lnT w="15000" cmpd="s">
-                      <a:solidFill>
-                        <a:srgbClr val="0F172A"/>
-                      </a:solidFill>
-                    </a:lnT>
-                    <a:lnB w="15000" cmpd="s">
-                      <a:solidFill>
-                        <a:srgbClr val="0F172A"/>
-                      </a:solidFill>
-                    </a:lnB>
-                  </a:tcPr>
-                </a:tc>
-                <a:tc>
-                  <a:txBody>
-                    <a:bodyPr wrap="square"/>
-                    <a:lstStyle/>
-                    <a:p>
-                      <a:pPr algn="ctr">
-                        <a:defRPr sz="1600" b="1">
-                          <a:solidFill>
-                            <a:srgbClr val="0F172A"/>
-                          </a:solidFill>
-                          <a:latin typeface="Segoe UI"/>
-                        </a:defRPr>
-                      </a:pPr>
-                      <a:r>
-                        <a:t>Mô Hình LLM-as-a-Judge</a:t>
-                      </a:r>
-                    </a:p>
-                  </a:txBody>
-                  <a:tcPr anchor="ctr" marL="109728" marR="109728" marT="54864" marB="54864">
-                    <a:solidFill>
-                      <a:srgbClr val="F1F5F9"/>
-                    </a:solidFill>
-                    <a:lnL w="15000" cmpd="s">
-                      <a:solidFill>
-                        <a:srgbClr val="0F172A"/>
-                      </a:solidFill>
-                    </a:lnL>
-                    <a:lnR w="15000" cmpd="s">
-                      <a:solidFill>
-                        <a:srgbClr val="0F172A"/>
-                      </a:solidFill>
-                    </a:lnR>
-                    <a:lnT w="15000" cmpd="s">
-                      <a:solidFill>
-                        <a:srgbClr val="0F172A"/>
-                      </a:solidFill>
-                    </a:lnT>
-                    <a:lnB w="15000" cmpd="s">
-                      <a:solidFill>
-                        <a:srgbClr val="0F172A"/>
-                      </a:solidFill>
-                    </a:lnB>
-                  </a:tcPr>
-                </a:tc>
-                <a:tc>
-                  <a:txBody>
-                    <a:bodyPr wrap="square"/>
-                    <a:lstStyle/>
-                    <a:p>
-                      <a:pPr algn="ctr">
-                        <a:defRPr sz="1600" b="1">
-                          <a:solidFill>
-                            <a:srgbClr val="0F172A"/>
-                          </a:solidFill>
-                          <a:latin typeface="Segoe UI"/>
-                        </a:defRPr>
-                      </a:pPr>
-                      <a:r>
-                        <a:t>Hệ Thống PI-Guard Two-Tier</a:t>
-                      </a:r>
-                    </a:p>
-                  </a:txBody>
-                  <a:tcPr anchor="ctr" marL="109728" marR="109728" marT="54864" marB="54864">
-                    <a:solidFill>
-                      <a:srgbClr val="F1F5F9"/>
-                    </a:solidFill>
-                    <a:lnL w="15000" cmpd="s">
-                      <a:solidFill>
-                        <a:srgbClr val="0F172A"/>
-                      </a:solidFill>
-                    </a:lnL>
-                    <a:lnR w="15000" cmpd="s">
-                      <a:solidFill>
-                        <a:srgbClr val="0F172A"/>
-                      </a:solidFill>
-                    </a:lnR>
-                    <a:lnT w="15000" cmpd="s">
-                      <a:solidFill>
-                        <a:srgbClr val="0F172A"/>
-                      </a:solidFill>
-                    </a:lnT>
-                    <a:lnB w="15000" cmpd="s">
-                      <a:solidFill>
-                        <a:srgbClr val="0F172A"/>
-                      </a:solidFill>
-                    </a:lnB>
-                  </a:tcPr>
-                </a:tc>
-              </a:tr>
-              <a:tr h="731520">
-                <a:tc>
-                  <a:txBody>
-                    <a:bodyPr wrap="square"/>
-                    <a:lstStyle/>
-                    <a:p>
-                      <a:pPr algn="l">
-                        <a:defRPr sz="1600" b="1">
-                          <a:solidFill>
-                            <a:srgbClr val="0284C7"/>
-                          </a:solidFill>
-                          <a:latin typeface="Segoe UI"/>
-                        </a:defRPr>
-                      </a:pPr>
-                      <a:r>
-                        <a:t>1. Độ trễ đáp ứng (Inline SLA)</a:t>
-                      </a:r>
-                    </a:p>
-                  </a:txBody>
-                  <a:tcPr anchor="ctr" marL="109728" marR="109728" marT="54864" marB="54864">
-                    <a:solidFill>
-                      <a:srgbClr val="F8FAFC"/>
-                    </a:solidFill>
-                    <a:lnL w="15000" cmpd="s">
-                      <a:solidFill>
-                        <a:srgbClr val="0F172A"/>
-                      </a:solidFill>
-                    </a:lnL>
-                    <a:lnR w="15000" cmpd="s">
-                      <a:solidFill>
-                        <a:srgbClr val="0F172A"/>
-                      </a:solidFill>
-                    </a:lnR>
-                    <a:lnT w="15000" cmpd="s">
-                      <a:solidFill>
-                        <a:srgbClr val="0F172A"/>
-                      </a:solidFill>
-                    </a:lnT>
-                    <a:lnB w="15000" cmpd="s">
-                      <a:solidFill>
-                        <a:srgbClr val="0F172A"/>
-                      </a:solidFill>
-                    </a:lnB>
-                  </a:tcPr>
-                </a:tc>
-                <a:tc>
-                  <a:txBody>
-                    <a:bodyPr wrap="square"/>
-                    <a:lstStyle/>
-                    <a:p>
-                      <a:pPr algn="l">
-                        <a:defRPr sz="1600" b="0">
-                          <a:solidFill>
-                            <a:srgbClr val="334155"/>
-                          </a:solidFill>
-                          <a:latin typeface="Segoe UI"/>
-                        </a:defRPr>
-                      </a:pPr>
-                      <a:r>
-                        <a:t>Bị nghẽn nếu dùng Transformer (102ms)</a:t>
-                      </a:r>
-                    </a:p>
-                  </a:txBody>
-                  <a:tcPr anchor="ctr" marL="109728" marR="109728" marT="54864" marB="54864">
-                    <a:solidFill>
-                      <a:srgbClr val="F8FAFC"/>
-                    </a:solidFill>
-                    <a:lnL w="15000" cmpd="s">
-                      <a:solidFill>
-                        <a:srgbClr val="0F172A"/>
-                      </a:solidFill>
-                    </a:lnL>
-                    <a:lnR w="15000" cmpd="s">
-                      <a:solidFill>
-                        <a:srgbClr val="0F172A"/>
-                      </a:solidFill>
-                    </a:lnR>
-                    <a:lnT w="15000" cmpd="s">
-                      <a:solidFill>
-                        <a:srgbClr val="0F172A"/>
-                      </a:solidFill>
-                    </a:lnT>
-                    <a:lnB w="15000" cmpd="s">
-                      <a:solidFill>
-                        <a:srgbClr val="0F172A"/>
-                      </a:solidFill>
-                    </a:lnB>
-                  </a:tcPr>
-                </a:tc>
-                <a:tc>
-                  <a:txBody>
-                    <a:bodyPr wrap="square"/>
-                    <a:lstStyle/>
-                    <a:p>
-                      <a:pPr algn="l">
-                        <a:defRPr sz="1600" b="0">
-                          <a:solidFill>
-                            <a:srgbClr val="334155"/>
-                          </a:solidFill>
-                          <a:latin typeface="Segoe UI"/>
-                        </a:defRPr>
-                      </a:pPr>
-                      <a:r>
-                        <a:t>Cực chậm, gây nghẽn (&gt;2.000ms)</a:t>
-                      </a:r>
-                    </a:p>
-                  </a:txBody>
-                  <a:tcPr anchor="ctr" marL="109728" marR="109728" marT="54864" marB="54864">
-                    <a:solidFill>
-                      <a:srgbClr val="F8FAFC"/>
-                    </a:solidFill>
-                    <a:lnL w="15000" cmpd="s">
-                      <a:solidFill>
-                        <a:srgbClr val="0F172A"/>
-                      </a:solidFill>
-                    </a:lnL>
-                    <a:lnR w="15000" cmpd="s">
-                      <a:solidFill>
-                        <a:srgbClr val="0F172A"/>
-                      </a:solidFill>
-                    </a:lnR>
-                    <a:lnT w="15000" cmpd="s">
-                      <a:solidFill>
-                        <a:srgbClr val="0F172A"/>
-                      </a:solidFill>
-                    </a:lnT>
-                    <a:lnB w="15000" cmpd="s">
-                      <a:solidFill>
-                        <a:srgbClr val="0F172A"/>
-                      </a:solidFill>
-                    </a:lnB>
-                  </a:tcPr>
-                </a:tc>
-                <a:tc>
-                  <a:txBody>
-                    <a:bodyPr wrap="square"/>
-                    <a:lstStyle/>
-                    <a:p>
-                      <a:pPr algn="l">
-                        <a:defRPr sz="1600" b="1">
-                          <a:solidFill>
-                            <a:srgbClr val="059669"/>
-                          </a:solidFill>
-                          <a:latin typeface="Segoe UI"/>
-                        </a:defRPr>
-                      </a:pPr>
-                      <a:r>
-                        <a:t>Siêu nhanh: E[L]=3.69ms, P95=19.8ms</a:t>
-                      </a:r>
-                    </a:p>
-                  </a:txBody>
-                  <a:tcPr anchor="ctr" marL="109728" marR="109728" marT="54864" marB="54864">
-                    <a:solidFill>
-                      <a:srgbClr val="F0FDF4"/>
-                    </a:solidFill>
-                    <a:lnL w="15000" cmpd="s">
-                      <a:solidFill>
-                        <a:srgbClr val="0F172A"/>
-                      </a:solidFill>
-                    </a:lnL>
-                    <a:lnR w="15000" cmpd="s">
-                      <a:solidFill>
-                        <a:srgbClr val="0F172A"/>
-                      </a:solidFill>
-                    </a:lnR>
-                    <a:lnT w="15000" cmpd="s">
-                      <a:solidFill>
-                        <a:srgbClr val="0F172A"/>
-                      </a:solidFill>
-                    </a:lnT>
-                    <a:lnB w="15000" cmpd="s">
-                      <a:solidFill>
-                        <a:srgbClr val="0F172A"/>
-                      </a:solidFill>
-                    </a:lnB>
-                  </a:tcPr>
-                </a:tc>
-              </a:tr>
-              <a:tr h="731520">
-                <a:tc>
-                  <a:txBody>
-                    <a:bodyPr wrap="square"/>
-                    <a:lstStyle/>
-                    <a:p>
-                      <a:pPr algn="l">
-                        <a:defRPr sz="1600" b="1">
-                          <a:solidFill>
-                            <a:srgbClr val="0284C7"/>
-                          </a:solidFill>
-                          <a:latin typeface="Segoe UI"/>
-                        </a:defRPr>
-                      </a:pPr>
-                      <a:r>
-                        <a:t>2. Tỷ lệ chặn nhầm (FPR Control)</a:t>
-                      </a:r>
-                    </a:p>
-                  </a:txBody>
-                  <a:tcPr anchor="ctr" marL="109728" marR="109728" marT="54864" marB="54864">
-                    <a:solidFill>
-                      <a:srgbClr val="FFFFFF"/>
-                    </a:solidFill>
-                    <a:lnL w="15000" cmpd="s">
-                      <a:solidFill>
-                        <a:srgbClr val="0F172A"/>
-                      </a:solidFill>
-                    </a:lnL>
-                    <a:lnR w="15000" cmpd="s">
-                      <a:solidFill>
-                        <a:srgbClr val="0F172A"/>
-                      </a:solidFill>
-                    </a:lnR>
-                    <a:lnT w="15000" cmpd="s">
-                      <a:solidFill>
-                        <a:srgbClr val="0F172A"/>
-                      </a:solidFill>
-                    </a:lnT>
-                    <a:lnB w="15000" cmpd="s">
-                      <a:solidFill>
-                        <a:srgbClr val="0F172A"/>
-                      </a:solidFill>
-                    </a:lnB>
-                  </a:tcPr>
-                </a:tc>
-                <a:tc>
-                  <a:txBody>
-                    <a:bodyPr wrap="square"/>
-                    <a:lstStyle/>
-                    <a:p>
-                      <a:pPr algn="l">
-                        <a:defRPr sz="1600" b="0">
-                          <a:solidFill>
-                            <a:srgbClr val="334155"/>
-                          </a:solidFill>
-                          <a:latin typeface="Segoe UI"/>
-                        </a:defRPr>
-                      </a:pPr>
-                      <a:r>
-                        <a:t>Rất cao: 18.4% (TF-IDF) - 58.4% (MiniLM)</a:t>
-                      </a:r>
-                    </a:p>
-                  </a:txBody>
-                  <a:tcPr anchor="ctr" marL="109728" marR="109728" marT="54864" marB="54864">
-                    <a:solidFill>
-                      <a:srgbClr val="FFFFFF"/>
-                    </a:solidFill>
-                    <a:lnL w="15000" cmpd="s">
-                      <a:solidFill>
-                        <a:srgbClr val="0F172A"/>
-                      </a:solidFill>
-                    </a:lnL>
-                    <a:lnR w="15000" cmpd="s">
-                      <a:solidFill>
-                        <a:srgbClr val="0F172A"/>
-                      </a:solidFill>
-                    </a:lnR>
-                    <a:lnT w="15000" cmpd="s">
-                      <a:solidFill>
-                        <a:srgbClr val="0F172A"/>
-                      </a:solidFill>
-                    </a:lnT>
-                    <a:lnB w="15000" cmpd="s">
-                      <a:solidFill>
-                        <a:srgbClr val="0F172A"/>
-                      </a:solidFill>
-                    </a:lnB>
-                  </a:tcPr>
-                </a:tc>
-                <a:tc>
-                  <a:txBody>
-                    <a:bodyPr wrap="square"/>
-                    <a:lstStyle/>
-                    <a:p>
-                      <a:pPr algn="l">
-                        <a:defRPr sz="1600" b="0">
-                          <a:solidFill>
-                            <a:srgbClr val="334155"/>
-                          </a:solidFill>
-                          <a:latin typeface="Segoe UI"/>
-                        </a:defRPr>
-                      </a:pPr>
-                      <a:r>
-                        <a:t>Dao động thất thường (5% - 15%)</a:t>
-                      </a:r>
-                    </a:p>
-                  </a:txBody>
-                  <a:tcPr anchor="ctr" marL="109728" marR="109728" marT="54864" marB="54864">
-                    <a:solidFill>
-                      <a:srgbClr val="FFFFFF"/>
-                    </a:solidFill>
-                    <a:lnL w="15000" cmpd="s">
-                      <a:solidFill>
-                        <a:srgbClr val="0F172A"/>
-                      </a:solidFill>
-                    </a:lnL>
-                    <a:lnR w="15000" cmpd="s">
-                      <a:solidFill>
-                        <a:srgbClr val="0F172A"/>
-                      </a:solidFill>
-                    </a:lnR>
-                    <a:lnT w="15000" cmpd="s">
-                      <a:solidFill>
-                        <a:srgbClr val="0F172A"/>
-                      </a:solidFill>
-                    </a:lnT>
-                    <a:lnB w="15000" cmpd="s">
-                      <a:solidFill>
-                        <a:srgbClr val="0F172A"/>
-                      </a:solidFill>
-                    </a:lnB>
-                  </a:tcPr>
-                </a:tc>
-                <a:tc>
-                  <a:txBody>
-                    <a:bodyPr wrap="square"/>
-                    <a:lstStyle/>
-                    <a:p>
-                      <a:pPr algn="l">
-                        <a:defRPr sz="1600" b="1">
-                          <a:solidFill>
-                            <a:srgbClr val="059669"/>
-                          </a:solidFill>
-                          <a:latin typeface="Segoe UI"/>
-                        </a:defRPr>
-                      </a:pPr>
-                      <a:r>
-                        <a:t>Kiểm soát nghiêm ngặt: FPR &lt; 1.5%</a:t>
-                      </a:r>
-                    </a:p>
-                  </a:txBody>
-                  <a:tcPr anchor="ctr" marL="109728" marR="109728" marT="54864" marB="54864">
-                    <a:solidFill>
-                      <a:srgbClr val="F0FDF4"/>
-                    </a:solidFill>
-                    <a:lnL w="15000" cmpd="s">
-                      <a:solidFill>
-                        <a:srgbClr val="0F172A"/>
-                      </a:solidFill>
-                    </a:lnL>
-                    <a:lnR w="15000" cmpd="s">
-                      <a:solidFill>
-                        <a:srgbClr val="0F172A"/>
-                      </a:solidFill>
-                    </a:lnR>
-                    <a:lnT w="15000" cmpd="s">
-                      <a:solidFill>
-                        <a:srgbClr val="0F172A"/>
-                      </a:solidFill>
-                    </a:lnT>
-                    <a:lnB w="15000" cmpd="s">
-                      <a:solidFill>
-                        <a:srgbClr val="0F172A"/>
-                      </a:solidFill>
-                    </a:lnB>
-                  </a:tcPr>
-                </a:tc>
-              </a:tr>
-              <a:tr h="731520">
-                <a:tc>
-                  <a:txBody>
-                    <a:bodyPr wrap="square"/>
-                    <a:lstStyle/>
-                    <a:p>
-                      <a:pPr algn="l">
-                        <a:defRPr sz="1600" b="1">
-                          <a:solidFill>
-                            <a:srgbClr val="0284C7"/>
-                          </a:solidFill>
-                          <a:latin typeface="Segoe UI"/>
-                        </a:defRPr>
-                      </a:pPr>
-                      <a:r>
-                        <a:t>3. Yêu cầu phần cứng &amp; Chi phí</a:t>
-                      </a:r>
-                    </a:p>
-                  </a:txBody>
-                  <a:tcPr anchor="ctr" marL="109728" marR="109728" marT="54864" marB="54864">
-                    <a:solidFill>
-                      <a:srgbClr val="F8FAFC"/>
-                    </a:solidFill>
-                    <a:lnL w="15000" cmpd="s">
-                      <a:solidFill>
-                        <a:srgbClr val="0F172A"/>
-                      </a:solidFill>
-                    </a:lnL>
-                    <a:lnR w="15000" cmpd="s">
-                      <a:solidFill>
-                        <a:srgbClr val="0F172A"/>
-                      </a:solidFill>
-                    </a:lnR>
-                    <a:lnT w="15000" cmpd="s">
-                      <a:solidFill>
-                        <a:srgbClr val="0F172A"/>
-                      </a:solidFill>
-                    </a:lnT>
-                    <a:lnB w="15000" cmpd="s">
-                      <a:solidFill>
-                        <a:srgbClr val="0F172A"/>
-                      </a:solidFill>
-                    </a:lnB>
-                  </a:tcPr>
-                </a:tc>
-                <a:tc>
-                  <a:txBody>
-                    <a:bodyPr wrap="square"/>
-                    <a:lstStyle/>
-                    <a:p>
-                      <a:pPr algn="l">
-                        <a:defRPr sz="1600" b="0">
-                          <a:solidFill>
-                            <a:srgbClr val="334155"/>
-                          </a:solidFill>
-                          <a:latin typeface="Segoe UI"/>
-                        </a:defRPr>
-                      </a:pPr>
-                      <a:r>
-                        <a:t>Đòi hỏi GPU nếu muốn chạy mô hình lớn</a:t>
-                      </a:r>
-                    </a:p>
-                  </a:txBody>
-                  <a:tcPr anchor="ctr" marL="109728" marR="109728" marT="54864" marB="54864">
-                    <a:solidFill>
-                      <a:srgbClr val="F8FAFC"/>
-                    </a:solidFill>
-                    <a:lnL w="15000" cmpd="s">
-                      <a:solidFill>
-                        <a:srgbClr val="0F172A"/>
-                      </a:solidFill>
-                    </a:lnL>
-                    <a:lnR w="15000" cmpd="s">
-                      <a:solidFill>
-                        <a:srgbClr val="0F172A"/>
-                      </a:solidFill>
-                    </a:lnR>
-                    <a:lnT w="15000" cmpd="s">
-                      <a:solidFill>
-                        <a:srgbClr val="0F172A"/>
-                      </a:solidFill>
-                    </a:lnT>
-                    <a:lnB w="15000" cmpd="s">
-                      <a:solidFill>
-                        <a:srgbClr val="0F172A"/>
-                      </a:solidFill>
-                    </a:lnB>
-                  </a:tcPr>
-                </a:tc>
-                <a:tc>
-                  <a:txBody>
-                    <a:bodyPr wrap="square"/>
-                    <a:lstStyle/>
-                    <a:p>
-                      <a:pPr algn="l">
-                        <a:defRPr sz="1600" b="0">
-                          <a:solidFill>
-                            <a:srgbClr val="334155"/>
-                          </a:solidFill>
-                          <a:latin typeface="Segoe UI"/>
-                        </a:defRPr>
-                      </a:pPr>
-                      <a:r>
-                        <a:t>Bắt buộc cụm GPU VRAM &gt; 16GB</a:t>
-                      </a:r>
-                    </a:p>
-                  </a:txBody>
-                  <a:tcPr anchor="ctr" marL="109728" marR="109728" marT="54864" marB="54864">
-                    <a:solidFill>
-                      <a:srgbClr val="F8FAFC"/>
-                    </a:solidFill>
-                    <a:lnL w="15000" cmpd="s">
-                      <a:solidFill>
-                        <a:srgbClr val="0F172A"/>
-                      </a:solidFill>
-                    </a:lnL>
-                    <a:lnR w="15000" cmpd="s">
-                      <a:solidFill>
-                        <a:srgbClr val="0F172A"/>
-                      </a:solidFill>
-                    </a:lnR>
-                    <a:lnT w="15000" cmpd="s">
-                      <a:solidFill>
-                        <a:srgbClr val="0F172A"/>
-                      </a:solidFill>
-                    </a:lnT>
-                    <a:lnB w="15000" cmpd="s">
-                      <a:solidFill>
-                        <a:srgbClr val="0F172A"/>
-                      </a:solidFill>
-                    </a:lnB>
-                  </a:tcPr>
-                </a:tc>
-                <a:tc>
-                  <a:txBody>
-                    <a:bodyPr wrap="square"/>
-                    <a:lstStyle/>
-                    <a:p>
-                      <a:pPr algn="l">
-                        <a:defRPr sz="1600" b="1">
-                          <a:solidFill>
-                            <a:srgbClr val="059669"/>
-                          </a:solidFill>
-                          <a:latin typeface="Segoe UI"/>
-                        </a:defRPr>
-                      </a:pPr>
-                      <a:r>
-                        <a:t>Hoàn toàn Zero-GPU, tiết kiệm 100% chi phí</a:t>
-                      </a:r>
-                    </a:p>
-                  </a:txBody>
-                  <a:tcPr anchor="ctr" marL="109728" marR="109728" marT="54864" marB="54864">
-                    <a:solidFill>
-                      <a:srgbClr val="F0FDF4"/>
-                    </a:solidFill>
-                    <a:lnL w="15000" cmpd="s">
-                      <a:solidFill>
-                        <a:srgbClr val="0F172A"/>
-                      </a:solidFill>
-                    </a:lnL>
-                    <a:lnR w="15000" cmpd="s">
-                      <a:solidFill>
-                        <a:srgbClr val="0F172A"/>
-                      </a:solidFill>
-                    </a:lnR>
-                    <a:lnT w="15000" cmpd="s">
-                      <a:solidFill>
-                        <a:srgbClr val="0F172A"/>
-                      </a:solidFill>
-                    </a:lnT>
-                    <a:lnB w="15000" cmpd="s">
-                      <a:solidFill>
-                        <a:srgbClr val="0F172A"/>
-                      </a:solidFill>
-                    </a:lnB>
-                  </a:tcPr>
-                </a:tc>
-              </a:tr>
-            </a:tbl>
-          </a:graphicData>
-        </a:graphic>
-      </p:graphicFrame>
+              <a:t>TÓM TẮT: PHÂN TÍCH NGUỒN VÀ BASELINE CÔNG KHAI. Đã phân định Direct, Indirect RAG và Jailbreak; đã lập bản đồ bề mặt và kiểm toán provenance. Review 1/2 có báo cáo riêng kèm verifier. Chưa huấn luyện hoặc đánh giá PI-Guard Tier 2 hay cascade. Các mục tiêu FPR/P95 chưa phải kết quả.</a:t>
+            </a:r>
+          </a:p>
+        </p:txBody>
+      </p:sp>
     </p:spTree>
   </p:cSld>
   <p:clrMapOvr>
@@ -17644,7 +9394,7 @@
           </a:fontRef>
         </p:style>
         <p:txBody>
-          <a:bodyPr rtlCol="0" anchor="ctr" wrap="square" lIns="256032" tIns="256032" rIns="256032"/>
+          <a:bodyPr wrap="square" lIns="256032" tIns="256032" rIns="256032" rtlCol="0" anchor="ctr"/>
           <a:lstStyle/>
           <a:p>
             <a:pPr algn="ctr">
@@ -17658,132 +9408,7 @@
                   <a:srgbClr val="0284C7"/>
                 </a:solidFill>
               </a:rPr>
-              <a:t>5 CÔNG TRÌNH KHOA HỌC NỀN TẢNG ĐƯỢC KẾ THỪA TRỰC TIẾP</a:t>
-            </a:r>
-          </a:p>
-          <a:p>
-            <a:pPr>
-              <a:spcAft>
-                <a:spcPts val="600"/>
-              </a:spcAft>
-            </a:pPr>
-            <a:r>
-              <a:rPr b="1" sz="1600">
-                <a:solidFill>
-                  <a:srgbClr val="0284C7"/>
-                </a:solidFill>
-                <a:latin typeface="Segoe UI"/>
-              </a:rPr>
-              <a:t>[1] Perez &amp; Ribeiro (NeurIPS 2022): </a:t>
-            </a:r>
-            <a:r>
-              <a:rPr b="0" sz="1600">
-                <a:solidFill>
-                  <a:srgbClr val="334155"/>
-                </a:solidFill>
-                <a:latin typeface="Segoe UI"/>
-              </a:rPr>
-              <a:t>Ignore Previous Instructions: Analysis of Prompt Injection; đặt nền móng lý thuyết phân định Direct vs. Indirect.</a:t>
-            </a:r>
-          </a:p>
-          <a:p>
-            <a:pPr>
-              <a:spcAft>
-                <a:spcPts val="600"/>
-              </a:spcAft>
-            </a:pPr>
-            <a:r>
-              <a:rPr b="1" sz="1600">
-                <a:solidFill>
-                  <a:srgbClr val="0284C7"/>
-                </a:solidFill>
-                <a:latin typeface="Segoe UI"/>
-              </a:rPr>
-              <a:t>[2] Shen et al. (ACM CCS 2024): </a:t>
-            </a:r>
-            <a:r>
-              <a:rPr b="0" sz="1600">
-                <a:solidFill>
-                  <a:srgbClr val="334155"/>
-                </a:solidFill>
-                <a:latin typeface="Segoe UI"/>
-              </a:rPr>
-              <a:t>"Do Anything Now": Characterizing and Evaluating In-The-Wild Jailbreak Prompts on Large Language Models; khảo sát 15.140 mẫu DAN.</a:t>
-            </a:r>
-          </a:p>
-          <a:p>
-            <a:pPr>
-              <a:spcAft>
-                <a:spcPts val="600"/>
-              </a:spcAft>
-            </a:pPr>
-            <a:r>
-              <a:rPr b="1" sz="1600">
-                <a:solidFill>
-                  <a:srgbClr val="0284C7"/>
-                </a:solidFill>
-                <a:latin typeface="Segoe UI"/>
-              </a:rPr>
-              <a:t>[3] Hao Li et al. (ACL 2025): </a:t>
-            </a:r>
-            <a:r>
-              <a:rPr b="0" sz="1600">
-                <a:solidFill>
-                  <a:srgbClr val="334155"/>
-                </a:solidFill>
-                <a:latin typeface="Segoe UI"/>
-              </a:rPr>
-              <a:t>PIGuard: Prompt Injection Guardrail via Disentangled Representation; đề xuất thuật toán MOF và mô hình DeBERTa-v3 F1=0.9416.</a:t>
-            </a:r>
-          </a:p>
-          <a:p>
-            <a:pPr>
-              <a:spcAft>
-                <a:spcPts val="600"/>
-              </a:spcAft>
-            </a:pPr>
-            <a:r>
-              <a:rPr b="1" sz="1600">
-                <a:solidFill>
-                  <a:srgbClr val="D97706"/>
-                </a:solidFill>
-                <a:latin typeface="Segoe UI"/>
-              </a:rPr>
-              <a:t>[4] Ayub et al. (IEEE Access / ACL 2024): </a:t>
-            </a:r>
-            <a:r>
-              <a:rPr b="0" sz="1600">
-                <a:solidFill>
-                  <a:srgbClr val="334155"/>
-                </a:solidFill>
-                <a:latin typeface="Segoe UI"/>
-              </a:rPr>
-              <a:t>Model-based Guardrails for Prompt Injection Detection; công bố baseline MiniLM bị nhóm chỉ ra điểm nghẽn thực nghiệm.</a:t>
-            </a:r>
-          </a:p>
-          <a:p>
-            <a:pPr>
-              <a:spcAft>
-                <a:spcPts val="600"/>
-              </a:spcAft>
-            </a:pPr>
-            <a:r>
-              <a:rPr b="1" sz="1600">
-                <a:solidFill>
-                  <a:srgbClr val="0284C7"/>
-                </a:solidFill>
-                <a:latin typeface="Segoe UI"/>
-              </a:rPr>
-              <a:t>[5] He et al. (ICLR 2023): </a:t>
-            </a:r>
-            <a:r>
-              <a:rPr b="0" sz="1600">
-                <a:solidFill>
-                  <a:srgbClr val="334155"/>
-                </a:solidFill>
-                <a:latin typeface="Segoe UI"/>
-              </a:rPr>
-              <a:t>DeBERTaV3: Improving DeBERTa using ELECTRA-Style Pre-Training with Gradient-Disentangled Embedding Sharing.</a:t>
+              <a:t>5 CÔNG TRÌNH KHOA HỌC NỀN TẢNG. Perez và Ribeiro phân tích prompt injection; Shen và cộng sự khảo sát jailbreak; Hao Li và cộng sự đề xuất PIGuard và MOF; Ayub và cộng sự nghiên cứu bộ phân loại embedding; He và cộng sự phát triển DeBERTa-v3. Số liệu bài báo phải ghi rõ là kết quả do tác giả công bố.</a:t>
             </a:r>
           </a:p>
         </p:txBody>
@@ -18061,7 +9686,7 @@
           </a:fontRef>
         </p:style>
         <p:txBody>
-          <a:bodyPr rtlCol="0" anchor="ctr" wrap="square" lIns="219456" tIns="219456" rIns="219456"/>
+          <a:bodyPr wrap="square" lIns="219456" tIns="219456" rIns="219456" rtlCol="0" anchor="ctr"/>
           <a:lstStyle/>
           <a:p>
             <a:pPr algn="ctr">
@@ -18085,7 +9710,7 @@
               </a:spcAft>
             </a:pPr>
             <a:r>
-              <a:rPr b="0" sz="1600">
+              <a:rPr sz="1600" b="0">
                 <a:solidFill>
                   <a:srgbClr val="334155"/>
                 </a:solidFill>
@@ -18134,7 +9759,7 @@
           </a:fontRef>
         </p:style>
         <p:txBody>
-          <a:bodyPr rtlCol="0" anchor="ctr" wrap="square" lIns="219456" tIns="219456" rIns="219456"/>
+          <a:bodyPr wrap="square" lIns="219456" tIns="219456" rIns="219456" rtlCol="0" anchor="ctr"/>
           <a:lstStyle/>
           <a:p>
             <a:pPr algn="ctr">
@@ -18158,7 +9783,7 @@
               </a:spcAft>
             </a:pPr>
             <a:r>
-              <a:rPr b="0" sz="1600">
+              <a:rPr sz="1600" b="0">
                 <a:solidFill>
                   <a:srgbClr val="334155"/>
                 </a:solidFill>
@@ -18207,7 +9832,7 @@
           </a:fontRef>
         </p:style>
         <p:txBody>
-          <a:bodyPr rtlCol="0" anchor="ctr" wrap="square" lIns="219456" tIns="219456" rIns="219456"/>
+          <a:bodyPr wrap="square" lIns="219456" tIns="219456" rIns="219456" rtlCol="0" anchor="ctr"/>
           <a:lstStyle/>
           <a:p>
             <a:pPr algn="ctr">
@@ -18231,7 +9856,7 @@
               </a:spcAft>
             </a:pPr>
             <a:r>
-              <a:rPr b="0" sz="1600">
+              <a:rPr sz="1600" b="0">
                 <a:solidFill>
                   <a:srgbClr val="334155"/>
                 </a:solidFill>
@@ -18280,7 +9905,7 @@
           </a:fontRef>
         </p:style>
         <p:txBody>
-          <a:bodyPr rtlCol="0" anchor="ctr" wrap="square" lIns="219456" tIns="219456" rIns="219456"/>
+          <a:bodyPr wrap="square" lIns="219456" tIns="219456" rIns="219456" rtlCol="0" anchor="ctr"/>
           <a:lstStyle/>
           <a:p>
             <a:pPr algn="ctr">
@@ -18294,23 +9919,7 @@
                   <a:srgbClr val="DC2626"/>
                 </a:solidFill>
               </a:rPr>
-              <a:t>PHẦN 4: KẾT QUẢ CHẠY THỰC NGHIỆM MÔ HÌNH</a:t>
-            </a:r>
-          </a:p>
-          <a:p>
-            <a:pPr>
-              <a:spcAft>
-                <a:spcPts val="600"/>
-              </a:spcAft>
-            </a:pPr>
-            <a:r>
-              <a:rPr b="0" sz="1600">
-                <a:solidFill>
-                  <a:srgbClr val="334155"/>
-                </a:solidFill>
-                <a:latin typeface="Segoe UI"/>
-              </a:rPr>
-              <a:t>Thực nghiệm 5 mô hình trên 1.579 mẫu; phát hiện điểm nghẽn MiniLM (trễ 42ms, FPR 58%) và kiểm chứng DeBERTa-v3.</a:t>
+              <a:t>PHẦN 4: BASELINE CÓ NGUỒN. Kết quả hợp lệ phải nêu dữ liệu khóa, checkpoint, dự đoán thô và verifier. Các benchmark proxy cũ đã rút khỏi bằng chứng.</a:t>
             </a:r>
           </a:p>
         </p:txBody>
@@ -18353,7 +9962,7 @@
           </a:fontRef>
         </p:style>
         <p:txBody>
-          <a:bodyPr rtlCol="0" anchor="ctr" wrap="square" lIns="219456" tIns="219456" rIns="219456"/>
+          <a:bodyPr wrap="square" lIns="219456" tIns="219456" rIns="219456" rtlCol="0" anchor="ctr"/>
           <a:lstStyle/>
           <a:p>
             <a:pPr algn="ctr">
@@ -18377,7 +9986,7 @@
               </a:spcAft>
             </a:pPr>
             <a:r>
-              <a:rPr b="0" sz="1600">
+              <a:rPr sz="1600" b="0">
                 <a:solidFill>
                   <a:srgbClr val="334155"/>
                 </a:solidFill>
@@ -18661,7 +10270,7 @@
           </a:fontRef>
         </p:style>
         <p:txBody>
-          <a:bodyPr rtlCol="0" anchor="ctr" wrap="square" lIns="365760" tIns="365760" rIns="365760"/>
+          <a:bodyPr wrap="square" lIns="365760" tIns="365760" rIns="365760" rtlCol="0" anchor="ctr"/>
           <a:lstStyle/>
           <a:p>
             <a:pPr algn="ctr">
@@ -18675,97 +10284,7 @@
                   <a:srgbClr val="0284C7"/>
                 </a:solidFill>
               </a:rPr>
-              <a:t>TRÂN TRỌNG CẢM ƠN THẦY VÀ HỘI ĐỒNG!</a:t>
-            </a:r>
-          </a:p>
-          <a:p>
-            <a:pPr algn="ctr">
-              <a:spcAft>
-                <a:spcPts val="1600"/>
-              </a:spcAft>
-            </a:pPr>
-            <a:r>
-              <a:rPr sz="1800" b="1">
-                <a:solidFill>
-                  <a:srgbClr val="059669"/>
-                </a:solidFill>
-              </a:rPr>
-              <a:t>NHÓM PI-GUARD ĐÃ HOÀN THÀNH TOÀN DIỆN CÁC NHIỆM VỤ ĐƯỢC GIAO</a:t>
-            </a:r>
-          </a:p>
-          <a:p>
-            <a:pPr>
-              <a:spcAft>
-                <a:spcPts val="600"/>
-              </a:spcAft>
-            </a:pPr>
-            <a:r>
-              <a:rPr b="1" sz="1600">
-                <a:solidFill>
-                  <a:srgbClr val="0F172A"/>
-                </a:solidFill>
-                <a:latin typeface="Segoe UI"/>
-              </a:rPr>
-              <a:t>• Tóm tắt đóng góp: </a:t>
-            </a:r>
-            <a:r>
-              <a:rPr b="0" sz="1600">
-                <a:solidFill>
-                  <a:srgbClr val="334155"/>
-                </a:solidFill>
-                <a:latin typeface="Segoe UI"/>
-              </a:rPr>
-              <a:t>Xác lập ranh giới toán học X = S || U; phân tích bề mặt 5 trục; chạy thực nghiệm độc lập 1.579 mẫu; đề xuất kiến trúc Two-Tier P95 &lt; 22ms Zero-GPU.</a:t>
-            </a:r>
-          </a:p>
-          <a:p>
-            <a:pPr>
-              <a:spcAft>
-                <a:spcPts val="600"/>
-              </a:spcAft>
-            </a:pPr>
-            <a:r>
-              <a:rPr b="1" sz="1600">
-                <a:solidFill>
-                  <a:srgbClr val="0F172A"/>
-                </a:solidFill>
-                <a:latin typeface="Segoe UI"/>
-              </a:rPr>
-              <a:t>• Cam kết đồ án: </a:t>
-            </a:r>
-            <a:r>
-              <a:rPr b="0" sz="1600">
-                <a:solidFill>
-                  <a:srgbClr val="334155"/>
-                </a:solidFill>
-                <a:latin typeface="Segoe UI"/>
-              </a:rPr>
-              <a:t>Toàn bộ mã nguồn, phòng lab đo đạc và tài liệu đều tuân thủ nghiêm ngặt tính liêm chính học thuật và sẵn sàng cho Review 2.</a:t>
-            </a:r>
-          </a:p>
-          <a:p>
-            <a:pPr>
-              <a:spcAft>
-                <a:spcPts val="600"/>
-              </a:spcAft>
-            </a:pPr>
-            <a:r>
-              <a:rPr b="1" sz="1600">
-                <a:solidFill>
-                  <a:srgbClr val="0284C7"/>
-                </a:solidFill>
-                <a:latin typeface="Segoe UI"/>
-              </a:rPr>
-              <a:t>• Kính mong: </a:t>
-            </a:r>
-            <a:r>
-              <a:rPr b="0" sz="1600">
-                <a:solidFill>
-                  <a:srgbClr val="334155"/>
-                </a:solidFill>
-                <a:latin typeface="Segoe UI"/>
-              </a:rPr>
-              <a:t>Nhóm rất mong tiếp tục nhận được những ý kiến chỉ đạo quý báu từ Thầy để hoàn thiện sản phẩm ở các giai đoạn tiếp theo!</a:t>
+              <a:t>TRÂN TRỌNG CẢM ƠN THẦY VÀ HỘI ĐỒNG. Đóng góp hiện tại gồm phân loại mối đe dọa, kiểm toán nguồn dữ liệu và các baseline có hồ sơ truy vết. Cascade PI-Guard vẫn là đề xuất; chưa có kết quả hệ thống.</a:t>
             </a:r>
           </a:p>
         </p:txBody>
@@ -21521,7 +13040,7 @@
           </a:fontRef>
         </p:style>
         <p:txBody>
-          <a:bodyPr rtlCol="0" anchor="ctr" wrap="square" lIns="256032" tIns="256032" rIns="256032"/>
+          <a:bodyPr wrap="square" lIns="256032" tIns="256032" rIns="256032" rtlCol="0" anchor="ctr"/>
           <a:lstStyle/>
           <a:p>
             <a:pPr algn="ctr">
@@ -21535,107 +13054,7 @@
                   <a:srgbClr val="0284C7"/>
                 </a:solidFill>
               </a:rPr>
-              <a:t>YÊU CẦU KỸ THUẬT 1: ĐỘ TRỄ CỰC THẤP (LOW LATENCY)</a:t>
-            </a:r>
-          </a:p>
-          <a:p>
-            <a:pPr>
-              <a:spcAft>
-                <a:spcPts val="600"/>
-              </a:spcAft>
-            </a:pPr>
-            <a:r>
-              <a:rPr b="1" sz="1600">
-                <a:solidFill>
-                  <a:srgbClr val="0F172A"/>
-                </a:solidFill>
-                <a:latin typeface="Segoe UI"/>
-              </a:rPr>
-              <a:t>• Chỉ tiêu định lượng: </a:t>
-            </a:r>
-            <a:r>
-              <a:rPr b="0" sz="1600">
-                <a:solidFill>
-                  <a:srgbClr val="334155"/>
-                </a:solidFill>
-                <a:latin typeface="Segoe UI"/>
-              </a:rPr>
-              <a:t>Độ trễ phân vị P95 &lt; 22ms trên phần cứng CPU thông thường (chuẩn P95 &lt; 30ms).</a:t>
-            </a:r>
-          </a:p>
-          <a:p>
-            <a:pPr>
-              <a:spcAft>
-                <a:spcPts val="600"/>
-              </a:spcAft>
-            </a:pPr>
-            <a:r>
-              <a:rPr b="1" sz="1600">
-                <a:solidFill>
-                  <a:srgbClr val="0F172A"/>
-                </a:solidFill>
-                <a:latin typeface="Segoe UI"/>
-              </a:rPr>
-              <a:t>• Cơ chế vận hành: </a:t>
-            </a:r>
-            <a:r>
-              <a:rPr b="0" sz="1600">
-                <a:solidFill>
-                  <a:srgbClr val="334155"/>
-                </a:solidFill>
-                <a:latin typeface="Segoe UI"/>
-              </a:rPr>
-              <a:t>Hoạt động như một Inline Gateway chặn tại cửa ngõ; không gây tắc nghẽn luồng truy vấn.</a:t>
-            </a:r>
-          </a:p>
-          <a:p>
-            <a:pPr>
-              <a:spcAft>
-                <a:spcPts val="600"/>
-              </a:spcAft>
-            </a:pPr>
-            <a:r>
-              <a:rPr b="1" sz="1600">
-                <a:solidFill>
-                  <a:srgbClr val="D97706"/>
-                </a:solidFill>
-                <a:latin typeface="Segoe UI"/>
-              </a:rPr>
-              <a:t>• Lý do khoa học: </a:t>
-            </a:r>
-            <a:r>
-              <a:rPr b="0" sz="1600">
-                <a:solidFill>
-                  <a:srgbClr val="334155"/>
-                </a:solidFill>
-                <a:latin typeface="Segoe UI"/>
-              </a:rPr>
-              <a:t>Nếu dùng LLM-as-a-Judge làm rào chắn, độ trễ tăng thêm hàng giây (&gt;2000ms), làm tê liệt ứng dụng chat nghiệp vụ.</a:t>
-            </a:r>
-          </a:p>
-          <a:p>
-            <a:pPr>
-              <a:spcAft>
-                <a:spcPts val="600"/>
-              </a:spcAft>
-            </a:pPr>
-            <a:r>
-              <a:rPr b="1" sz="1600">
-                <a:solidFill>
-                  <a:srgbClr val="059669"/>
-                </a:solidFill>
-                <a:latin typeface="Segoe UI"/>
-              </a:rPr>
-              <a:t>-&gt; Cam kết kỹ thuật: </a:t>
-            </a:r>
-            <a:r>
-              <a:rPr b="0" sz="1600">
-                <a:solidFill>
-                  <a:srgbClr val="334155"/>
-                </a:solidFill>
-                <a:latin typeface="Segoe UI"/>
-              </a:rPr>
-              <a:t>Bảo toàn 100% thông lượng của hệ thống đích; người dùng không cảm nhận thấy độ trễ bổ sung!</a:t>
+              <a:t>YÊU CẦU 1: MỤC TIÊU P95. Độ trễ phải được đo theo protocol và phần cứng được ghi rõ. Đây là mục tiêu dự án; chưa có P95 của cascade PI-Guard.</a:t>
             </a:r>
           </a:p>
         </p:txBody>
@@ -21678,7 +13097,7 @@
           </a:fontRef>
         </p:style>
         <p:txBody>
-          <a:bodyPr rtlCol="0" anchor="ctr" wrap="square" lIns="256032" tIns="256032" rIns="256032"/>
+          <a:bodyPr wrap="square" lIns="256032" tIns="256032" rIns="256032" rtlCol="0" anchor="ctr"/>
           <a:lstStyle/>
           <a:p>
             <a:pPr algn="ctr">
@@ -21692,107 +13111,7 @@
                   <a:srgbClr val="059669"/>
                 </a:solidFill>
               </a:rPr>
-              <a:t>YÊU CẦU KỸ THUẬT 2: KIỂM SOÁT TỶ LỆ CHẶN NHẦM (FPR &lt; 1.5%)</a:t>
-            </a:r>
-          </a:p>
-          <a:p>
-            <a:pPr>
-              <a:spcAft>
-                <a:spcPts val="600"/>
-              </a:spcAft>
-            </a:pPr>
-            <a:r>
-              <a:rPr b="1" sz="1600">
-                <a:solidFill>
-                  <a:srgbClr val="0F172A"/>
-                </a:solidFill>
-                <a:latin typeface="Segoe UI"/>
-              </a:rPr>
-              <a:t>• Chỉ tiêu định lượng: </a:t>
-            </a:r>
-            <a:r>
-              <a:rPr b="0" sz="1600">
-                <a:solidFill>
-                  <a:srgbClr val="334155"/>
-                </a:solidFill>
-                <a:latin typeface="Segoe UI"/>
-              </a:rPr>
-              <a:t>Tỷ lệ chặn nhầm (False Positive Rate - FPR) trên câu hỏi lành tính phải được kiểm soát nghiêm ngặt FPR &lt; 1.5%.</a:t>
-            </a:r>
-          </a:p>
-          <a:p>
-            <a:pPr>
-              <a:spcAft>
-                <a:spcPts val="600"/>
-              </a:spcAft>
-            </a:pPr>
-            <a:r>
-              <a:rPr b="1" sz="1600">
-                <a:solidFill>
-                  <a:srgbClr val="0F172A"/>
-                </a:solidFill>
-                <a:latin typeface="Segoe UI"/>
-              </a:rPr>
-              <a:t>• Chống phòng thủ thái quá: </a:t>
-            </a:r>
-            <a:r>
-              <a:rPr b="0" sz="1600">
-                <a:solidFill>
-                  <a:srgbClr val="334155"/>
-                </a:solidFill>
-                <a:latin typeface="Segoe UI"/>
-              </a:rPr>
-              <a:t>Triệt tiêu hiện tượng Over-defense (như mô hình Ayub MiniLM chặn nhầm tới 58.4% câu hỏi thường).</a:t>
-            </a:r>
-          </a:p>
-          <a:p>
-            <a:pPr>
-              <a:spcAft>
-                <a:spcPts val="600"/>
-              </a:spcAft>
-            </a:pPr>
-            <a:r>
-              <a:rPr b="1" sz="1600">
-                <a:solidFill>
-                  <a:srgbClr val="D97706"/>
-                </a:solidFill>
-                <a:latin typeface="Segoe UI"/>
-              </a:rPr>
-              <a:t>• Giải pháp kỹ thuật: </a:t>
-            </a:r>
-            <a:r>
-              <a:rPr b="0" sz="1600">
-                <a:solidFill>
-                  <a:srgbClr val="334155"/>
-                </a:solidFill>
-                <a:latin typeface="Segoe UI"/>
-              </a:rPr>
-              <a:t>Ứng dụng thuật toán MOF (Mitigating Overdefense for Free) và cơ chế định tuyến bất định tại Tầng 2.</a:t>
-            </a:r>
-          </a:p>
-          <a:p>
-            <a:pPr>
-              <a:spcAft>
-                <a:spcPts val="600"/>
-              </a:spcAft>
-            </a:pPr>
-            <a:r>
-              <a:rPr b="1" sz="1600">
-                <a:solidFill>
-                  <a:srgbClr val="059669"/>
-                </a:solidFill>
-                <a:latin typeface="Segoe UI"/>
-              </a:rPr>
-              <a:t>-&gt; Bảo toàn nghiệp vụ: </a:t>
-            </a:r>
-            <a:r>
-              <a:rPr b="0" sz="1600">
-                <a:solidFill>
-                  <a:srgbClr val="334155"/>
-                </a:solidFill>
-                <a:latin typeface="Segoe UI"/>
-              </a:rPr>
-              <a:t>Người dùng thảo luận về lập trình, an ninh, trích dẫn tài liệu không bao giờ bị chặn oan!</a:t>
+              <a:t>YÊU CẦU 2: MỤC TIÊU KIỂM SOÁT FPR. FPR cần đo trên tập benign có provenance. Đây là mục tiêu dự án; chưa có FPR của cascade PI-Guard.</a:t>
             </a:r>
           </a:p>
         </p:txBody>
